--- a/Woche_2_DesignPatterns_I/02_Design_Patterns_I_v01.pptx
+++ b/Woche_2_DesignPatterns_I/02_Design_Patterns_I_v01.pptx
@@ -4,6 +4,9 @@
   <p:sldMasterIdLst>
     <p:sldMasterId id="2147483750" r:id="rId1"/>
   </p:sldMasterIdLst>
+  <p:notesMasterIdLst>
+    <p:notesMasterId r:id="rId54"/>
+  </p:notesMasterIdLst>
   <p:sldIdLst>
     <p:sldId id="256" r:id="rId2"/>
     <p:sldId id="257" r:id="rId3"/>
@@ -170,16 +173,11 @@
         </p15:guide>
       </p15:sldGuideLst>
     </p:ext>
+    <p:ext uri="{2D200454-40CA-4A62-9FC3-DE9A4176ACB9}">
+      <p15:notesGuideLst xmlns:p15="http://schemas.microsoft.com/office/powerpoint/2012/main"/>
+    </p:ext>
   </p:extLst>
 </p:presentation>
-</file>
-
-<file path=ppt/revisionInfo.xml><?xml version="1.0" encoding="utf-8"?>
-<p1510:revInfo xmlns:a="http://schemas.openxmlformats.org/drawingml/2006/main" xmlns:r="http://schemas.openxmlformats.org/officeDocument/2006/relationships" xmlns:p1510="http://schemas.microsoft.com/office/powerpoint/2015/10/main">
-  <p1510:revLst>
-    <p1510:client id="{FA2062A3-A281-4DB5-BC3C-2D65F072144E}" v="15" dt="2026-03-23T16:17:48.568"/>
-  </p1510:revLst>
-</p1510:revInfo>
 </file>
 
 <file path=ppt/changesInfos/changesInfo1.xml><?xml version="1.0" encoding="utf-8"?>
@@ -1363,8 +1361,8 @@
   </pc:docChgLst>
   <pc:docChgLst>
     <pc:chgData name="Peter Bernhardt" userId="f2333933-0b12-4d6e-972f-f87625423892" providerId="ADAL" clId="{34DA1458-4058-4912-885C-C6A06A12728D}"/>
-    <pc:docChg chg="undo custSel addSld delSld modSld">
-      <pc:chgData name="Peter Bernhardt" userId="f2333933-0b12-4d6e-972f-f87625423892" providerId="ADAL" clId="{34DA1458-4058-4912-885C-C6A06A12728D}" dt="2026-03-23T16:19:38.797" v="713" actId="313"/>
+    <pc:docChg chg="undo custSel addSld delSld modSld modNotesMaster">
+      <pc:chgData name="Peter Bernhardt" userId="f2333933-0b12-4d6e-972f-f87625423892" providerId="ADAL" clId="{34DA1458-4058-4912-885C-C6A06A12728D}" dt="2026-03-26T14:45:12.464" v="720" actId="6549"/>
       <pc:docMkLst>
         <pc:docMk/>
       </pc:docMkLst>
@@ -1398,30 +1396,6 @@
             <ac:spMk id="4" creationId="{00000000-0000-0000-0000-000000000000}"/>
           </ac:spMkLst>
         </pc:spChg>
-        <pc:spChg chg="add del mod">
-          <ac:chgData name="Peter Bernhardt" userId="f2333933-0b12-4d6e-972f-f87625423892" providerId="ADAL" clId="{34DA1458-4058-4912-885C-C6A06A12728D}" dt="2026-03-23T15:45:36.362" v="2" actId="6264"/>
-          <ac:spMkLst>
-            <pc:docMk/>
-            <pc:sldMk cId="0" sldId="256"/>
-            <ac:spMk id="5" creationId="{624D3DAE-8CE2-C218-1590-8B3F37EE9D8D}"/>
-          </ac:spMkLst>
-        </pc:spChg>
-        <pc:spChg chg="add del mod">
-          <ac:chgData name="Peter Bernhardt" userId="f2333933-0b12-4d6e-972f-f87625423892" providerId="ADAL" clId="{34DA1458-4058-4912-885C-C6A06A12728D}" dt="2026-03-23T15:45:36.362" v="2" actId="6264"/>
-          <ac:spMkLst>
-            <pc:docMk/>
-            <pc:sldMk cId="0" sldId="256"/>
-            <ac:spMk id="6" creationId="{79E0EADA-C36D-5EB1-7378-A76F59CD203F}"/>
-          </ac:spMkLst>
-        </pc:spChg>
-        <pc:spChg chg="add del mod">
-          <ac:chgData name="Peter Bernhardt" userId="f2333933-0b12-4d6e-972f-f87625423892" providerId="ADAL" clId="{34DA1458-4058-4912-885C-C6A06A12728D}" dt="2026-03-23T15:45:36.362" v="2" actId="6264"/>
-          <ac:spMkLst>
-            <pc:docMk/>
-            <pc:sldMk cId="0" sldId="256"/>
-            <ac:spMk id="7" creationId="{2C27C8C0-6E99-3D43-93E0-D6FBF1D21D6F}"/>
-          </ac:spMkLst>
-        </pc:spChg>
       </pc:sldChg>
       <pc:sldChg chg="addSp delSp modSp add mod chgLayout">
         <pc:chgData name="Peter Bernhardt" userId="f2333933-0b12-4d6e-972f-f87625423892" providerId="ADAL" clId="{34DA1458-4058-4912-885C-C6A06A12728D}" dt="2026-03-23T15:45:59.673" v="36" actId="6264"/>
@@ -1435,14 +1409,6 @@
             <pc:docMk/>
             <pc:sldMk cId="0" sldId="257"/>
             <ac:spMk id="2" creationId="{00000000-0000-0000-0000-000000000000}"/>
-          </ac:spMkLst>
-        </pc:spChg>
-        <pc:spChg chg="add del mod">
-          <ac:chgData name="Peter Bernhardt" userId="f2333933-0b12-4d6e-972f-f87625423892" providerId="ADAL" clId="{34DA1458-4058-4912-885C-C6A06A12728D}" dt="2026-03-23T15:45:59.673" v="36" actId="6264"/>
-          <ac:spMkLst>
-            <pc:docMk/>
-            <pc:sldMk cId="0" sldId="257"/>
-            <ac:spMk id="3" creationId="{2459CFCD-647C-0E37-FF3A-936EF05642DF}"/>
           </ac:spMkLst>
         </pc:spChg>
         <pc:spChg chg="add mod ord">
@@ -1474,22 +1440,6 @@
             <pc:docMk/>
             <pc:sldMk cId="0" sldId="258"/>
             <ac:spMk id="3" creationId="{00000000-0000-0000-0000-000000000000}"/>
-          </ac:spMkLst>
-        </pc:spChg>
-        <pc:spChg chg="add del mod">
-          <ac:chgData name="Peter Bernhardt" userId="f2333933-0b12-4d6e-972f-f87625423892" providerId="ADAL" clId="{34DA1458-4058-4912-885C-C6A06A12728D}" dt="2026-03-23T15:46:12.382" v="38" actId="6264"/>
-          <ac:spMkLst>
-            <pc:docMk/>
-            <pc:sldMk cId="0" sldId="258"/>
-            <ac:spMk id="4" creationId="{8CE6E205-D499-4B71-F72B-CE1C212853BB}"/>
-          </ac:spMkLst>
-        </pc:spChg>
-        <pc:spChg chg="add del mod">
-          <ac:chgData name="Peter Bernhardt" userId="f2333933-0b12-4d6e-972f-f87625423892" providerId="ADAL" clId="{34DA1458-4058-4912-885C-C6A06A12728D}" dt="2026-03-23T15:46:12.382" v="38" actId="6264"/>
-          <ac:spMkLst>
-            <pc:docMk/>
-            <pc:sldMk cId="0" sldId="258"/>
-            <ac:spMk id="5" creationId="{C636CB44-86C4-49FC-DE4A-1723E65F32B3}"/>
           </ac:spMkLst>
         </pc:spChg>
       </pc:sldChg>
@@ -1543,14 +1493,6 @@
             <ac:spMk id="2" creationId="{00000000-0000-0000-0000-000000000000}"/>
           </ac:spMkLst>
         </pc:spChg>
-        <pc:spChg chg="add del mod">
-          <ac:chgData name="Peter Bernhardt" userId="f2333933-0b12-4d6e-972f-f87625423892" providerId="ADAL" clId="{34DA1458-4058-4912-885C-C6A06A12728D}" dt="2026-03-23T15:46:25.834" v="39" actId="6264"/>
-          <ac:spMkLst>
-            <pc:docMk/>
-            <pc:sldMk cId="0" sldId="263"/>
-            <ac:spMk id="3" creationId="{0389FF37-5B64-0F5C-651E-8583111B84D6}"/>
-          </ac:spMkLst>
-        </pc:spChg>
         <pc:spChg chg="add mod ord">
           <ac:chgData name="Peter Bernhardt" userId="f2333933-0b12-4d6e-972f-f87625423892" providerId="ADAL" clId="{34DA1458-4058-4912-885C-C6A06A12728D}" dt="2026-03-23T15:46:25.834" v="39" actId="6264"/>
           <ac:spMkLst>
@@ -1574,13 +1516,6 @@
             <ac:spMk id="3" creationId="{00000000-0000-0000-0000-000000000000}"/>
           </ac:spMkLst>
         </pc:spChg>
-      </pc:sldChg>
-      <pc:sldChg chg="add del">
-        <pc:chgData name="Peter Bernhardt" userId="f2333933-0b12-4d6e-972f-f87625423892" providerId="ADAL" clId="{34DA1458-4058-4912-885C-C6A06A12728D}" dt="2026-03-23T15:50:20.336" v="75" actId="47"/>
-        <pc:sldMkLst>
-          <pc:docMk/>
-          <pc:sldMk cId="0" sldId="265"/>
-        </pc:sldMkLst>
       </pc:sldChg>
       <pc:sldChg chg="modSp add mod">
         <pc:chgData name="Peter Bernhardt" userId="f2333933-0b12-4d6e-972f-f87625423892" providerId="ADAL" clId="{34DA1458-4058-4912-885C-C6A06A12728D}" dt="2026-03-23T15:50:30.653" v="76" actId="12"/>
@@ -1678,14 +1613,6 @@
             <ac:spMk id="2" creationId="{00000000-0000-0000-0000-000000000000}"/>
           </ac:spMkLst>
         </pc:spChg>
-        <pc:spChg chg="add del mod">
-          <ac:chgData name="Peter Bernhardt" userId="f2333933-0b12-4d6e-972f-f87625423892" providerId="ADAL" clId="{34DA1458-4058-4912-885C-C6A06A12728D}" dt="2026-03-23T15:46:49.145" v="40" actId="6264"/>
-          <ac:spMkLst>
-            <pc:docMk/>
-            <pc:sldMk cId="0" sldId="272"/>
-            <ac:spMk id="3" creationId="{7E946998-6C48-255C-8E09-453218F4A962}"/>
-          </ac:spMkLst>
-        </pc:spChg>
         <pc:spChg chg="add mod ord">
           <ac:chgData name="Peter Bernhardt" userId="f2333933-0b12-4d6e-972f-f87625423892" providerId="ADAL" clId="{34DA1458-4058-4912-885C-C6A06A12728D}" dt="2026-03-23T15:46:49.145" v="40" actId="6264"/>
           <ac:spMkLst>
@@ -1710,12 +1637,20 @@
           </ac:spMkLst>
         </pc:spChg>
       </pc:sldChg>
-      <pc:sldChg chg="add">
-        <pc:chgData name="Peter Bernhardt" userId="f2333933-0b12-4d6e-972f-f87625423892" providerId="ADAL" clId="{34DA1458-4058-4912-885C-C6A06A12728D}" dt="2026-03-23T15:44:58.832" v="0"/>
+      <pc:sldChg chg="modSp add mod">
+        <pc:chgData name="Peter Bernhardt" userId="f2333933-0b12-4d6e-972f-f87625423892" providerId="ADAL" clId="{34DA1458-4058-4912-885C-C6A06A12728D}" dt="2026-03-26T14:45:12.464" v="720" actId="6549"/>
         <pc:sldMkLst>
           <pc:docMk/>
           <pc:sldMk cId="0" sldId="274"/>
         </pc:sldMkLst>
+        <pc:spChg chg="mod">
+          <ac:chgData name="Peter Bernhardt" userId="f2333933-0b12-4d6e-972f-f87625423892" providerId="ADAL" clId="{34DA1458-4058-4912-885C-C6A06A12728D}" dt="2026-03-26T14:45:12.464" v="720" actId="6549"/>
+          <ac:spMkLst>
+            <pc:docMk/>
+            <pc:sldMk cId="0" sldId="274"/>
+            <ac:spMk id="3" creationId="{00000000-0000-0000-0000-000000000000}"/>
+          </ac:spMkLst>
+        </pc:spChg>
       </pc:sldChg>
       <pc:sldChg chg="modSp add mod">
         <pc:chgData name="Peter Bernhardt" userId="f2333933-0b12-4d6e-972f-f87625423892" providerId="ADAL" clId="{34DA1458-4058-4912-885C-C6A06A12728D}" dt="2026-03-23T15:55:09.980" v="112" actId="20577"/>
@@ -1815,13 +1750,6 @@
           </ac:spMkLst>
         </pc:spChg>
       </pc:sldChg>
-      <pc:sldChg chg="add del">
-        <pc:chgData name="Peter Bernhardt" userId="f2333933-0b12-4d6e-972f-f87625423892" providerId="ADAL" clId="{34DA1458-4058-4912-885C-C6A06A12728D}" dt="2026-03-23T15:58:06.659" v="188" actId="47"/>
-        <pc:sldMkLst>
-          <pc:docMk/>
-          <pc:sldMk cId="0" sldId="281"/>
-        </pc:sldMkLst>
-      </pc:sldChg>
       <pc:sldChg chg="modSp add mod">
         <pc:chgData name="Peter Bernhardt" userId="f2333933-0b12-4d6e-972f-f87625423892" providerId="ADAL" clId="{34DA1458-4058-4912-885C-C6A06A12728D}" dt="2026-03-23T15:59:04.673" v="212" actId="20577"/>
         <pc:sldMkLst>
@@ -1896,14 +1824,6 @@
             <ac:spMk id="2" creationId="{00000000-0000-0000-0000-000000000000}"/>
           </ac:spMkLst>
         </pc:spChg>
-        <pc:spChg chg="add del mod">
-          <ac:chgData name="Peter Bernhardt" userId="f2333933-0b12-4d6e-972f-f87625423892" providerId="ADAL" clId="{34DA1458-4058-4912-885C-C6A06A12728D}" dt="2026-03-23T15:47:27.716" v="43" actId="6264"/>
-          <ac:spMkLst>
-            <pc:docMk/>
-            <pc:sldMk cId="0" sldId="286"/>
-            <ac:spMk id="3" creationId="{20890968-8EB3-A5BE-3021-E6298AEF5D71}"/>
-          </ac:spMkLst>
-        </pc:spChg>
         <pc:spChg chg="add mod ord">
           <ac:chgData name="Peter Bernhardt" userId="f2333933-0b12-4d6e-972f-f87625423892" providerId="ADAL" clId="{34DA1458-4058-4912-885C-C6A06A12728D}" dt="2026-03-23T15:47:27.716" v="43" actId="6264"/>
           <ac:spMkLst>
@@ -1939,21 +1859,6 @@
           <ac:spMkLst>
             <pc:docMk/>
             <pc:sldMk cId="0" sldId="288"/>
-            <ac:spMk id="3" creationId="{00000000-0000-0000-0000-000000000000}"/>
-          </ac:spMkLst>
-        </pc:spChg>
-      </pc:sldChg>
-      <pc:sldChg chg="modSp add del mod">
-        <pc:chgData name="Peter Bernhardt" userId="f2333933-0b12-4d6e-972f-f87625423892" providerId="ADAL" clId="{34DA1458-4058-4912-885C-C6A06A12728D}" dt="2026-03-23T16:02:34.871" v="270" actId="47"/>
-        <pc:sldMkLst>
-          <pc:docMk/>
-          <pc:sldMk cId="0" sldId="289"/>
-        </pc:sldMkLst>
-        <pc:spChg chg="mod">
-          <ac:chgData name="Peter Bernhardt" userId="f2333933-0b12-4d6e-972f-f87625423892" providerId="ADAL" clId="{34DA1458-4058-4912-885C-C6A06A12728D}" dt="2026-03-23T16:01:33.398" v="251" actId="20577"/>
-          <ac:spMkLst>
-            <pc:docMk/>
-            <pc:sldMk cId="0" sldId="289"/>
             <ac:spMk id="3" creationId="{00000000-0000-0000-0000-000000000000}"/>
           </ac:spMkLst>
         </pc:spChg>
@@ -2037,14 +1942,6 @@
             <pc:docMk/>
             <pc:sldMk cId="0" sldId="295"/>
             <ac:spMk id="2" creationId="{00000000-0000-0000-0000-000000000000}"/>
-          </ac:spMkLst>
-        </pc:spChg>
-        <pc:spChg chg="add del mod">
-          <ac:chgData name="Peter Bernhardt" userId="f2333933-0b12-4d6e-972f-f87625423892" providerId="ADAL" clId="{34DA1458-4058-4912-885C-C6A06A12728D}" dt="2026-03-23T15:47:43.309" v="44" actId="6264"/>
-          <ac:spMkLst>
-            <pc:docMk/>
-            <pc:sldMk cId="0" sldId="295"/>
-            <ac:spMk id="3" creationId="{27538919-EE44-119C-A865-CD31AD824647}"/>
           </ac:spMkLst>
         </pc:spChg>
         <pc:spChg chg="add mod ord">
@@ -2259,14 +2156,6 @@
             <ac:spMk id="2" creationId="{00000000-0000-0000-0000-000000000000}"/>
           </ac:spMkLst>
         </pc:spChg>
-        <pc:spChg chg="add del mod">
-          <ac:chgData name="Peter Bernhardt" userId="f2333933-0b12-4d6e-972f-f87625423892" providerId="ADAL" clId="{34DA1458-4058-4912-885C-C6A06A12728D}" dt="2026-03-23T15:48:00.223" v="45" actId="6264"/>
-          <ac:spMkLst>
-            <pc:docMk/>
-            <pc:sldMk cId="0" sldId="307"/>
-            <ac:spMk id="3" creationId="{16B49865-1B3D-2964-133E-3263D1477367}"/>
-          </ac:spMkLst>
-        </pc:spChg>
         <pc:spChg chg="add mod ord">
           <ac:chgData name="Peter Bernhardt" userId="f2333933-0b12-4d6e-972f-f87625423892" providerId="ADAL" clId="{34DA1458-4058-4912-885C-C6A06A12728D}" dt="2026-03-23T15:48:00.223" v="45" actId="6264"/>
           <ac:spMkLst>
@@ -2313,22 +2202,6 @@
             <ac:spMk id="3" creationId="{00000000-0000-0000-0000-000000000000}"/>
           </ac:spMkLst>
         </pc:spChg>
-        <pc:spChg chg="add del mod">
-          <ac:chgData name="Peter Bernhardt" userId="f2333933-0b12-4d6e-972f-f87625423892" providerId="ADAL" clId="{34DA1458-4058-4912-885C-C6A06A12728D}" dt="2026-03-23T15:48:09.668" v="47" actId="6264"/>
-          <ac:spMkLst>
-            <pc:docMk/>
-            <pc:sldMk cId="0" sldId="309"/>
-            <ac:spMk id="4" creationId="{6B177639-A092-7C58-CAF4-8F3778E12778}"/>
-          </ac:spMkLst>
-        </pc:spChg>
-        <pc:spChg chg="add del mod">
-          <ac:chgData name="Peter Bernhardt" userId="f2333933-0b12-4d6e-972f-f87625423892" providerId="ADAL" clId="{34DA1458-4058-4912-885C-C6A06A12728D}" dt="2026-03-23T15:48:09.668" v="47" actId="6264"/>
-          <ac:spMkLst>
-            <pc:docMk/>
-            <pc:sldMk cId="0" sldId="309"/>
-            <ac:spMk id="5" creationId="{602932FE-ABF9-8456-6F43-0905FF9E2057}"/>
-          </ac:spMkLst>
-        </pc:spChg>
       </pc:sldChg>
       <pc:sldChg chg="modSp add mod">
         <pc:chgData name="Peter Bernhardt" userId="f2333933-0b12-4d6e-972f-f87625423892" providerId="ADAL" clId="{34DA1458-4058-4912-885C-C6A06A12728D}" dt="2026-03-23T15:59:40.694" v="234" actId="20577"/>
@@ -2353,247 +2226,323 @@
           </ac:spMkLst>
         </pc:spChg>
       </pc:sldChg>
-      <pc:sldChg chg="del">
-        <pc:chgData name="Peter Bernhardt" userId="f2333933-0b12-4d6e-972f-f87625423892" providerId="ADAL" clId="{34DA1458-4058-4912-885C-C6A06A12728D}" dt="2026-03-23T15:48:38.961" v="49" actId="47"/>
-        <pc:sldMkLst>
-          <pc:docMk/>
-          <pc:sldMk cId="0" sldId="312"/>
-        </pc:sldMkLst>
-      </pc:sldChg>
-      <pc:sldChg chg="del">
-        <pc:chgData name="Peter Bernhardt" userId="f2333933-0b12-4d6e-972f-f87625423892" providerId="ADAL" clId="{34DA1458-4058-4912-885C-C6A06A12728D}" dt="2026-03-23T15:45:17.014" v="1" actId="47"/>
-        <pc:sldMkLst>
-          <pc:docMk/>
-          <pc:sldMk cId="0" sldId="313"/>
-        </pc:sldMkLst>
-      </pc:sldChg>
-      <pc:sldChg chg="del">
-        <pc:chgData name="Peter Bernhardt" userId="f2333933-0b12-4d6e-972f-f87625423892" providerId="ADAL" clId="{34DA1458-4058-4912-885C-C6A06A12728D}" dt="2026-03-23T15:45:17.014" v="1" actId="47"/>
-        <pc:sldMkLst>
-          <pc:docMk/>
-          <pc:sldMk cId="0" sldId="314"/>
-        </pc:sldMkLst>
-      </pc:sldChg>
-      <pc:sldChg chg="del">
-        <pc:chgData name="Peter Bernhardt" userId="f2333933-0b12-4d6e-972f-f87625423892" providerId="ADAL" clId="{34DA1458-4058-4912-885C-C6A06A12728D}" dt="2026-03-23T15:45:17.014" v="1" actId="47"/>
-        <pc:sldMkLst>
-          <pc:docMk/>
-          <pc:sldMk cId="0" sldId="315"/>
-        </pc:sldMkLst>
-      </pc:sldChg>
-      <pc:sldChg chg="del">
-        <pc:chgData name="Peter Bernhardt" userId="f2333933-0b12-4d6e-972f-f87625423892" providerId="ADAL" clId="{34DA1458-4058-4912-885C-C6A06A12728D}" dt="2026-03-23T15:45:17.014" v="1" actId="47"/>
-        <pc:sldMkLst>
-          <pc:docMk/>
-          <pc:sldMk cId="0" sldId="316"/>
-        </pc:sldMkLst>
-      </pc:sldChg>
-      <pc:sldChg chg="del">
-        <pc:chgData name="Peter Bernhardt" userId="f2333933-0b12-4d6e-972f-f87625423892" providerId="ADAL" clId="{34DA1458-4058-4912-885C-C6A06A12728D}" dt="2026-03-23T15:45:17.014" v="1" actId="47"/>
-        <pc:sldMkLst>
-          <pc:docMk/>
-          <pc:sldMk cId="0" sldId="317"/>
-        </pc:sldMkLst>
-      </pc:sldChg>
-      <pc:sldChg chg="del">
-        <pc:chgData name="Peter Bernhardt" userId="f2333933-0b12-4d6e-972f-f87625423892" providerId="ADAL" clId="{34DA1458-4058-4912-885C-C6A06A12728D}" dt="2026-03-23T15:45:17.014" v="1" actId="47"/>
-        <pc:sldMkLst>
-          <pc:docMk/>
-          <pc:sldMk cId="0" sldId="318"/>
-        </pc:sldMkLst>
-      </pc:sldChg>
-      <pc:sldChg chg="del">
-        <pc:chgData name="Peter Bernhardt" userId="f2333933-0b12-4d6e-972f-f87625423892" providerId="ADAL" clId="{34DA1458-4058-4912-885C-C6A06A12728D}" dt="2026-03-23T15:45:17.014" v="1" actId="47"/>
-        <pc:sldMkLst>
-          <pc:docMk/>
-          <pc:sldMk cId="0" sldId="319"/>
-        </pc:sldMkLst>
-      </pc:sldChg>
-      <pc:sldChg chg="del">
-        <pc:chgData name="Peter Bernhardt" userId="f2333933-0b12-4d6e-972f-f87625423892" providerId="ADAL" clId="{34DA1458-4058-4912-885C-C6A06A12728D}" dt="2026-03-23T15:45:17.014" v="1" actId="47"/>
-        <pc:sldMkLst>
-          <pc:docMk/>
-          <pc:sldMk cId="0" sldId="320"/>
-        </pc:sldMkLst>
-      </pc:sldChg>
-      <pc:sldChg chg="del">
-        <pc:chgData name="Peter Bernhardt" userId="f2333933-0b12-4d6e-972f-f87625423892" providerId="ADAL" clId="{34DA1458-4058-4912-885C-C6A06A12728D}" dt="2026-03-23T15:45:17.014" v="1" actId="47"/>
-        <pc:sldMkLst>
-          <pc:docMk/>
-          <pc:sldMk cId="0" sldId="321"/>
-        </pc:sldMkLst>
-      </pc:sldChg>
-      <pc:sldChg chg="del">
-        <pc:chgData name="Peter Bernhardt" userId="f2333933-0b12-4d6e-972f-f87625423892" providerId="ADAL" clId="{34DA1458-4058-4912-885C-C6A06A12728D}" dt="2026-03-23T15:45:17.014" v="1" actId="47"/>
-        <pc:sldMkLst>
-          <pc:docMk/>
-          <pc:sldMk cId="0" sldId="322"/>
-        </pc:sldMkLst>
-      </pc:sldChg>
-      <pc:sldChg chg="del">
-        <pc:chgData name="Peter Bernhardt" userId="f2333933-0b12-4d6e-972f-f87625423892" providerId="ADAL" clId="{34DA1458-4058-4912-885C-C6A06A12728D}" dt="2026-03-23T15:45:17.014" v="1" actId="47"/>
-        <pc:sldMkLst>
-          <pc:docMk/>
-          <pc:sldMk cId="0" sldId="323"/>
-        </pc:sldMkLst>
-      </pc:sldChg>
-      <pc:sldChg chg="del">
-        <pc:chgData name="Peter Bernhardt" userId="f2333933-0b12-4d6e-972f-f87625423892" providerId="ADAL" clId="{34DA1458-4058-4912-885C-C6A06A12728D}" dt="2026-03-23T15:45:17.014" v="1" actId="47"/>
-        <pc:sldMkLst>
-          <pc:docMk/>
-          <pc:sldMk cId="0" sldId="324"/>
-        </pc:sldMkLst>
-      </pc:sldChg>
-      <pc:sldChg chg="del">
-        <pc:chgData name="Peter Bernhardt" userId="f2333933-0b12-4d6e-972f-f87625423892" providerId="ADAL" clId="{34DA1458-4058-4912-885C-C6A06A12728D}" dt="2026-03-23T15:45:17.014" v="1" actId="47"/>
-        <pc:sldMkLst>
-          <pc:docMk/>
-          <pc:sldMk cId="0" sldId="325"/>
-        </pc:sldMkLst>
-      </pc:sldChg>
-      <pc:sldChg chg="del">
-        <pc:chgData name="Peter Bernhardt" userId="f2333933-0b12-4d6e-972f-f87625423892" providerId="ADAL" clId="{34DA1458-4058-4912-885C-C6A06A12728D}" dt="2026-03-23T15:45:17.014" v="1" actId="47"/>
-        <pc:sldMkLst>
-          <pc:docMk/>
-          <pc:sldMk cId="0" sldId="326"/>
-        </pc:sldMkLst>
-      </pc:sldChg>
-      <pc:sldChg chg="del">
-        <pc:chgData name="Peter Bernhardt" userId="f2333933-0b12-4d6e-972f-f87625423892" providerId="ADAL" clId="{34DA1458-4058-4912-885C-C6A06A12728D}" dt="2026-03-23T15:45:17.014" v="1" actId="47"/>
-        <pc:sldMkLst>
-          <pc:docMk/>
-          <pc:sldMk cId="0" sldId="327"/>
-        </pc:sldMkLst>
-      </pc:sldChg>
-      <pc:sldChg chg="del">
-        <pc:chgData name="Peter Bernhardt" userId="f2333933-0b12-4d6e-972f-f87625423892" providerId="ADAL" clId="{34DA1458-4058-4912-885C-C6A06A12728D}" dt="2026-03-23T15:45:17.014" v="1" actId="47"/>
-        <pc:sldMkLst>
-          <pc:docMk/>
-          <pc:sldMk cId="0" sldId="328"/>
-        </pc:sldMkLst>
-      </pc:sldChg>
-      <pc:sldChg chg="del">
-        <pc:chgData name="Peter Bernhardt" userId="f2333933-0b12-4d6e-972f-f87625423892" providerId="ADAL" clId="{34DA1458-4058-4912-885C-C6A06A12728D}" dt="2026-03-23T15:45:17.014" v="1" actId="47"/>
-        <pc:sldMkLst>
-          <pc:docMk/>
-          <pc:sldMk cId="0" sldId="329"/>
-        </pc:sldMkLst>
-      </pc:sldChg>
-      <pc:sldChg chg="del">
-        <pc:chgData name="Peter Bernhardt" userId="f2333933-0b12-4d6e-972f-f87625423892" providerId="ADAL" clId="{34DA1458-4058-4912-885C-C6A06A12728D}" dt="2026-03-23T15:45:17.014" v="1" actId="47"/>
-        <pc:sldMkLst>
-          <pc:docMk/>
-          <pc:sldMk cId="0" sldId="330"/>
-        </pc:sldMkLst>
-      </pc:sldChg>
-      <pc:sldChg chg="del">
-        <pc:chgData name="Peter Bernhardt" userId="f2333933-0b12-4d6e-972f-f87625423892" providerId="ADAL" clId="{34DA1458-4058-4912-885C-C6A06A12728D}" dt="2026-03-23T15:45:17.014" v="1" actId="47"/>
-        <pc:sldMkLst>
-          <pc:docMk/>
-          <pc:sldMk cId="0" sldId="331"/>
-        </pc:sldMkLst>
-      </pc:sldChg>
-      <pc:sldChg chg="del">
-        <pc:chgData name="Peter Bernhardt" userId="f2333933-0b12-4d6e-972f-f87625423892" providerId="ADAL" clId="{34DA1458-4058-4912-885C-C6A06A12728D}" dt="2026-03-23T15:45:17.014" v="1" actId="47"/>
-        <pc:sldMkLst>
-          <pc:docMk/>
-          <pc:sldMk cId="0" sldId="332"/>
-        </pc:sldMkLst>
-      </pc:sldChg>
-      <pc:sldChg chg="del">
-        <pc:chgData name="Peter Bernhardt" userId="f2333933-0b12-4d6e-972f-f87625423892" providerId="ADAL" clId="{34DA1458-4058-4912-885C-C6A06A12728D}" dt="2026-03-23T15:45:17.014" v="1" actId="47"/>
-        <pc:sldMkLst>
-          <pc:docMk/>
-          <pc:sldMk cId="0" sldId="333"/>
-        </pc:sldMkLst>
-      </pc:sldChg>
-      <pc:sldChg chg="del">
-        <pc:chgData name="Peter Bernhardt" userId="f2333933-0b12-4d6e-972f-f87625423892" providerId="ADAL" clId="{34DA1458-4058-4912-885C-C6A06A12728D}" dt="2026-03-23T15:45:17.014" v="1" actId="47"/>
-        <pc:sldMkLst>
-          <pc:docMk/>
-          <pc:sldMk cId="0" sldId="334"/>
-        </pc:sldMkLst>
-      </pc:sldChg>
-      <pc:sldChg chg="del">
-        <pc:chgData name="Peter Bernhardt" userId="f2333933-0b12-4d6e-972f-f87625423892" providerId="ADAL" clId="{34DA1458-4058-4912-885C-C6A06A12728D}" dt="2026-03-23T15:45:17.014" v="1" actId="47"/>
-        <pc:sldMkLst>
-          <pc:docMk/>
-          <pc:sldMk cId="0" sldId="335"/>
-        </pc:sldMkLst>
-      </pc:sldChg>
-      <pc:sldChg chg="del">
-        <pc:chgData name="Peter Bernhardt" userId="f2333933-0b12-4d6e-972f-f87625423892" providerId="ADAL" clId="{34DA1458-4058-4912-885C-C6A06A12728D}" dt="2026-03-23T15:45:17.014" v="1" actId="47"/>
-        <pc:sldMkLst>
-          <pc:docMk/>
-          <pc:sldMk cId="0" sldId="336"/>
-        </pc:sldMkLst>
-      </pc:sldChg>
-      <pc:sldChg chg="del">
-        <pc:chgData name="Peter Bernhardt" userId="f2333933-0b12-4d6e-972f-f87625423892" providerId="ADAL" clId="{34DA1458-4058-4912-885C-C6A06A12728D}" dt="2026-03-23T15:45:17.014" v="1" actId="47"/>
-        <pc:sldMkLst>
-          <pc:docMk/>
-          <pc:sldMk cId="0" sldId="337"/>
-        </pc:sldMkLst>
-      </pc:sldChg>
-      <pc:sldChg chg="del">
-        <pc:chgData name="Peter Bernhardt" userId="f2333933-0b12-4d6e-972f-f87625423892" providerId="ADAL" clId="{34DA1458-4058-4912-885C-C6A06A12728D}" dt="2026-03-23T15:45:17.014" v="1" actId="47"/>
-        <pc:sldMkLst>
-          <pc:docMk/>
-          <pc:sldMk cId="0" sldId="338"/>
-        </pc:sldMkLst>
-      </pc:sldChg>
-      <pc:sldChg chg="del">
-        <pc:chgData name="Peter Bernhardt" userId="f2333933-0b12-4d6e-972f-f87625423892" providerId="ADAL" clId="{34DA1458-4058-4912-885C-C6A06A12728D}" dt="2026-03-23T15:45:17.014" v="1" actId="47"/>
-        <pc:sldMkLst>
-          <pc:docMk/>
-          <pc:sldMk cId="0" sldId="339"/>
-        </pc:sldMkLst>
-      </pc:sldChg>
-      <pc:sldChg chg="del">
-        <pc:chgData name="Peter Bernhardt" userId="f2333933-0b12-4d6e-972f-f87625423892" providerId="ADAL" clId="{34DA1458-4058-4912-885C-C6A06A12728D}" dt="2026-03-23T15:45:17.014" v="1" actId="47"/>
-        <pc:sldMkLst>
-          <pc:docMk/>
-          <pc:sldMk cId="0" sldId="340"/>
-        </pc:sldMkLst>
-      </pc:sldChg>
-      <pc:sldChg chg="del">
-        <pc:chgData name="Peter Bernhardt" userId="f2333933-0b12-4d6e-972f-f87625423892" providerId="ADAL" clId="{34DA1458-4058-4912-885C-C6A06A12728D}" dt="2026-03-23T15:45:17.014" v="1" actId="47"/>
-        <pc:sldMkLst>
-          <pc:docMk/>
-          <pc:sldMk cId="0" sldId="341"/>
-        </pc:sldMkLst>
-      </pc:sldChg>
-      <pc:sldChg chg="del">
-        <pc:chgData name="Peter Bernhardt" userId="f2333933-0b12-4d6e-972f-f87625423892" providerId="ADAL" clId="{34DA1458-4058-4912-885C-C6A06A12728D}" dt="2026-03-23T15:45:17.014" v="1" actId="47"/>
-        <pc:sldMkLst>
-          <pc:docMk/>
-          <pc:sldMk cId="0" sldId="342"/>
-        </pc:sldMkLst>
-      </pc:sldChg>
-      <pc:sldChg chg="del">
-        <pc:chgData name="Peter Bernhardt" userId="f2333933-0b12-4d6e-972f-f87625423892" providerId="ADAL" clId="{34DA1458-4058-4912-885C-C6A06A12728D}" dt="2026-03-23T15:45:17.014" v="1" actId="47"/>
-        <pc:sldMkLst>
-          <pc:docMk/>
-          <pc:sldMk cId="0" sldId="343"/>
-        </pc:sldMkLst>
-      </pc:sldChg>
-      <pc:sldChg chg="del">
-        <pc:chgData name="Peter Bernhardt" userId="f2333933-0b12-4d6e-972f-f87625423892" providerId="ADAL" clId="{34DA1458-4058-4912-885C-C6A06A12728D}" dt="2026-03-23T15:45:17.014" v="1" actId="47"/>
-        <pc:sldMkLst>
-          <pc:docMk/>
-          <pc:sldMk cId="0" sldId="344"/>
-        </pc:sldMkLst>
-      </pc:sldChg>
-      <pc:sldChg chg="del">
-        <pc:chgData name="Peter Bernhardt" userId="f2333933-0b12-4d6e-972f-f87625423892" providerId="ADAL" clId="{34DA1458-4058-4912-885C-C6A06A12728D}" dt="2026-03-23T15:45:17.014" v="1" actId="47"/>
-        <pc:sldMkLst>
-          <pc:docMk/>
-          <pc:sldMk cId="0" sldId="345"/>
-        </pc:sldMkLst>
-      </pc:sldChg>
     </pc:docChg>
   </pc:docChgLst>
 </pc:chgInfo>
+</file>
+
+<file path=ppt/notesMasters/notesMaster1.xml><?xml version="1.0" encoding="utf-8"?>
+<p:notesMaster xmlns:a="http://schemas.openxmlformats.org/drawingml/2006/main" xmlns:r="http://schemas.openxmlformats.org/officeDocument/2006/relationships" xmlns:p="http://schemas.openxmlformats.org/presentationml/2006/main">
+  <p:cSld>
+    <p:bg>
+      <p:bgRef idx="1001">
+        <a:schemeClr val="bg1"/>
+      </p:bgRef>
+    </p:bg>
+    <p:spTree>
+      <p:nvGrpSpPr>
+        <p:cNvPr id="1" name=""/>
+        <p:cNvGrpSpPr/>
+        <p:nvPr/>
+      </p:nvGrpSpPr>
+      <p:grpSpPr>
+        <a:xfrm>
+          <a:off x="0" y="0"/>
+          <a:ext cx="0" cy="0"/>
+          <a:chOff x="0" y="0"/>
+          <a:chExt cx="0" cy="0"/>
+        </a:xfrm>
+      </p:grpSpPr>
+      <p:sp>
+        <p:nvSpPr>
+          <p:cNvPr id="2" name="Kopfzeilenplatzhalter 1"/>
+          <p:cNvSpPr>
+            <a:spLocks noGrp="1"/>
+          </p:cNvSpPr>
+          <p:nvPr>
+            <p:ph type="hdr" sz="quarter"/>
+          </p:nvPr>
+        </p:nvSpPr>
+        <p:spPr>
+          <a:xfrm>
+            <a:off x="0" y="0"/>
+            <a:ext cx="2971800" cy="458788"/>
+          </a:xfrm>
+          <a:prstGeom prst="rect">
+            <a:avLst/>
+          </a:prstGeom>
+        </p:spPr>
+        <p:txBody>
+          <a:bodyPr vert="horz" lIns="91440" tIns="45720" rIns="91440" bIns="45720" rtlCol="0"/>
+          <a:lstStyle>
+            <a:lvl1pPr algn="l">
+              <a:defRPr sz="1200"/>
+            </a:lvl1pPr>
+          </a:lstStyle>
+          <a:p>
+            <a:endParaRPr lang="de-DE"/>
+          </a:p>
+        </p:txBody>
+      </p:sp>
+      <p:sp>
+        <p:nvSpPr>
+          <p:cNvPr id="4" name="Folienbildplatzhalter 3"/>
+          <p:cNvSpPr>
+            <a:spLocks noGrp="1" noRot="1" noChangeAspect="1"/>
+          </p:cNvSpPr>
+          <p:nvPr>
+            <p:ph type="sldImg" idx="2"/>
+          </p:nvPr>
+        </p:nvSpPr>
+        <p:spPr>
+          <a:xfrm>
+            <a:off x="1371600" y="1143000"/>
+            <a:ext cx="4114800" cy="3086100"/>
+          </a:xfrm>
+          <a:prstGeom prst="rect">
+            <a:avLst/>
+          </a:prstGeom>
+          <a:noFill/>
+          <a:ln w="12700">
+            <a:solidFill>
+              <a:prstClr val="black"/>
+            </a:solidFill>
+          </a:ln>
+        </p:spPr>
+        <p:txBody>
+          <a:bodyPr vert="horz" lIns="91440" tIns="45720" rIns="91440" bIns="45720" rtlCol="0" anchor="ctr"/>
+          <a:lstStyle/>
+          <a:p>
+            <a:endParaRPr lang="de-DE"/>
+          </a:p>
+        </p:txBody>
+      </p:sp>
+      <p:sp>
+        <p:nvSpPr>
+          <p:cNvPr id="5" name="Notizenplatzhalter 4"/>
+          <p:cNvSpPr>
+            <a:spLocks noGrp="1"/>
+          </p:cNvSpPr>
+          <p:nvPr>
+            <p:ph type="body" sz="quarter" idx="3"/>
+          </p:nvPr>
+        </p:nvSpPr>
+        <p:spPr>
+          <a:xfrm>
+            <a:off x="685800" y="4400550"/>
+            <a:ext cx="5486400" cy="3600450"/>
+          </a:xfrm>
+          <a:prstGeom prst="rect">
+            <a:avLst/>
+          </a:prstGeom>
+        </p:spPr>
+        <p:txBody>
+          <a:bodyPr vert="horz" lIns="91440" tIns="45720" rIns="91440" bIns="45720" rtlCol="0"/>
+          <a:lstStyle/>
+          <a:p>
+            <a:pPr lvl="0"/>
+            <a:r>
+              <a:rPr lang="de-DE"/>
+              <a:t>Mastertextformat bearbeiten</a:t>
+            </a:r>
+          </a:p>
+          <a:p>
+            <a:pPr lvl="1"/>
+            <a:r>
+              <a:rPr lang="de-DE"/>
+              <a:t>Zweite Ebene</a:t>
+            </a:r>
+          </a:p>
+          <a:p>
+            <a:pPr lvl="2"/>
+            <a:r>
+              <a:rPr lang="de-DE"/>
+              <a:t>Dritte Ebene</a:t>
+            </a:r>
+          </a:p>
+          <a:p>
+            <a:pPr lvl="3"/>
+            <a:r>
+              <a:rPr lang="de-DE"/>
+              <a:t>Vierte Ebene</a:t>
+            </a:r>
+          </a:p>
+          <a:p>
+            <a:pPr lvl="4"/>
+            <a:r>
+              <a:rPr lang="de-DE"/>
+              <a:t>Fünfte Ebene</a:t>
+            </a:r>
+          </a:p>
+        </p:txBody>
+      </p:sp>
+      <p:sp>
+        <p:nvSpPr>
+          <p:cNvPr id="6" name="Fußzeilenplatzhalter 5"/>
+          <p:cNvSpPr>
+            <a:spLocks noGrp="1"/>
+          </p:cNvSpPr>
+          <p:nvPr>
+            <p:ph type="ftr" sz="quarter" idx="4"/>
+          </p:nvPr>
+        </p:nvSpPr>
+        <p:spPr>
+          <a:xfrm>
+            <a:off x="0" y="8685213"/>
+            <a:ext cx="2971800" cy="458787"/>
+          </a:xfrm>
+          <a:prstGeom prst="rect">
+            <a:avLst/>
+          </a:prstGeom>
+        </p:spPr>
+        <p:txBody>
+          <a:bodyPr vert="horz" lIns="91440" tIns="45720" rIns="91440" bIns="45720" rtlCol="0" anchor="b"/>
+          <a:lstStyle>
+            <a:lvl1pPr algn="l">
+              <a:defRPr sz="1200"/>
+            </a:lvl1pPr>
+          </a:lstStyle>
+          <a:p>
+            <a:endParaRPr lang="de-DE"/>
+          </a:p>
+        </p:txBody>
+      </p:sp>
+      <p:sp>
+        <p:nvSpPr>
+          <p:cNvPr id="7" name="Foliennummernplatzhalter 6"/>
+          <p:cNvSpPr>
+            <a:spLocks noGrp="1"/>
+          </p:cNvSpPr>
+          <p:nvPr>
+            <p:ph type="sldNum" sz="quarter" idx="5"/>
+          </p:nvPr>
+        </p:nvSpPr>
+        <p:spPr>
+          <a:xfrm>
+            <a:off x="3884613" y="8685213"/>
+            <a:ext cx="2971800" cy="458787"/>
+          </a:xfrm>
+          <a:prstGeom prst="rect">
+            <a:avLst/>
+          </a:prstGeom>
+        </p:spPr>
+        <p:txBody>
+          <a:bodyPr vert="horz" lIns="91440" tIns="45720" rIns="91440" bIns="45720" rtlCol="0" anchor="b"/>
+          <a:lstStyle>
+            <a:lvl1pPr algn="r">
+              <a:defRPr sz="1200"/>
+            </a:lvl1pPr>
+          </a:lstStyle>
+          <a:p>
+            <a:fld id="{9955F5F9-C814-4F3A-BD20-A96DD549C0F1}" type="slidenum">
+              <a:rPr lang="de-DE" smtClean="0"/>
+              <a:t>‹Nr.›</a:t>
+            </a:fld>
+            <a:endParaRPr lang="de-DE"/>
+          </a:p>
+        </p:txBody>
+      </p:sp>
+    </p:spTree>
+    <p:extLst>
+      <p:ext uri="{BB962C8B-B14F-4D97-AF65-F5344CB8AC3E}">
+        <p14:creationId xmlns:p14="http://schemas.microsoft.com/office/powerpoint/2010/main" val="1202254084"/>
+      </p:ext>
+    </p:extLst>
+  </p:cSld>
+  <p:clrMap bg1="lt1" tx1="dk1" bg2="lt2" tx2="dk2" accent1="accent1" accent2="accent2" accent3="accent3" accent4="accent4" accent5="accent5" accent6="accent6" hlink="hlink" folHlink="folHlink"/>
+  <p:notesStyle>
+    <a:lvl1pPr marL="0" algn="l" defTabSz="914400" rtl="0" eaLnBrk="1" latinLnBrk="0" hangingPunct="1">
+      <a:defRPr sz="1200" kern="1200">
+        <a:solidFill>
+          <a:schemeClr val="tx1"/>
+        </a:solidFill>
+        <a:latin typeface="+mn-lt"/>
+        <a:ea typeface="+mn-ea"/>
+        <a:cs typeface="+mn-cs"/>
+      </a:defRPr>
+    </a:lvl1pPr>
+    <a:lvl2pPr marL="457200" algn="l" defTabSz="914400" rtl="0" eaLnBrk="1" latinLnBrk="0" hangingPunct="1">
+      <a:defRPr sz="1200" kern="1200">
+        <a:solidFill>
+          <a:schemeClr val="tx1"/>
+        </a:solidFill>
+        <a:latin typeface="+mn-lt"/>
+        <a:ea typeface="+mn-ea"/>
+        <a:cs typeface="+mn-cs"/>
+      </a:defRPr>
+    </a:lvl2pPr>
+    <a:lvl3pPr marL="914400" algn="l" defTabSz="914400" rtl="0" eaLnBrk="1" latinLnBrk="0" hangingPunct="1">
+      <a:defRPr sz="1200" kern="1200">
+        <a:solidFill>
+          <a:schemeClr val="tx1"/>
+        </a:solidFill>
+        <a:latin typeface="+mn-lt"/>
+        <a:ea typeface="+mn-ea"/>
+        <a:cs typeface="+mn-cs"/>
+      </a:defRPr>
+    </a:lvl3pPr>
+    <a:lvl4pPr marL="1371600" algn="l" defTabSz="914400" rtl="0" eaLnBrk="1" latinLnBrk="0" hangingPunct="1">
+      <a:defRPr sz="1200" kern="1200">
+        <a:solidFill>
+          <a:schemeClr val="tx1"/>
+        </a:solidFill>
+        <a:latin typeface="+mn-lt"/>
+        <a:ea typeface="+mn-ea"/>
+        <a:cs typeface="+mn-cs"/>
+      </a:defRPr>
+    </a:lvl4pPr>
+    <a:lvl5pPr marL="1828800" algn="l" defTabSz="914400" rtl="0" eaLnBrk="1" latinLnBrk="0" hangingPunct="1">
+      <a:defRPr sz="1200" kern="1200">
+        <a:solidFill>
+          <a:schemeClr val="tx1"/>
+        </a:solidFill>
+        <a:latin typeface="+mn-lt"/>
+        <a:ea typeface="+mn-ea"/>
+        <a:cs typeface="+mn-cs"/>
+      </a:defRPr>
+    </a:lvl5pPr>
+    <a:lvl6pPr marL="2286000" algn="l" defTabSz="914400" rtl="0" eaLnBrk="1" latinLnBrk="0" hangingPunct="1">
+      <a:defRPr sz="1200" kern="1200">
+        <a:solidFill>
+          <a:schemeClr val="tx1"/>
+        </a:solidFill>
+        <a:latin typeface="+mn-lt"/>
+        <a:ea typeface="+mn-ea"/>
+        <a:cs typeface="+mn-cs"/>
+      </a:defRPr>
+    </a:lvl6pPr>
+    <a:lvl7pPr marL="2743200" algn="l" defTabSz="914400" rtl="0" eaLnBrk="1" latinLnBrk="0" hangingPunct="1">
+      <a:defRPr sz="1200" kern="1200">
+        <a:solidFill>
+          <a:schemeClr val="tx1"/>
+        </a:solidFill>
+        <a:latin typeface="+mn-lt"/>
+        <a:ea typeface="+mn-ea"/>
+        <a:cs typeface="+mn-cs"/>
+      </a:defRPr>
+    </a:lvl7pPr>
+    <a:lvl8pPr marL="3200400" algn="l" defTabSz="914400" rtl="0" eaLnBrk="1" latinLnBrk="0" hangingPunct="1">
+      <a:defRPr sz="1200" kern="1200">
+        <a:solidFill>
+          <a:schemeClr val="tx1"/>
+        </a:solidFill>
+        <a:latin typeface="+mn-lt"/>
+        <a:ea typeface="+mn-ea"/>
+        <a:cs typeface="+mn-cs"/>
+      </a:defRPr>
+    </a:lvl8pPr>
+    <a:lvl9pPr marL="3657600" algn="l" defTabSz="914400" rtl="0" eaLnBrk="1" latinLnBrk="0" hangingPunct="1">
+      <a:defRPr sz="1200" kern="1200">
+        <a:solidFill>
+          <a:schemeClr val="tx1"/>
+        </a:solidFill>
+        <a:latin typeface="+mn-lt"/>
+        <a:ea typeface="+mn-ea"/>
+        <a:cs typeface="+mn-cs"/>
+      </a:defRPr>
+    </a:lvl9pPr>
+  </p:notesStyle>
+</p:notesMaster>
 </file>
 
 <file path=ppt/slideLayouts/slideLayout1.xml><?xml version="1.0" encoding="utf-8"?>
@@ -2836,7 +2785,7 @@
           <a:p>
             <a:fld id="{241EB5C9-1307-BA42-ABA2-0BC069CD8E7F}" type="datetimeFigureOut">
               <a:rPr lang="en-US" smtClean="0"/>
-              <a:t>3/23/2026</a:t>
+              <a:t>3/26/2026</a:t>
             </a:fld>
             <a:endParaRPr lang="en-US"/>
           </a:p>
@@ -3044,7 +2993,7 @@
           <a:p>
             <a:fld id="{241EB5C9-1307-BA42-ABA2-0BC069CD8E7F}" type="datetimeFigureOut">
               <a:rPr lang="en-US" smtClean="0"/>
-              <a:t>3/23/2026</a:t>
+              <a:t>3/26/2026</a:t>
             </a:fld>
             <a:endParaRPr lang="en-US"/>
           </a:p>
@@ -3300,7 +3249,7 @@
           <a:p>
             <a:fld id="{241EB5C9-1307-BA42-ABA2-0BC069CD8E7F}" type="datetimeFigureOut">
               <a:rPr lang="en-US" smtClean="0"/>
-              <a:t>3/23/2026</a:t>
+              <a:t>3/26/2026</a:t>
             </a:fld>
             <a:endParaRPr lang="en-US"/>
           </a:p>
@@ -3488,7 +3437,7 @@
           <a:p>
             <a:fld id="{241EB5C9-1307-BA42-ABA2-0BC069CD8E7F}" type="datetimeFigureOut">
               <a:rPr lang="en-US" smtClean="0"/>
-              <a:t>3/23/2026</a:t>
+              <a:t>3/26/2026</a:t>
             </a:fld>
             <a:endParaRPr lang="en-US"/>
           </a:p>
@@ -3845,7 +3794,7 @@
           <a:p>
             <a:fld id="{241EB5C9-1307-BA42-ABA2-0BC069CD8E7F}" type="datetimeFigureOut">
               <a:rPr lang="en-US" smtClean="0"/>
-              <a:t>3/23/2026</a:t>
+              <a:t>3/26/2026</a:t>
             </a:fld>
             <a:endParaRPr lang="en-US"/>
           </a:p>
@@ -4120,7 +4069,7 @@
           <a:p>
             <a:fld id="{241EB5C9-1307-BA42-ABA2-0BC069CD8E7F}" type="datetimeFigureOut">
               <a:rPr lang="en-US" smtClean="0"/>
-              <a:t>3/23/2026</a:t>
+              <a:t>3/26/2026</a:t>
             </a:fld>
             <a:endParaRPr lang="en-US"/>
           </a:p>
@@ -4499,7 +4448,7 @@
           <a:p>
             <a:fld id="{241EB5C9-1307-BA42-ABA2-0BC069CD8E7F}" type="datetimeFigureOut">
               <a:rPr lang="en-US" smtClean="0"/>
-              <a:t>3/23/2026</a:t>
+              <a:t>3/26/2026</a:t>
             </a:fld>
             <a:endParaRPr lang="en-US"/>
           </a:p>
@@ -4617,7 +4566,7 @@
           <a:p>
             <a:fld id="{241EB5C9-1307-BA42-ABA2-0BC069CD8E7F}" type="datetimeFigureOut">
               <a:rPr lang="en-US" smtClean="0"/>
-              <a:t>3/23/2026</a:t>
+              <a:t>3/26/2026</a:t>
             </a:fld>
             <a:endParaRPr lang="en-US"/>
           </a:p>
@@ -4788,7 +4737,7 @@
           <a:p>
             <a:fld id="{241EB5C9-1307-BA42-ABA2-0BC069CD8E7F}" type="datetimeFigureOut">
               <a:rPr lang="en-US" smtClean="0"/>
-              <a:t>3/23/2026</a:t>
+              <a:t>3/26/2026</a:t>
             </a:fld>
             <a:endParaRPr lang="en-US"/>
           </a:p>
@@ -5156,7 +5105,7 @@
           <a:p>
             <a:fld id="{241EB5C9-1307-BA42-ABA2-0BC069CD8E7F}" type="datetimeFigureOut">
               <a:rPr lang="en-US" smtClean="0"/>
-              <a:t>3/23/2026</a:t>
+              <a:t>3/26/2026</a:t>
             </a:fld>
             <a:endParaRPr lang="en-US"/>
           </a:p>
@@ -5533,7 +5482,7 @@
           <a:p>
             <a:fld id="{241EB5C9-1307-BA42-ABA2-0BC069CD8E7F}" type="datetimeFigureOut">
               <a:rPr lang="en-US" smtClean="0"/>
-              <a:t>3/23/2026</a:t>
+              <a:t>3/26/2026</a:t>
             </a:fld>
             <a:endParaRPr lang="en-US"/>
           </a:p>
@@ -5834,7 +5783,7 @@
           <a:p>
             <a:fld id="{241EB5C9-1307-BA42-ABA2-0BC069CD8E7F}" type="datetimeFigureOut">
               <a:rPr lang="en-US" smtClean="0"/>
-              <a:t>3/23/2026</a:t>
+              <a:t>3/26/2026</a:t>
             </a:fld>
             <a:endParaRPr lang="en-US"/>
           </a:p>
@@ -9559,16 +9508,262 @@
               <a:buNone/>
             </a:pPr>
             <a:r>
-              <a:t>Wenn Sie überall im Code </a:t>
-            </a:r>
-            <a:r>
-              <a:rPr>
+              <a:rPr dirty="0"/>
+              <a:t>Wenn Sie </a:t>
+            </a:r>
+            <a:r>
+              <a:rPr dirty="0" err="1"/>
+              <a:t>überall</a:t>
+            </a:r>
+            <a:r>
+              <a:rPr dirty="0"/>
+              <a:t> </a:t>
+            </a:r>
+            <a:r>
+              <a:rPr dirty="0" err="1"/>
+              <a:t>im</a:t>
+            </a:r>
+            <a:r>
+              <a:rPr dirty="0"/>
+              <a:t> Code </a:t>
+            </a:r>
+            <a:r>
+              <a:rPr dirty="0">
                 <a:latin typeface="Courier"/>
               </a:rPr>
-              <a:t>new BewilligungsBescheid()</a:t>
-            </a:r>
-            <a:r>
-              <a:t> schreiben, koppeln Sie Ihre Logik eng an diese konkrete Klasse. Was passiert, wenn sich der Prozess zur Erstellung ändert oder neue Bescheid-Arten oder -Varianten hinzukommen? Der Code wird unflexibel. Eine **lose Kopplung* ist die Lösung.</a:t>
+              <a:t>new </a:t>
+            </a:r>
+            <a:r>
+              <a:rPr dirty="0" err="1">
+                <a:latin typeface="Courier"/>
+              </a:rPr>
+              <a:t>BewilligungsBescheid</a:t>
+            </a:r>
+            <a:r>
+              <a:rPr dirty="0">
+                <a:latin typeface="Courier"/>
+              </a:rPr>
+              <a:t>()</a:t>
+            </a:r>
+            <a:r>
+              <a:rPr dirty="0"/>
+              <a:t> </a:t>
+            </a:r>
+            <a:r>
+              <a:rPr dirty="0" err="1"/>
+              <a:t>schreiben</a:t>
+            </a:r>
+            <a:r>
+              <a:rPr dirty="0"/>
+              <a:t>, </a:t>
+            </a:r>
+            <a:r>
+              <a:rPr dirty="0" err="1"/>
+              <a:t>koppeln</a:t>
+            </a:r>
+            <a:r>
+              <a:rPr dirty="0"/>
+              <a:t> Sie </a:t>
+            </a:r>
+            <a:r>
+              <a:rPr dirty="0" err="1"/>
+              <a:t>Ihre</a:t>
+            </a:r>
+            <a:r>
+              <a:rPr dirty="0"/>
+              <a:t> Logik </a:t>
+            </a:r>
+            <a:r>
+              <a:rPr dirty="0" err="1"/>
+              <a:t>eng</a:t>
+            </a:r>
+            <a:r>
+              <a:rPr dirty="0"/>
+              <a:t> an </a:t>
+            </a:r>
+            <a:r>
+              <a:rPr dirty="0" err="1"/>
+              <a:t>diese</a:t>
+            </a:r>
+            <a:r>
+              <a:rPr dirty="0"/>
+              <a:t> </a:t>
+            </a:r>
+            <a:r>
+              <a:rPr dirty="0" err="1"/>
+              <a:t>konkrete</a:t>
+            </a:r>
+            <a:r>
+              <a:rPr dirty="0"/>
+              <a:t> Klasse. </a:t>
+            </a:r>
+            <a:endParaRPr lang="de-DE" dirty="0"/>
+          </a:p>
+          <a:p>
+            <a:pPr marL="0" indent="0">
+              <a:buNone/>
+            </a:pPr>
+            <a:r>
+              <a:rPr dirty="0"/>
+              <a:t>Was </a:t>
+            </a:r>
+            <a:r>
+              <a:rPr dirty="0" err="1"/>
+              <a:t>passiert</a:t>
+            </a:r>
+            <a:r>
+              <a:rPr dirty="0"/>
+              <a:t>, </a:t>
+            </a:r>
+            <a:r>
+              <a:rPr dirty="0" err="1"/>
+              <a:t>wenn</a:t>
+            </a:r>
+            <a:r>
+              <a:rPr dirty="0"/>
+              <a:t> </a:t>
+            </a:r>
+            <a:r>
+              <a:rPr dirty="0" err="1"/>
+              <a:t>sich</a:t>
+            </a:r>
+            <a:r>
+              <a:rPr dirty="0"/>
+              <a:t> der </a:t>
+            </a:r>
+            <a:r>
+              <a:rPr dirty="0" err="1"/>
+              <a:t>Prozess</a:t>
+            </a:r>
+            <a:r>
+              <a:rPr dirty="0"/>
+              <a:t> </a:t>
+            </a:r>
+            <a:r>
+              <a:rPr dirty="0" err="1"/>
+              <a:t>zur</a:t>
+            </a:r>
+            <a:r>
+              <a:rPr dirty="0"/>
+              <a:t> </a:t>
+            </a:r>
+            <a:r>
+              <a:rPr dirty="0" err="1"/>
+              <a:t>Erstellung</a:t>
+            </a:r>
+            <a:r>
+              <a:rPr dirty="0"/>
+              <a:t> </a:t>
+            </a:r>
+            <a:r>
+              <a:rPr dirty="0" err="1"/>
+              <a:t>ändert</a:t>
+            </a:r>
+            <a:r>
+              <a:rPr dirty="0"/>
+              <a:t> </a:t>
+            </a:r>
+            <a:r>
+              <a:rPr dirty="0" err="1"/>
+              <a:t>oder</a:t>
+            </a:r>
+            <a:r>
+              <a:rPr dirty="0"/>
+              <a:t> </a:t>
+            </a:r>
+            <a:r>
+              <a:rPr dirty="0" err="1"/>
+              <a:t>neue</a:t>
+            </a:r>
+            <a:r>
+              <a:rPr dirty="0"/>
+              <a:t> </a:t>
+            </a:r>
+            <a:r>
+              <a:rPr dirty="0" err="1"/>
+              <a:t>Bescheid-Arten</a:t>
+            </a:r>
+            <a:r>
+              <a:rPr dirty="0"/>
+              <a:t> </a:t>
+            </a:r>
+            <a:r>
+              <a:rPr dirty="0" err="1"/>
+              <a:t>oder</a:t>
+            </a:r>
+            <a:r>
+              <a:rPr dirty="0"/>
+              <a:t> -</a:t>
+            </a:r>
+            <a:r>
+              <a:rPr dirty="0" err="1"/>
+              <a:t>Varianten</a:t>
+            </a:r>
+            <a:r>
+              <a:rPr dirty="0"/>
+              <a:t> </a:t>
+            </a:r>
+            <a:r>
+              <a:rPr dirty="0" err="1"/>
+              <a:t>hinzukommen</a:t>
+            </a:r>
+            <a:r>
+              <a:rPr dirty="0"/>
+              <a:t>? Der Code </a:t>
+            </a:r>
+            <a:r>
+              <a:rPr dirty="0" err="1"/>
+              <a:t>wird</a:t>
+            </a:r>
+            <a:r>
+              <a:rPr dirty="0"/>
+              <a:t> </a:t>
+            </a:r>
+            <a:r>
+              <a:rPr dirty="0" err="1"/>
+              <a:t>unflexibel</a:t>
+            </a:r>
+            <a:r>
+              <a:rPr dirty="0"/>
+              <a:t>. </a:t>
+            </a:r>
+            <a:endParaRPr lang="de-DE" dirty="0"/>
+          </a:p>
+          <a:p>
+            <a:pPr marL="0" indent="0">
+              <a:buNone/>
+            </a:pPr>
+            <a:r>
+              <a:rPr dirty="0"/>
+              <a:t>Eine </a:t>
+            </a:r>
+            <a:r>
+              <a:rPr b="1" dirty="0"/>
+              <a:t>lose </a:t>
+            </a:r>
+            <a:r>
+              <a:rPr b="1" dirty="0" err="1"/>
+              <a:t>Kopplung</a:t>
+            </a:r>
+            <a:r>
+              <a:rPr dirty="0"/>
+              <a:t> </a:t>
+            </a:r>
+            <a:r>
+              <a:rPr dirty="0" err="1"/>
+              <a:t>ist</a:t>
+            </a:r>
+            <a:r>
+              <a:rPr dirty="0"/>
+              <a:t> die </a:t>
+            </a:r>
+            <a:r>
+              <a:rPr dirty="0" err="1"/>
+              <a:t>Lösung</a:t>
+            </a:r>
+            <a:r>
+              <a:rPr dirty="0"/>
+              <a:t>.</a:t>
             </a:r>
           </a:p>
         </p:txBody>
@@ -27014,4 +27209,319 @@
     </a:ext>
   </a:extLst>
 </a:theme>
+</file>
+
+<file path=ppt/theme/theme2.xml><?xml version="1.0" encoding="utf-8"?>
+<a:theme xmlns:a="http://schemas.openxmlformats.org/drawingml/2006/main" name="Office">
+  <a:themeElements>
+    <a:clrScheme name="Office">
+      <a:dk1>
+        <a:sysClr val="windowText" lastClr="000000"/>
+      </a:dk1>
+      <a:lt1>
+        <a:sysClr val="window" lastClr="FFFFFF"/>
+      </a:lt1>
+      <a:dk2>
+        <a:srgbClr val="0E2841"/>
+      </a:dk2>
+      <a:lt2>
+        <a:srgbClr val="E8E8E8"/>
+      </a:lt2>
+      <a:accent1>
+        <a:srgbClr val="156082"/>
+      </a:accent1>
+      <a:accent2>
+        <a:srgbClr val="E97132"/>
+      </a:accent2>
+      <a:accent3>
+        <a:srgbClr val="196B24"/>
+      </a:accent3>
+      <a:accent4>
+        <a:srgbClr val="0F9ED5"/>
+      </a:accent4>
+      <a:accent5>
+        <a:srgbClr val="A02B93"/>
+      </a:accent5>
+      <a:accent6>
+        <a:srgbClr val="4EA72E"/>
+      </a:accent6>
+      <a:hlink>
+        <a:srgbClr val="467886"/>
+      </a:hlink>
+      <a:folHlink>
+        <a:srgbClr val="96607D"/>
+      </a:folHlink>
+    </a:clrScheme>
+    <a:fontScheme name="Office">
+      <a:majorFont>
+        <a:latin typeface="Aptos Display" panose="02110004020202020204"/>
+        <a:ea typeface=""/>
+        <a:cs typeface=""/>
+        <a:font script="Jpan" typeface="游ゴシック Light"/>
+        <a:font script="Hang" typeface="맑은 고딕"/>
+        <a:font script="Hans" typeface="等线 Light"/>
+        <a:font script="Hant" typeface="新細明體"/>
+        <a:font script="Arab" typeface="Times New Roman"/>
+        <a:font script="Hebr" typeface="Times New Roman"/>
+        <a:font script="Thai" typeface="Angsana New"/>
+        <a:font script="Ethi" typeface="Nyala"/>
+        <a:font script="Beng" typeface="Vrinda"/>
+        <a:font script="Gujr" typeface="Shruti"/>
+        <a:font script="Khmr" typeface="MoolBoran"/>
+        <a:font script="Knda" typeface="Tunga"/>
+        <a:font script="Guru" typeface="Raavi"/>
+        <a:font script="Cans" typeface="Euphemia"/>
+        <a:font script="Cher" typeface="Plantagenet Cherokee"/>
+        <a:font script="Yiii" typeface="Microsoft Yi Baiti"/>
+        <a:font script="Tibt" typeface="Microsoft Himalaya"/>
+        <a:font script="Thaa" typeface="MV Boli"/>
+        <a:font script="Deva" typeface="Mangal"/>
+        <a:font script="Telu" typeface="Gautami"/>
+        <a:font script="Taml" typeface="Latha"/>
+        <a:font script="Syrc" typeface="Estrangelo Edessa"/>
+        <a:font script="Orya" typeface="Kalinga"/>
+        <a:font script="Mlym" typeface="Kartika"/>
+        <a:font script="Laoo" typeface="DokChampa"/>
+        <a:font script="Sinh" typeface="Iskoola Pota"/>
+        <a:font script="Mong" typeface="Mongolian Baiti"/>
+        <a:font script="Viet" typeface="Times New Roman"/>
+        <a:font script="Uigh" typeface="Microsoft Uighur"/>
+        <a:font script="Geor" typeface="Sylfaen"/>
+        <a:font script="Armn" typeface="Arial"/>
+        <a:font script="Bugi" typeface="Leelawadee UI"/>
+        <a:font script="Bopo" typeface="Microsoft JhengHei"/>
+        <a:font script="Java" typeface="Javanese Text"/>
+        <a:font script="Lisu" typeface="Segoe UI"/>
+        <a:font script="Mymr" typeface="Myanmar Text"/>
+        <a:font script="Nkoo" typeface="Ebrima"/>
+        <a:font script="Olck" typeface="Nirmala UI"/>
+        <a:font script="Osma" typeface="Ebrima"/>
+        <a:font script="Phag" typeface="Phagspa"/>
+        <a:font script="Syrn" typeface="Estrangelo Edessa"/>
+        <a:font script="Syrj" typeface="Estrangelo Edessa"/>
+        <a:font script="Syre" typeface="Estrangelo Edessa"/>
+        <a:font script="Sora" typeface="Nirmala UI"/>
+        <a:font script="Tale" typeface="Microsoft Tai Le"/>
+        <a:font script="Talu" typeface="Microsoft New Tai Lue"/>
+        <a:font script="Tfng" typeface="Ebrima"/>
+      </a:majorFont>
+      <a:minorFont>
+        <a:latin typeface="Aptos" panose="02110004020202020204"/>
+        <a:ea typeface=""/>
+        <a:cs typeface=""/>
+        <a:font script="Jpan" typeface="游ゴシック"/>
+        <a:font script="Hang" typeface="맑은 고딕"/>
+        <a:font script="Hans" typeface="等线"/>
+        <a:font script="Hant" typeface="新細明體"/>
+        <a:font script="Arab" typeface="Arial"/>
+        <a:font script="Hebr" typeface="Arial"/>
+        <a:font script="Thai" typeface="Cordia New"/>
+        <a:font script="Ethi" typeface="Nyala"/>
+        <a:font script="Beng" typeface="Vrinda"/>
+        <a:font script="Gujr" typeface="Shruti"/>
+        <a:font script="Khmr" typeface="DaunPenh"/>
+        <a:font script="Knda" typeface="Tunga"/>
+        <a:font script="Guru" typeface="Raavi"/>
+        <a:font script="Cans" typeface="Euphemia"/>
+        <a:font script="Cher" typeface="Plantagenet Cherokee"/>
+        <a:font script="Yiii" typeface="Microsoft Yi Baiti"/>
+        <a:font script="Tibt" typeface="Microsoft Himalaya"/>
+        <a:font script="Thaa" typeface="MV Boli"/>
+        <a:font script="Deva" typeface="Mangal"/>
+        <a:font script="Telu" typeface="Gautami"/>
+        <a:font script="Taml" typeface="Latha"/>
+        <a:font script="Syrc" typeface="Estrangelo Edessa"/>
+        <a:font script="Orya" typeface="Kalinga"/>
+        <a:font script="Mlym" typeface="Kartika"/>
+        <a:font script="Laoo" typeface="DokChampa"/>
+        <a:font script="Sinh" typeface="Iskoola Pota"/>
+        <a:font script="Mong" typeface="Mongolian Baiti"/>
+        <a:font script="Viet" typeface="Arial"/>
+        <a:font script="Uigh" typeface="Microsoft Uighur"/>
+        <a:font script="Geor" typeface="Sylfaen"/>
+        <a:font script="Armn" typeface="Arial"/>
+        <a:font script="Bugi" typeface="Leelawadee UI"/>
+        <a:font script="Bopo" typeface="Microsoft JhengHei"/>
+        <a:font script="Java" typeface="Javanese Text"/>
+        <a:font script="Lisu" typeface="Segoe UI"/>
+        <a:font script="Mymr" typeface="Myanmar Text"/>
+        <a:font script="Nkoo" typeface="Ebrima"/>
+        <a:font script="Olck" typeface="Nirmala UI"/>
+        <a:font script="Osma" typeface="Ebrima"/>
+        <a:font script="Phag" typeface="Phagspa"/>
+        <a:font script="Syrn" typeface="Estrangelo Edessa"/>
+        <a:font script="Syrj" typeface="Estrangelo Edessa"/>
+        <a:font script="Syre" typeface="Estrangelo Edessa"/>
+        <a:font script="Sora" typeface="Nirmala UI"/>
+        <a:font script="Tale" typeface="Microsoft Tai Le"/>
+        <a:font script="Talu" typeface="Microsoft New Tai Lue"/>
+        <a:font script="Tfng" typeface="Ebrima"/>
+      </a:minorFont>
+    </a:fontScheme>
+    <a:fmtScheme name="Office">
+      <a:fillStyleLst>
+        <a:solidFill>
+          <a:schemeClr val="phClr"/>
+        </a:solidFill>
+        <a:gradFill rotWithShape="1">
+          <a:gsLst>
+            <a:gs pos="0">
+              <a:schemeClr val="phClr">
+                <a:lumMod val="110000"/>
+                <a:satMod val="105000"/>
+                <a:tint val="67000"/>
+              </a:schemeClr>
+            </a:gs>
+            <a:gs pos="50000">
+              <a:schemeClr val="phClr">
+                <a:lumMod val="105000"/>
+                <a:satMod val="103000"/>
+                <a:tint val="73000"/>
+              </a:schemeClr>
+            </a:gs>
+            <a:gs pos="100000">
+              <a:schemeClr val="phClr">
+                <a:lumMod val="105000"/>
+                <a:satMod val="109000"/>
+                <a:tint val="81000"/>
+              </a:schemeClr>
+            </a:gs>
+          </a:gsLst>
+          <a:lin ang="5400000" scaled="0"/>
+        </a:gradFill>
+        <a:gradFill rotWithShape="1">
+          <a:gsLst>
+            <a:gs pos="0">
+              <a:schemeClr val="phClr">
+                <a:satMod val="103000"/>
+                <a:lumMod val="102000"/>
+                <a:tint val="94000"/>
+              </a:schemeClr>
+            </a:gs>
+            <a:gs pos="50000">
+              <a:schemeClr val="phClr">
+                <a:satMod val="110000"/>
+                <a:lumMod val="100000"/>
+                <a:shade val="100000"/>
+              </a:schemeClr>
+            </a:gs>
+            <a:gs pos="100000">
+              <a:schemeClr val="phClr">
+                <a:lumMod val="99000"/>
+                <a:satMod val="120000"/>
+                <a:shade val="78000"/>
+              </a:schemeClr>
+            </a:gs>
+          </a:gsLst>
+          <a:lin ang="5400000" scaled="0"/>
+        </a:gradFill>
+      </a:fillStyleLst>
+      <a:lnStyleLst>
+        <a:ln w="12700" cap="flat" cmpd="sng" algn="ctr">
+          <a:solidFill>
+            <a:schemeClr val="phClr"/>
+          </a:solidFill>
+          <a:prstDash val="solid"/>
+          <a:miter lim="800000"/>
+        </a:ln>
+        <a:ln w="19050" cap="flat" cmpd="sng" algn="ctr">
+          <a:solidFill>
+            <a:schemeClr val="phClr"/>
+          </a:solidFill>
+          <a:prstDash val="solid"/>
+          <a:miter lim="800000"/>
+        </a:ln>
+        <a:ln w="25400" cap="flat" cmpd="sng" algn="ctr">
+          <a:solidFill>
+            <a:schemeClr val="phClr"/>
+          </a:solidFill>
+          <a:prstDash val="solid"/>
+          <a:miter lim="800000"/>
+        </a:ln>
+      </a:lnStyleLst>
+      <a:effectStyleLst>
+        <a:effectStyle>
+          <a:effectLst/>
+        </a:effectStyle>
+        <a:effectStyle>
+          <a:effectLst/>
+        </a:effectStyle>
+        <a:effectStyle>
+          <a:effectLst>
+            <a:outerShdw blurRad="57150" dist="19050" dir="5400000" algn="ctr" rotWithShape="0">
+              <a:srgbClr val="000000">
+                <a:alpha val="63000"/>
+              </a:srgbClr>
+            </a:outerShdw>
+          </a:effectLst>
+        </a:effectStyle>
+      </a:effectStyleLst>
+      <a:bgFillStyleLst>
+        <a:solidFill>
+          <a:schemeClr val="phClr"/>
+        </a:solidFill>
+        <a:solidFill>
+          <a:schemeClr val="phClr">
+            <a:tint val="95000"/>
+            <a:satMod val="170000"/>
+          </a:schemeClr>
+        </a:solidFill>
+        <a:gradFill rotWithShape="1">
+          <a:gsLst>
+            <a:gs pos="0">
+              <a:schemeClr val="phClr">
+                <a:tint val="93000"/>
+                <a:satMod val="150000"/>
+                <a:shade val="98000"/>
+                <a:lumMod val="102000"/>
+              </a:schemeClr>
+            </a:gs>
+            <a:gs pos="50000">
+              <a:schemeClr val="phClr">
+                <a:tint val="98000"/>
+                <a:satMod val="130000"/>
+                <a:shade val="90000"/>
+                <a:lumMod val="103000"/>
+              </a:schemeClr>
+            </a:gs>
+            <a:gs pos="100000">
+              <a:schemeClr val="phClr">
+                <a:shade val="63000"/>
+                <a:satMod val="120000"/>
+              </a:schemeClr>
+            </a:gs>
+          </a:gsLst>
+          <a:lin ang="5400000" scaled="0"/>
+        </a:gradFill>
+      </a:bgFillStyleLst>
+    </a:fmtScheme>
+  </a:themeElements>
+  <a:objectDefaults>
+    <a:lnDef>
+      <a:spPr/>
+      <a:bodyPr/>
+      <a:lstStyle/>
+      <a:style>
+        <a:lnRef idx="2">
+          <a:schemeClr val="accent1"/>
+        </a:lnRef>
+        <a:fillRef idx="0">
+          <a:schemeClr val="accent1"/>
+        </a:fillRef>
+        <a:effectRef idx="1">
+          <a:schemeClr val="accent1"/>
+        </a:effectRef>
+        <a:fontRef idx="minor">
+          <a:schemeClr val="tx1"/>
+        </a:fontRef>
+      </a:style>
+    </a:lnDef>
+  </a:objectDefaults>
+  <a:extraClrSchemeLst/>
+  <a:extLst>
+    <a:ext uri="{05A4C25C-085E-4340-85A3-A5531E510DB2}">
+      <thm15:themeFamily xmlns:thm15="http://schemas.microsoft.com/office/thememl/2012/main" name="Office Theme" id="{2E142A2C-CD16-42D6-873A-C26D2A0506FA}" vid="{1BDDFF52-6CD6-40A5-AB3C-68EB2F1E4D0A}"/>
+    </a:ext>
+  </a:extLst>
+</a:theme>
 </file>
--- a/Woche_2_DesignPatterns_I/02_Design_Patterns_I_v01.pptx
+++ b/Woche_2_DesignPatterns_I/02_Design_Patterns_I_v01.pptx
@@ -178,6 +178,14 @@
     </p:ext>
   </p:extLst>
 </p:presentation>
+</file>
+
+<file path=ppt/revisionInfo.xml><?xml version="1.0" encoding="utf-8"?>
+<p1510:revInfo xmlns:a="http://schemas.openxmlformats.org/drawingml/2006/main" xmlns:r="http://schemas.openxmlformats.org/officeDocument/2006/relationships" xmlns:p1510="http://schemas.microsoft.com/office/powerpoint/2015/10/main">
+  <p1510:revLst>
+    <p1510:client id="{FA2062A3-A281-4DB5-BC3C-2D65F072144E}" v="4" dt="2026-04-02T16:05:06.416"/>
+  </p1510:revLst>
+</p1510:revInfo>
 </file>
 
 <file path=ppt/changesInfos/changesInfo1.xml><?xml version="1.0" encoding="utf-8"?>
@@ -1361,8 +1369,8 @@
   </pc:docChgLst>
   <pc:docChgLst>
     <pc:chgData name="Peter Bernhardt" userId="f2333933-0b12-4d6e-972f-f87625423892" providerId="ADAL" clId="{34DA1458-4058-4912-885C-C6A06A12728D}"/>
-    <pc:docChg chg="undo custSel addSld delSld modSld modNotesMaster">
-      <pc:chgData name="Peter Bernhardt" userId="f2333933-0b12-4d6e-972f-f87625423892" providerId="ADAL" clId="{34DA1458-4058-4912-885C-C6A06A12728D}" dt="2026-03-26T14:45:12.464" v="720" actId="6549"/>
+    <pc:docChg chg="undo redo custSel addSld delSld modSld modNotesMaster">
+      <pc:chgData name="Peter Bernhardt" userId="f2333933-0b12-4d6e-972f-f87625423892" providerId="ADAL" clId="{34DA1458-4058-4912-885C-C6A06A12728D}" dt="2026-04-02T16:06:12.948" v="765" actId="403"/>
       <pc:docMkLst>
         <pc:docMk/>
       </pc:docMkLst>
@@ -1638,13 +1646,13 @@
         </pc:spChg>
       </pc:sldChg>
       <pc:sldChg chg="modSp add mod">
-        <pc:chgData name="Peter Bernhardt" userId="f2333933-0b12-4d6e-972f-f87625423892" providerId="ADAL" clId="{34DA1458-4058-4912-885C-C6A06A12728D}" dt="2026-03-26T14:45:12.464" v="720" actId="6549"/>
+        <pc:chgData name="Peter Bernhardt" userId="f2333933-0b12-4d6e-972f-f87625423892" providerId="ADAL" clId="{34DA1458-4058-4912-885C-C6A06A12728D}" dt="2026-04-02T15:38:31.984" v="721" actId="404"/>
         <pc:sldMkLst>
           <pc:docMk/>
           <pc:sldMk cId="0" sldId="274"/>
         </pc:sldMkLst>
         <pc:spChg chg="mod">
-          <ac:chgData name="Peter Bernhardt" userId="f2333933-0b12-4d6e-972f-f87625423892" providerId="ADAL" clId="{34DA1458-4058-4912-885C-C6A06A12728D}" dt="2026-03-26T14:45:12.464" v="720" actId="6549"/>
+          <ac:chgData name="Peter Bernhardt" userId="f2333933-0b12-4d6e-972f-f87625423892" providerId="ADAL" clId="{34DA1458-4058-4912-885C-C6A06A12728D}" dt="2026-04-02T15:38:31.984" v="721" actId="404"/>
           <ac:spMkLst>
             <pc:docMk/>
             <pc:sldMk cId="0" sldId="274"/>
@@ -1653,13 +1661,13 @@
         </pc:spChg>
       </pc:sldChg>
       <pc:sldChg chg="modSp add mod">
-        <pc:chgData name="Peter Bernhardt" userId="f2333933-0b12-4d6e-972f-f87625423892" providerId="ADAL" clId="{34DA1458-4058-4912-885C-C6A06A12728D}" dt="2026-03-23T15:55:09.980" v="112" actId="20577"/>
+        <pc:chgData name="Peter Bernhardt" userId="f2333933-0b12-4d6e-972f-f87625423892" providerId="ADAL" clId="{34DA1458-4058-4912-885C-C6A06A12728D}" dt="2026-04-02T15:38:52.281" v="722" actId="948"/>
         <pc:sldMkLst>
           <pc:docMk/>
           <pc:sldMk cId="0" sldId="275"/>
         </pc:sldMkLst>
         <pc:spChg chg="mod">
-          <ac:chgData name="Peter Bernhardt" userId="f2333933-0b12-4d6e-972f-f87625423892" providerId="ADAL" clId="{34DA1458-4058-4912-885C-C6A06A12728D}" dt="2026-03-23T15:55:09.980" v="112" actId="20577"/>
+          <ac:chgData name="Peter Bernhardt" userId="f2333933-0b12-4d6e-972f-f87625423892" providerId="ADAL" clId="{34DA1458-4058-4912-885C-C6A06A12728D}" dt="2026-04-02T15:38:52.281" v="722" actId="948"/>
           <ac:spMkLst>
             <pc:docMk/>
             <pc:sldMk cId="0" sldId="275"/>
@@ -1713,13 +1721,13 @@
         </pc:spChg>
       </pc:sldChg>
       <pc:sldChg chg="modSp add mod">
-        <pc:chgData name="Peter Bernhardt" userId="f2333933-0b12-4d6e-972f-f87625423892" providerId="ADAL" clId="{34DA1458-4058-4912-885C-C6A06A12728D}" dt="2026-03-23T15:56:38.417" v="145" actId="27636"/>
+        <pc:chgData name="Peter Bernhardt" userId="f2333933-0b12-4d6e-972f-f87625423892" providerId="ADAL" clId="{34DA1458-4058-4912-885C-C6A06A12728D}" dt="2026-04-02T15:40:38.318" v="732" actId="20577"/>
         <pc:sldMkLst>
           <pc:docMk/>
           <pc:sldMk cId="0" sldId="279"/>
         </pc:sldMkLst>
         <pc:spChg chg="mod">
-          <ac:chgData name="Peter Bernhardt" userId="f2333933-0b12-4d6e-972f-f87625423892" providerId="ADAL" clId="{34DA1458-4058-4912-885C-C6A06A12728D}" dt="2026-03-23T15:56:38.417" v="145" actId="27636"/>
+          <ac:chgData name="Peter Bernhardt" userId="f2333933-0b12-4d6e-972f-f87625423892" providerId="ADAL" clId="{34DA1458-4058-4912-885C-C6A06A12728D}" dt="2026-04-02T15:40:38.318" v="732" actId="20577"/>
           <ac:spMkLst>
             <pc:docMk/>
             <pc:sldMk cId="0" sldId="279"/>
@@ -1893,18 +1901,26 @@
           </ac:spMkLst>
         </pc:spChg>
       </pc:sldChg>
-      <pc:sldChg chg="modSp add mod">
-        <pc:chgData name="Peter Bernhardt" userId="f2333933-0b12-4d6e-972f-f87625423892" providerId="ADAL" clId="{34DA1458-4058-4912-885C-C6A06A12728D}" dt="2026-03-23T16:04:13.422" v="324" actId="20577"/>
+      <pc:sldChg chg="addSp modSp add mod">
+        <pc:chgData name="Peter Bernhardt" userId="f2333933-0b12-4d6e-972f-f87625423892" providerId="ADAL" clId="{34DA1458-4058-4912-885C-C6A06A12728D}" dt="2026-04-02T16:06:12.948" v="765" actId="403"/>
         <pc:sldMkLst>
           <pc:docMk/>
           <pc:sldMk cId="0" sldId="292"/>
         </pc:sldMkLst>
         <pc:spChg chg="mod">
-          <ac:chgData name="Peter Bernhardt" userId="f2333933-0b12-4d6e-972f-f87625423892" providerId="ADAL" clId="{34DA1458-4058-4912-885C-C6A06A12728D}" dt="2026-03-23T16:04:13.422" v="324" actId="20577"/>
+          <ac:chgData name="Peter Bernhardt" userId="f2333933-0b12-4d6e-972f-f87625423892" providerId="ADAL" clId="{34DA1458-4058-4912-885C-C6A06A12728D}" dt="2026-04-02T16:05:12.505" v="745"/>
           <ac:spMkLst>
             <pc:docMk/>
             <pc:sldMk cId="0" sldId="292"/>
             <ac:spMk id="3" creationId="{00000000-0000-0000-0000-000000000000}"/>
+          </ac:spMkLst>
+        </pc:spChg>
+        <pc:spChg chg="add mod">
+          <ac:chgData name="Peter Bernhardt" userId="f2333933-0b12-4d6e-972f-f87625423892" providerId="ADAL" clId="{34DA1458-4058-4912-885C-C6A06A12728D}" dt="2026-04-02T16:06:12.948" v="765" actId="403"/>
+          <ac:spMkLst>
+            <pc:docMk/>
+            <pc:sldMk cId="0" sldId="292"/>
+            <ac:spMk id="5" creationId="{E780022C-E42C-7A0F-8DFE-0179EF689C23}"/>
           </ac:spMkLst>
         </pc:spChg>
       </pc:sldChg>
@@ -2785,7 +2801,7 @@
           <a:p>
             <a:fld id="{241EB5C9-1307-BA42-ABA2-0BC069CD8E7F}" type="datetimeFigureOut">
               <a:rPr lang="en-US" smtClean="0"/>
-              <a:t>3/26/2026</a:t>
+              <a:t>4/2/2026</a:t>
             </a:fld>
             <a:endParaRPr lang="en-US"/>
           </a:p>
@@ -2993,7 +3009,7 @@
           <a:p>
             <a:fld id="{241EB5C9-1307-BA42-ABA2-0BC069CD8E7F}" type="datetimeFigureOut">
               <a:rPr lang="en-US" smtClean="0"/>
-              <a:t>3/26/2026</a:t>
+              <a:t>4/2/2026</a:t>
             </a:fld>
             <a:endParaRPr lang="en-US"/>
           </a:p>
@@ -3249,7 +3265,7 @@
           <a:p>
             <a:fld id="{241EB5C9-1307-BA42-ABA2-0BC069CD8E7F}" type="datetimeFigureOut">
               <a:rPr lang="en-US" smtClean="0"/>
-              <a:t>3/26/2026</a:t>
+              <a:t>4/2/2026</a:t>
             </a:fld>
             <a:endParaRPr lang="en-US"/>
           </a:p>
@@ -3437,7 +3453,7 @@
           <a:p>
             <a:fld id="{241EB5C9-1307-BA42-ABA2-0BC069CD8E7F}" type="datetimeFigureOut">
               <a:rPr lang="en-US" smtClean="0"/>
-              <a:t>3/26/2026</a:t>
+              <a:t>4/2/2026</a:t>
             </a:fld>
             <a:endParaRPr lang="en-US"/>
           </a:p>
@@ -3794,7 +3810,7 @@
           <a:p>
             <a:fld id="{241EB5C9-1307-BA42-ABA2-0BC069CD8E7F}" type="datetimeFigureOut">
               <a:rPr lang="en-US" smtClean="0"/>
-              <a:t>3/26/2026</a:t>
+              <a:t>4/2/2026</a:t>
             </a:fld>
             <a:endParaRPr lang="en-US"/>
           </a:p>
@@ -4069,7 +4085,7 @@
           <a:p>
             <a:fld id="{241EB5C9-1307-BA42-ABA2-0BC069CD8E7F}" type="datetimeFigureOut">
               <a:rPr lang="en-US" smtClean="0"/>
-              <a:t>3/26/2026</a:t>
+              <a:t>4/2/2026</a:t>
             </a:fld>
             <a:endParaRPr lang="en-US"/>
           </a:p>
@@ -4448,7 +4464,7 @@
           <a:p>
             <a:fld id="{241EB5C9-1307-BA42-ABA2-0BC069CD8E7F}" type="datetimeFigureOut">
               <a:rPr lang="en-US" smtClean="0"/>
-              <a:t>3/26/2026</a:t>
+              <a:t>4/2/2026</a:t>
             </a:fld>
             <a:endParaRPr lang="en-US"/>
           </a:p>
@@ -4566,7 +4582,7 @@
           <a:p>
             <a:fld id="{241EB5C9-1307-BA42-ABA2-0BC069CD8E7F}" type="datetimeFigureOut">
               <a:rPr lang="en-US" smtClean="0"/>
-              <a:t>3/26/2026</a:t>
+              <a:t>4/2/2026</a:t>
             </a:fld>
             <a:endParaRPr lang="en-US"/>
           </a:p>
@@ -4737,7 +4753,7 @@
           <a:p>
             <a:fld id="{241EB5C9-1307-BA42-ABA2-0BC069CD8E7F}" type="datetimeFigureOut">
               <a:rPr lang="en-US" smtClean="0"/>
-              <a:t>3/26/2026</a:t>
+              <a:t>4/2/2026</a:t>
             </a:fld>
             <a:endParaRPr lang="en-US"/>
           </a:p>
@@ -5105,7 +5121,7 @@
           <a:p>
             <a:fld id="{241EB5C9-1307-BA42-ABA2-0BC069CD8E7F}" type="datetimeFigureOut">
               <a:rPr lang="en-US" smtClean="0"/>
-              <a:t>3/26/2026</a:t>
+              <a:t>4/2/2026</a:t>
             </a:fld>
             <a:endParaRPr lang="en-US"/>
           </a:p>
@@ -5482,7 +5498,7 @@
           <a:p>
             <a:fld id="{241EB5C9-1307-BA42-ABA2-0BC069CD8E7F}" type="datetimeFigureOut">
               <a:rPr lang="en-US" smtClean="0"/>
-              <a:t>3/26/2026</a:t>
+              <a:t>4/2/2026</a:t>
             </a:fld>
             <a:endParaRPr lang="en-US"/>
           </a:p>
@@ -5783,7 +5799,7 @@
           <a:p>
             <a:fld id="{241EB5C9-1307-BA42-ABA2-0BC069CD8E7F}" type="datetimeFigureOut">
               <a:rPr lang="en-US" smtClean="0"/>
-              <a:t>3/26/2026</a:t>
+              <a:t>4/2/2026</a:t>
             </a:fld>
             <a:endParaRPr lang="en-US"/>
           </a:p>
@@ -9528,19 +9544,19 @@
               <a:t> Code </a:t>
             </a:r>
             <a:r>
-              <a:rPr dirty="0">
+              <a:rPr sz="1600" dirty="0">
                 <a:latin typeface="Courier"/>
               </a:rPr>
               <a:t>new </a:t>
             </a:r>
             <a:r>
-              <a:rPr dirty="0" err="1">
+              <a:rPr sz="1600" dirty="0" err="1">
                 <a:latin typeface="Courier"/>
               </a:rPr>
               <a:t>BewilligungsBescheid</a:t>
             </a:r>
             <a:r>
-              <a:rPr dirty="0">
+              <a:rPr sz="1600" dirty="0">
                 <a:latin typeface="Courier"/>
               </a:rPr>
               <a:t>()</a:t>
@@ -9878,7 +9894,7 @@
             </a:r>
           </a:p>
           <a:p>
-            <a:pPr lvl="0">
+            <a:pPr marL="180000" lvl="0" indent="-180000">
               <a:buFont typeface="Symbol" panose="05050102010706020507" pitchFamily="18" charset="2"/>
               <a:buChar char="-"/>
             </a:pPr>
@@ -9889,7 +9905,7 @@
             <a:endParaRPr dirty="0"/>
           </a:p>
           <a:p>
-            <a:pPr lvl="0">
+            <a:pPr marL="180000" lvl="0" indent="-180000">
               <a:buFont typeface="Symbol" panose="05050102010706020507" pitchFamily="18" charset="2"/>
               <a:buChar char="-"/>
             </a:pPr>
@@ -9900,7 +9916,7 @@
             <a:endParaRPr dirty="0"/>
           </a:p>
           <a:p>
-            <a:pPr lvl="0">
+            <a:pPr marL="180000" lvl="0" indent="-180000">
               <a:buFont typeface="Symbol" panose="05050102010706020507" pitchFamily="18" charset="2"/>
               <a:buChar char="-"/>
             </a:pPr>
@@ -12710,6 +12726,24 @@
             <a:pPr indent="0">
               <a:buNone/>
             </a:pPr>
+            <a:r>
+              <a:rPr lang="de-DE" sz="1200" b="1" dirty="0" err="1">
+                <a:solidFill>
+                  <a:srgbClr val="007020"/>
+                </a:solidFill>
+                <a:latin typeface="Consolas" panose="020B0609020204030204" pitchFamily="49" charset="0"/>
+              </a:rPr>
+              <a:t>public</a:t>
+            </a:r>
+            <a:r>
+              <a:rPr lang="de-DE" sz="1200" b="1" dirty="0">
+                <a:solidFill>
+                  <a:srgbClr val="007020"/>
+                </a:solidFill>
+                <a:latin typeface="Consolas" panose="020B0609020204030204" pitchFamily="49" charset="0"/>
+              </a:rPr>
+              <a:t> </a:t>
+            </a:r>
             <a:r>
               <a:rPr sz="1200" b="1" dirty="0">
                 <a:solidFill>
@@ -18656,912 +18690,1396 @@
               <a:rPr dirty="0"/>
               <a:t>:</a:t>
             </a:r>
-          </a:p>
-          <a:p>
-            <a:pPr indent="0">
+            <a:endParaRPr lang="de-DE" dirty="0"/>
+          </a:p>
+          <a:p>
+            <a:pPr marL="0" indent="0">
               <a:buNone/>
             </a:pPr>
-            <a:r>
-              <a:rPr sz="1200" i="1" dirty="0">
-                <a:solidFill>
-                  <a:srgbClr val="60A0B0"/>
-                </a:solidFill>
-                <a:latin typeface="Consolas" panose="020B0609020204030204" pitchFamily="49" charset="0"/>
-              </a:rPr>
-              <a:t>// Der Adapter </a:t>
-            </a:r>
-            <a:r>
-              <a:rPr sz="1200" i="1" dirty="0" err="1">
-                <a:solidFill>
-                  <a:srgbClr val="60A0B0"/>
-                </a:solidFill>
-                <a:latin typeface="Consolas" panose="020B0609020204030204" pitchFamily="49" charset="0"/>
-              </a:rPr>
-              <a:t>schließt</a:t>
-            </a:r>
-            <a:r>
-              <a:rPr sz="1200" i="1" dirty="0">
-                <a:solidFill>
-                  <a:srgbClr val="60A0B0"/>
-                </a:solidFill>
-                <a:latin typeface="Consolas" panose="020B0609020204030204" pitchFamily="49" charset="0"/>
-              </a:rPr>
-              <a:t> die </a:t>
-            </a:r>
-            <a:r>
-              <a:rPr sz="1200" i="1" dirty="0" err="1">
-                <a:solidFill>
-                  <a:srgbClr val="60A0B0"/>
-                </a:solidFill>
-                <a:latin typeface="Consolas" panose="020B0609020204030204" pitchFamily="49" charset="0"/>
-              </a:rPr>
-              <a:t>Lücke</a:t>
-            </a:r>
-            <a:br>
-              <a:rPr sz="1200" dirty="0">
-                <a:latin typeface="Consolas" panose="020B0609020204030204" pitchFamily="49" charset="0"/>
-              </a:rPr>
-            </a:br>
-            <a:r>
-              <a:rPr sz="1200" b="1" dirty="0">
-                <a:solidFill>
-                  <a:srgbClr val="007020"/>
-                </a:solidFill>
+            <a:endParaRPr lang="de-DE" dirty="0"/>
+          </a:p>
+        </p:txBody>
+      </p:sp>
+      <p:sp>
+        <p:nvSpPr>
+          <p:cNvPr id="5" name="Textfeld 4">
+            <a:extLst>
+              <a:ext uri="{FF2B5EF4-FFF2-40B4-BE49-F238E27FC236}">
+                <a16:creationId xmlns:a16="http://schemas.microsoft.com/office/drawing/2014/main" id="{E780022C-E42C-7A0F-8DFE-0179EF689C23}"/>
+              </a:ext>
+            </a:extLst>
+          </p:cNvPr>
+          <p:cNvSpPr txBox="1"/>
+          <p:nvPr/>
+        </p:nvSpPr>
+        <p:spPr>
+          <a:xfrm>
+            <a:off x="539968" y="1435212"/>
+            <a:ext cx="6700345" cy="3683060"/>
+          </a:xfrm>
+          <a:prstGeom prst="rect">
+            <a:avLst/>
+          </a:prstGeom>
+          <a:noFill/>
+        </p:spPr>
+        <p:txBody>
+          <a:bodyPr wrap="square">
+            <a:spAutoFit/>
+          </a:bodyPr>
+          <a:lstStyle/>
+          <a:p>
+            <a:pPr>
+              <a:lnSpc>
+                <a:spcPts val="1425"/>
+              </a:lnSpc>
+              <a:buNone/>
+            </a:pPr>
+            <a:r>
+              <a:rPr lang="de-DE" sz="1200" b="0" dirty="0">
+                <a:solidFill>
+                  <a:srgbClr val="008000"/>
+                </a:solidFill>
+                <a:effectLst/>
+                <a:latin typeface="Consolas" panose="020B0609020204030204" pitchFamily="49" charset="0"/>
+              </a:rPr>
+              <a:t>// Der Adapter schließt die Lücke</a:t>
+            </a:r>
+            <a:endParaRPr lang="de-DE" sz="1200" b="0" dirty="0">
+              <a:solidFill>
+                <a:srgbClr val="3B3B3B"/>
+              </a:solidFill>
+              <a:effectLst/>
+              <a:latin typeface="Consolas" panose="020B0609020204030204" pitchFamily="49" charset="0"/>
+            </a:endParaRPr>
+          </a:p>
+          <a:p>
+            <a:pPr>
+              <a:lnSpc>
+                <a:spcPts val="1425"/>
+              </a:lnSpc>
+              <a:buNone/>
+            </a:pPr>
+            <a:r>
+              <a:rPr lang="de-DE" sz="1200" b="0" dirty="0" err="1">
+                <a:solidFill>
+                  <a:srgbClr val="0000FF"/>
+                </a:solidFill>
+                <a:effectLst/>
                 <a:latin typeface="Consolas" panose="020B0609020204030204" pitchFamily="49" charset="0"/>
               </a:rPr>
               <a:t>public</a:t>
             </a:r>
             <a:r>
-              <a:rPr sz="1200" dirty="0">
-                <a:latin typeface="Consolas" panose="020B0609020204030204" pitchFamily="49" charset="0"/>
-              </a:rPr>
-              <a:t> </a:t>
-            </a:r>
-            <a:r>
-              <a:rPr sz="1200" b="1" dirty="0">
-                <a:solidFill>
-                  <a:srgbClr val="007020"/>
-                </a:solidFill>
+              <a:rPr lang="de-DE" sz="1200" b="0" dirty="0">
+                <a:solidFill>
+                  <a:srgbClr val="3B3B3B"/>
+                </a:solidFill>
+                <a:effectLst/>
+                <a:latin typeface="Consolas" panose="020B0609020204030204" pitchFamily="49" charset="0"/>
+              </a:rPr>
+              <a:t> </a:t>
+            </a:r>
+            <a:r>
+              <a:rPr lang="de-DE" sz="1200" b="0" dirty="0" err="1">
+                <a:solidFill>
+                  <a:srgbClr val="0000FF"/>
+                </a:solidFill>
+                <a:effectLst/>
                 <a:latin typeface="Consolas" panose="020B0609020204030204" pitchFamily="49" charset="0"/>
               </a:rPr>
               <a:t>class</a:t>
             </a:r>
             <a:r>
-              <a:rPr sz="1200" dirty="0">
-                <a:latin typeface="Consolas" panose="020B0609020204030204" pitchFamily="49" charset="0"/>
-              </a:rPr>
-              <a:t> </a:t>
-            </a:r>
-            <a:r>
-              <a:rPr sz="1200" dirty="0" err="1">
+              <a:rPr lang="de-DE" sz="1200" b="0" dirty="0">
+                <a:solidFill>
+                  <a:srgbClr val="3B3B3B"/>
+                </a:solidFill>
+                <a:effectLst/>
+                <a:latin typeface="Consolas" panose="020B0609020204030204" pitchFamily="49" charset="0"/>
+              </a:rPr>
+              <a:t> </a:t>
+            </a:r>
+            <a:r>
+              <a:rPr lang="de-DE" sz="1200" b="0" dirty="0" err="1">
+                <a:solidFill>
+                  <a:srgbClr val="267F99"/>
+                </a:solidFill>
+                <a:effectLst/>
                 <a:latin typeface="Consolas" panose="020B0609020204030204" pitchFamily="49" charset="0"/>
               </a:rPr>
               <a:t>RegisterAdapter</a:t>
             </a:r>
             <a:r>
-              <a:rPr sz="1200" dirty="0">
-                <a:latin typeface="Consolas" panose="020B0609020204030204" pitchFamily="49" charset="0"/>
-              </a:rPr>
-              <a:t> </a:t>
-            </a:r>
-            <a:r>
-              <a:rPr sz="1200" dirty="0">
-                <a:solidFill>
-                  <a:srgbClr val="666666"/>
-                </a:solidFill>
-                <a:latin typeface="Consolas" panose="020B0609020204030204" pitchFamily="49" charset="0"/>
-              </a:rPr>
-              <a:t>:</a:t>
-            </a:r>
-            <a:r>
-              <a:rPr sz="1200" dirty="0">
-                <a:latin typeface="Consolas" panose="020B0609020204030204" pitchFamily="49" charset="0"/>
-              </a:rPr>
-              <a:t> </a:t>
-            </a:r>
-            <a:r>
-              <a:rPr sz="1200" dirty="0" err="1">
+              <a:rPr lang="de-DE" sz="1200" b="0" dirty="0">
+                <a:solidFill>
+                  <a:srgbClr val="3B3B3B"/>
+                </a:solidFill>
+                <a:effectLst/>
+                <a:latin typeface="Consolas" panose="020B0609020204030204" pitchFamily="49" charset="0"/>
+              </a:rPr>
+              <a:t> : </a:t>
+            </a:r>
+            <a:r>
+              <a:rPr lang="de-DE" sz="1200" b="0" dirty="0" err="1">
+                <a:solidFill>
+                  <a:srgbClr val="267F99"/>
+                </a:solidFill>
+                <a:effectLst/>
                 <a:latin typeface="Consolas" panose="020B0609020204030204" pitchFamily="49" charset="0"/>
               </a:rPr>
               <a:t>IPersonenQuelle</a:t>
             </a:r>
-            <a:br>
-              <a:rPr sz="1200" dirty="0">
-                <a:latin typeface="Consolas" panose="020B0609020204030204" pitchFamily="49" charset="0"/>
-              </a:rPr>
-            </a:br>
-            <a:r>
-              <a:rPr sz="1200" dirty="0">
-                <a:solidFill>
-                  <a:srgbClr val="666666"/>
-                </a:solidFill>
+            <a:endParaRPr lang="de-DE" sz="1200" b="0" dirty="0">
+              <a:solidFill>
+                <a:srgbClr val="3B3B3B"/>
+              </a:solidFill>
+              <a:effectLst/>
+              <a:latin typeface="Consolas" panose="020B0609020204030204" pitchFamily="49" charset="0"/>
+            </a:endParaRPr>
+          </a:p>
+          <a:p>
+            <a:pPr>
+              <a:lnSpc>
+                <a:spcPts val="1425"/>
+              </a:lnSpc>
+              <a:buNone/>
+            </a:pPr>
+            <a:r>
+              <a:rPr lang="de-DE" sz="1200" b="0" dirty="0">
+                <a:solidFill>
+                  <a:srgbClr val="3B3B3B"/>
+                </a:solidFill>
+                <a:effectLst/>
                 <a:latin typeface="Consolas" panose="020B0609020204030204" pitchFamily="49" charset="0"/>
               </a:rPr>
               <a:t>{</a:t>
             </a:r>
-            <a:br>
-              <a:rPr sz="1200" dirty="0">
-                <a:latin typeface="Consolas" panose="020B0609020204030204" pitchFamily="49" charset="0"/>
-              </a:rPr>
-            </a:br>
-            <a:r>
-              <a:rPr sz="1200" dirty="0">
-                <a:latin typeface="Consolas" panose="020B0609020204030204" pitchFamily="49" charset="0"/>
-              </a:rPr>
-              <a:t>    </a:t>
-            </a:r>
-            <a:r>
-              <a:rPr sz="1200" b="1" dirty="0">
-                <a:solidFill>
-                  <a:srgbClr val="007020"/>
-                </a:solidFill>
+          </a:p>
+          <a:p>
+            <a:pPr>
+              <a:lnSpc>
+                <a:spcPts val="1425"/>
+              </a:lnSpc>
+              <a:buNone/>
+            </a:pPr>
+            <a:r>
+              <a:rPr lang="de-DE" sz="1200" b="0" dirty="0">
+                <a:solidFill>
+                  <a:srgbClr val="3B3B3B"/>
+                </a:solidFill>
+                <a:effectLst/>
+                <a:latin typeface="Consolas" panose="020B0609020204030204" pitchFamily="49" charset="0"/>
+              </a:rPr>
+              <a:t>    </a:t>
+            </a:r>
+            <a:r>
+              <a:rPr lang="de-DE" sz="1200" b="0" dirty="0">
+                <a:solidFill>
+                  <a:srgbClr val="0000FF"/>
+                </a:solidFill>
+                <a:effectLst/>
                 <a:latin typeface="Consolas" panose="020B0609020204030204" pitchFamily="49" charset="0"/>
               </a:rPr>
               <a:t>private</a:t>
             </a:r>
             <a:r>
-              <a:rPr sz="1200" dirty="0">
-                <a:latin typeface="Consolas" panose="020B0609020204030204" pitchFamily="49" charset="0"/>
-              </a:rPr>
-              <a:t> </a:t>
-            </a:r>
-            <a:r>
-              <a:rPr sz="1200" b="1" dirty="0" err="1">
-                <a:solidFill>
-                  <a:srgbClr val="007020"/>
-                </a:solidFill>
+              <a:rPr lang="de-DE" sz="1200" b="0" dirty="0">
+                <a:solidFill>
+                  <a:srgbClr val="3B3B3B"/>
+                </a:solidFill>
+                <a:effectLst/>
+                <a:latin typeface="Consolas" panose="020B0609020204030204" pitchFamily="49" charset="0"/>
+              </a:rPr>
+              <a:t> </a:t>
+            </a:r>
+            <a:r>
+              <a:rPr lang="de-DE" sz="1200" b="0" dirty="0" err="1">
+                <a:solidFill>
+                  <a:srgbClr val="0000FF"/>
+                </a:solidFill>
+                <a:effectLst/>
                 <a:latin typeface="Consolas" panose="020B0609020204030204" pitchFamily="49" charset="0"/>
               </a:rPr>
               <a:t>readonly</a:t>
             </a:r>
             <a:r>
-              <a:rPr sz="1200" dirty="0">
-                <a:latin typeface="Consolas" panose="020B0609020204030204" pitchFamily="49" charset="0"/>
-              </a:rPr>
-              <a:t> </a:t>
-            </a:r>
-            <a:r>
-              <a:rPr sz="1200" dirty="0" err="1">
+              <a:rPr lang="de-DE" sz="1200" b="0" dirty="0">
+                <a:solidFill>
+                  <a:srgbClr val="3B3B3B"/>
+                </a:solidFill>
+                <a:effectLst/>
+                <a:latin typeface="Consolas" panose="020B0609020204030204" pitchFamily="49" charset="0"/>
+              </a:rPr>
+              <a:t> </a:t>
+            </a:r>
+            <a:r>
+              <a:rPr lang="de-DE" sz="1200" b="0" dirty="0" err="1">
+                <a:solidFill>
+                  <a:srgbClr val="267F99"/>
+                </a:solidFill>
+                <a:effectLst/>
                 <a:latin typeface="Consolas" panose="020B0609020204030204" pitchFamily="49" charset="0"/>
               </a:rPr>
               <a:t>AltesRegisterSystem</a:t>
             </a:r>
             <a:r>
-              <a:rPr sz="1200" dirty="0">
-                <a:latin typeface="Consolas" panose="020B0609020204030204" pitchFamily="49" charset="0"/>
-              </a:rPr>
-              <a:t> _</a:t>
-            </a:r>
-            <a:r>
-              <a:rPr sz="1200" dirty="0" err="1">
+              <a:rPr lang="de-DE" sz="1200" b="0" dirty="0">
+                <a:solidFill>
+                  <a:srgbClr val="3B3B3B"/>
+                </a:solidFill>
+                <a:effectLst/>
+                <a:latin typeface="Consolas" panose="020B0609020204030204" pitchFamily="49" charset="0"/>
+              </a:rPr>
+              <a:t> </a:t>
+            </a:r>
+            <a:r>
+              <a:rPr lang="de-DE" sz="1200" b="0" dirty="0">
+                <a:solidFill>
+                  <a:srgbClr val="001080"/>
+                </a:solidFill>
+                <a:effectLst/>
+                <a:latin typeface="Consolas" panose="020B0609020204030204" pitchFamily="49" charset="0"/>
+              </a:rPr>
+              <a:t>_</a:t>
+            </a:r>
+            <a:r>
+              <a:rPr lang="de-DE" sz="1200" b="0" dirty="0" err="1">
+                <a:solidFill>
+                  <a:srgbClr val="001080"/>
+                </a:solidFill>
+                <a:effectLst/>
                 <a:latin typeface="Consolas" panose="020B0609020204030204" pitchFamily="49" charset="0"/>
               </a:rPr>
               <a:t>legacySystem</a:t>
             </a:r>
             <a:r>
-              <a:rPr sz="1200" dirty="0">
-                <a:latin typeface="Consolas" panose="020B0609020204030204" pitchFamily="49" charset="0"/>
-              </a:rPr>
-              <a:t> </a:t>
-            </a:r>
-            <a:r>
-              <a:rPr sz="1200" dirty="0">
-                <a:solidFill>
-                  <a:srgbClr val="666666"/>
-                </a:solidFill>
+              <a:rPr lang="de-DE" sz="1200" b="0" dirty="0">
+                <a:solidFill>
+                  <a:srgbClr val="3B3B3B"/>
+                </a:solidFill>
+                <a:effectLst/>
+                <a:latin typeface="Consolas" panose="020B0609020204030204" pitchFamily="49" charset="0"/>
+              </a:rPr>
+              <a:t>;</a:t>
+            </a:r>
+          </a:p>
+          <a:p>
+            <a:pPr>
+              <a:lnSpc>
+                <a:spcPts val="1425"/>
+              </a:lnSpc>
+              <a:buNone/>
+            </a:pPr>
+            <a:endParaRPr lang="de-DE" sz="1200" b="0" dirty="0">
+              <a:solidFill>
+                <a:srgbClr val="3B3B3B"/>
+              </a:solidFill>
+              <a:effectLst/>
+              <a:latin typeface="Consolas" panose="020B0609020204030204" pitchFamily="49" charset="0"/>
+            </a:endParaRPr>
+          </a:p>
+          <a:p>
+            <a:pPr>
+              <a:lnSpc>
+                <a:spcPts val="1425"/>
+              </a:lnSpc>
+              <a:buNone/>
+            </a:pPr>
+            <a:r>
+              <a:rPr lang="de-DE" sz="1200" b="0" dirty="0">
+                <a:solidFill>
+                  <a:srgbClr val="3B3B3B"/>
+                </a:solidFill>
+                <a:effectLst/>
+                <a:latin typeface="Consolas" panose="020B0609020204030204" pitchFamily="49" charset="0"/>
+              </a:rPr>
+              <a:t>    </a:t>
+            </a:r>
+            <a:r>
+              <a:rPr lang="de-DE" sz="1200" b="0" dirty="0" err="1">
+                <a:solidFill>
+                  <a:srgbClr val="0000FF"/>
+                </a:solidFill>
+                <a:effectLst/>
+                <a:latin typeface="Consolas" panose="020B0609020204030204" pitchFamily="49" charset="0"/>
+              </a:rPr>
+              <a:t>public</a:t>
+            </a:r>
+            <a:r>
+              <a:rPr lang="de-DE" sz="1200" b="0" dirty="0">
+                <a:solidFill>
+                  <a:srgbClr val="3B3B3B"/>
+                </a:solidFill>
+                <a:effectLst/>
+                <a:latin typeface="Consolas" panose="020B0609020204030204" pitchFamily="49" charset="0"/>
+              </a:rPr>
+              <a:t> </a:t>
+            </a:r>
+            <a:r>
+              <a:rPr lang="de-DE" sz="1200" b="0" dirty="0" err="1">
+                <a:solidFill>
+                  <a:srgbClr val="267F99"/>
+                </a:solidFill>
+                <a:effectLst/>
+                <a:latin typeface="Consolas" panose="020B0609020204030204" pitchFamily="49" charset="0"/>
+              </a:rPr>
+              <a:t>RegisterAdapter</a:t>
+            </a:r>
+            <a:r>
+              <a:rPr lang="de-DE" sz="1200" b="0" dirty="0">
+                <a:solidFill>
+                  <a:srgbClr val="3B3B3B"/>
+                </a:solidFill>
+                <a:effectLst/>
+                <a:latin typeface="Consolas" panose="020B0609020204030204" pitchFamily="49" charset="0"/>
+              </a:rPr>
+              <a:t>(</a:t>
+            </a:r>
+            <a:r>
+              <a:rPr lang="de-DE" sz="1200" b="0" dirty="0" err="1">
+                <a:solidFill>
+                  <a:srgbClr val="267F99"/>
+                </a:solidFill>
+                <a:effectLst/>
+                <a:latin typeface="Consolas" panose="020B0609020204030204" pitchFamily="49" charset="0"/>
+              </a:rPr>
+              <a:t>AltesRegisterSystem</a:t>
+            </a:r>
+            <a:r>
+              <a:rPr lang="de-DE" sz="1200" b="0" dirty="0">
+                <a:solidFill>
+                  <a:srgbClr val="3B3B3B"/>
+                </a:solidFill>
+                <a:effectLst/>
+                <a:latin typeface="Consolas" panose="020B0609020204030204" pitchFamily="49" charset="0"/>
+              </a:rPr>
+              <a:t> </a:t>
+            </a:r>
+            <a:r>
+              <a:rPr lang="de-DE" sz="1200" b="0" dirty="0" err="1">
+                <a:solidFill>
+                  <a:srgbClr val="001080"/>
+                </a:solidFill>
+                <a:effectLst/>
+                <a:latin typeface="Consolas" panose="020B0609020204030204" pitchFamily="49" charset="0"/>
+              </a:rPr>
+              <a:t>legacySystem</a:t>
+            </a:r>
+            <a:r>
+              <a:rPr lang="de-DE" sz="1200" b="0" dirty="0">
+                <a:solidFill>
+                  <a:srgbClr val="3B3B3B"/>
+                </a:solidFill>
+                <a:effectLst/>
+                <a:latin typeface="Consolas" panose="020B0609020204030204" pitchFamily="49" charset="0"/>
+              </a:rPr>
+              <a:t>) {</a:t>
+            </a:r>
+          </a:p>
+          <a:p>
+            <a:pPr>
+              <a:lnSpc>
+                <a:spcPts val="1425"/>
+              </a:lnSpc>
+              <a:buNone/>
+            </a:pPr>
+            <a:r>
+              <a:rPr lang="de-DE" sz="1200" b="0" dirty="0">
+                <a:solidFill>
+                  <a:srgbClr val="3B3B3B"/>
+                </a:solidFill>
+                <a:effectLst/>
+                <a:latin typeface="Consolas" panose="020B0609020204030204" pitchFamily="49" charset="0"/>
+              </a:rPr>
+              <a:t>        </a:t>
+            </a:r>
+            <a:r>
+              <a:rPr lang="de-DE" sz="1200" b="0" dirty="0">
+                <a:solidFill>
+                  <a:srgbClr val="001080"/>
+                </a:solidFill>
+                <a:effectLst/>
+                <a:latin typeface="Consolas" panose="020B0609020204030204" pitchFamily="49" charset="0"/>
+              </a:rPr>
+              <a:t>_</a:t>
+            </a:r>
+            <a:r>
+              <a:rPr lang="de-DE" sz="1200" b="0" dirty="0" err="1">
+                <a:solidFill>
+                  <a:srgbClr val="001080"/>
+                </a:solidFill>
+                <a:effectLst/>
+                <a:latin typeface="Consolas" panose="020B0609020204030204" pitchFamily="49" charset="0"/>
+              </a:rPr>
+              <a:t>legacySystem</a:t>
+            </a:r>
+            <a:r>
+              <a:rPr lang="de-DE" sz="1200" b="0" dirty="0">
+                <a:solidFill>
+                  <a:srgbClr val="3B3B3B"/>
+                </a:solidFill>
+                <a:effectLst/>
+                <a:latin typeface="Consolas" panose="020B0609020204030204" pitchFamily="49" charset="0"/>
+              </a:rPr>
+              <a:t> </a:t>
+            </a:r>
+            <a:r>
+              <a:rPr lang="de-DE" sz="1200" b="0" dirty="0">
+                <a:solidFill>
+                  <a:srgbClr val="000000"/>
+                </a:solidFill>
+                <a:effectLst/>
                 <a:latin typeface="Consolas" panose="020B0609020204030204" pitchFamily="49" charset="0"/>
               </a:rPr>
               <a:t>=</a:t>
             </a:r>
             <a:r>
-              <a:rPr sz="1200" dirty="0">
-                <a:latin typeface="Consolas" panose="020B0609020204030204" pitchFamily="49" charset="0"/>
-              </a:rPr>
-              <a:t> </a:t>
-            </a:r>
-            <a:r>
-              <a:rPr sz="1200" b="1" dirty="0">
-                <a:solidFill>
-                  <a:srgbClr val="007020"/>
-                </a:solidFill>
+              <a:rPr lang="de-DE" sz="1200" b="0" dirty="0">
+                <a:solidFill>
+                  <a:srgbClr val="3B3B3B"/>
+                </a:solidFill>
+                <a:effectLst/>
+                <a:latin typeface="Consolas" panose="020B0609020204030204" pitchFamily="49" charset="0"/>
+              </a:rPr>
+              <a:t> </a:t>
+            </a:r>
+            <a:r>
+              <a:rPr lang="de-DE" sz="1200" b="0" dirty="0" err="1">
+                <a:solidFill>
+                  <a:srgbClr val="001080"/>
+                </a:solidFill>
+                <a:effectLst/>
+                <a:latin typeface="Consolas" panose="020B0609020204030204" pitchFamily="49" charset="0"/>
+              </a:rPr>
+              <a:t>legacySystem</a:t>
+            </a:r>
+            <a:r>
+              <a:rPr lang="de-DE" sz="1200" b="0" dirty="0">
+                <a:solidFill>
+                  <a:srgbClr val="3B3B3B"/>
+                </a:solidFill>
+                <a:effectLst/>
+                <a:latin typeface="Consolas" panose="020B0609020204030204" pitchFamily="49" charset="0"/>
+              </a:rPr>
+              <a:t>;</a:t>
+            </a:r>
+          </a:p>
+          <a:p>
+            <a:pPr>
+              <a:lnSpc>
+                <a:spcPts val="1425"/>
+              </a:lnSpc>
+              <a:buNone/>
+            </a:pPr>
+            <a:r>
+              <a:rPr lang="de-DE" sz="1200" b="0" dirty="0">
+                <a:solidFill>
+                  <a:srgbClr val="3B3B3B"/>
+                </a:solidFill>
+                <a:effectLst/>
+                <a:latin typeface="Consolas" panose="020B0609020204030204" pitchFamily="49" charset="0"/>
+              </a:rPr>
+              <a:t>    }</a:t>
+            </a:r>
+          </a:p>
+          <a:p>
+            <a:pPr>
+              <a:lnSpc>
+                <a:spcPts val="1425"/>
+              </a:lnSpc>
+              <a:buNone/>
+            </a:pPr>
+            <a:endParaRPr lang="de-DE" sz="1200" b="0" dirty="0">
+              <a:solidFill>
+                <a:srgbClr val="3B3B3B"/>
+              </a:solidFill>
+              <a:effectLst/>
+              <a:latin typeface="Consolas" panose="020B0609020204030204" pitchFamily="49" charset="0"/>
+            </a:endParaRPr>
+          </a:p>
+          <a:p>
+            <a:pPr>
+              <a:lnSpc>
+                <a:spcPts val="1425"/>
+              </a:lnSpc>
+              <a:buNone/>
+            </a:pPr>
+            <a:r>
+              <a:rPr lang="de-DE" sz="1200" b="0" dirty="0">
+                <a:solidFill>
+                  <a:srgbClr val="3B3B3B"/>
+                </a:solidFill>
+                <a:effectLst/>
+                <a:latin typeface="Consolas" panose="020B0609020204030204" pitchFamily="49" charset="0"/>
+              </a:rPr>
+              <a:t>    </a:t>
+            </a:r>
+            <a:r>
+              <a:rPr lang="de-DE" sz="1200" b="0" dirty="0" err="1">
+                <a:solidFill>
+                  <a:srgbClr val="0000FF"/>
+                </a:solidFill>
+                <a:effectLst/>
+                <a:latin typeface="Consolas" panose="020B0609020204030204" pitchFamily="49" charset="0"/>
+              </a:rPr>
+              <a:t>public</a:t>
+            </a:r>
+            <a:r>
+              <a:rPr lang="de-DE" sz="1200" b="0" dirty="0">
+                <a:solidFill>
+                  <a:srgbClr val="3B3B3B"/>
+                </a:solidFill>
+                <a:effectLst/>
+                <a:latin typeface="Consolas" panose="020B0609020204030204" pitchFamily="49" charset="0"/>
+              </a:rPr>
+              <a:t> </a:t>
+            </a:r>
+            <a:r>
+              <a:rPr lang="de-DE" sz="1200" b="0" dirty="0">
+                <a:solidFill>
+                  <a:srgbClr val="267F99"/>
+                </a:solidFill>
+                <a:effectLst/>
+                <a:latin typeface="Consolas" panose="020B0609020204030204" pitchFamily="49" charset="0"/>
+              </a:rPr>
+              <a:t>Person</a:t>
+            </a:r>
+            <a:r>
+              <a:rPr lang="de-DE" sz="1200" b="0" dirty="0">
+                <a:solidFill>
+                  <a:srgbClr val="3B3B3B"/>
+                </a:solidFill>
+                <a:effectLst/>
+                <a:latin typeface="Consolas" panose="020B0609020204030204" pitchFamily="49" charset="0"/>
+              </a:rPr>
+              <a:t> </a:t>
+            </a:r>
+            <a:r>
+              <a:rPr lang="de-DE" sz="1200" b="0" dirty="0" err="1">
+                <a:solidFill>
+                  <a:srgbClr val="795E26"/>
+                </a:solidFill>
+                <a:effectLst/>
+                <a:latin typeface="Consolas" panose="020B0609020204030204" pitchFamily="49" charset="0"/>
+              </a:rPr>
+              <a:t>GetPerson</a:t>
+            </a:r>
+            <a:r>
+              <a:rPr lang="de-DE" sz="1200" b="0" dirty="0">
+                <a:solidFill>
+                  <a:srgbClr val="3B3B3B"/>
+                </a:solidFill>
+                <a:effectLst/>
+                <a:latin typeface="Consolas" panose="020B0609020204030204" pitchFamily="49" charset="0"/>
+              </a:rPr>
+              <a:t>(</a:t>
+            </a:r>
+            <a:r>
+              <a:rPr lang="de-DE" sz="1200" b="0" dirty="0" err="1">
+                <a:solidFill>
+                  <a:srgbClr val="0000FF"/>
+                </a:solidFill>
+                <a:effectLst/>
+                <a:latin typeface="Consolas" panose="020B0609020204030204" pitchFamily="49" charset="0"/>
+              </a:rPr>
+              <a:t>string</a:t>
+            </a:r>
+            <a:r>
+              <a:rPr lang="de-DE" sz="1200" b="0" dirty="0">
+                <a:solidFill>
+                  <a:srgbClr val="3B3B3B"/>
+                </a:solidFill>
+                <a:effectLst/>
+                <a:latin typeface="Consolas" panose="020B0609020204030204" pitchFamily="49" charset="0"/>
+              </a:rPr>
+              <a:t> </a:t>
+            </a:r>
+            <a:r>
+              <a:rPr lang="de-DE" sz="1200" b="0" dirty="0" err="1">
+                <a:solidFill>
+                  <a:srgbClr val="001080"/>
+                </a:solidFill>
+                <a:effectLst/>
+                <a:latin typeface="Consolas" panose="020B0609020204030204" pitchFamily="49" charset="0"/>
+              </a:rPr>
+              <a:t>id</a:t>
+            </a:r>
+            <a:r>
+              <a:rPr lang="de-DE" sz="1200" b="0" dirty="0">
+                <a:solidFill>
+                  <a:srgbClr val="3B3B3B"/>
+                </a:solidFill>
+                <a:effectLst/>
+                <a:latin typeface="Consolas" panose="020B0609020204030204" pitchFamily="49" charset="0"/>
+              </a:rPr>
+              <a:t>) {</a:t>
+            </a:r>
+          </a:p>
+          <a:p>
+            <a:pPr>
+              <a:lnSpc>
+                <a:spcPts val="1425"/>
+              </a:lnSpc>
+              <a:buNone/>
+            </a:pPr>
+            <a:r>
+              <a:rPr lang="de-DE" sz="1200" b="0" dirty="0">
+                <a:solidFill>
+                  <a:srgbClr val="3B3B3B"/>
+                </a:solidFill>
+                <a:effectLst/>
+                <a:latin typeface="Consolas" panose="020B0609020204030204" pitchFamily="49" charset="0"/>
+              </a:rPr>
+              <a:t>        </a:t>
+            </a:r>
+            <a:r>
+              <a:rPr lang="de-DE" sz="1200" b="0" dirty="0" err="1">
+                <a:solidFill>
+                  <a:srgbClr val="0000FF"/>
+                </a:solidFill>
+                <a:effectLst/>
+                <a:latin typeface="Consolas" panose="020B0609020204030204" pitchFamily="49" charset="0"/>
+              </a:rPr>
+              <a:t>string</a:t>
+            </a:r>
+            <a:r>
+              <a:rPr lang="de-DE" sz="1200" b="0" dirty="0">
+                <a:solidFill>
+                  <a:srgbClr val="3B3B3B"/>
+                </a:solidFill>
+                <a:effectLst/>
+                <a:latin typeface="Consolas" panose="020B0609020204030204" pitchFamily="49" charset="0"/>
+              </a:rPr>
+              <a:t> </a:t>
+            </a:r>
+            <a:r>
+              <a:rPr lang="de-DE" sz="1200" b="0" dirty="0" err="1">
+                <a:solidFill>
+                  <a:srgbClr val="001080"/>
+                </a:solidFill>
+                <a:effectLst/>
+                <a:latin typeface="Consolas" panose="020B0609020204030204" pitchFamily="49" charset="0"/>
+              </a:rPr>
+              <a:t>rohDaten</a:t>
+            </a:r>
+            <a:r>
+              <a:rPr lang="de-DE" sz="1200" b="0" dirty="0">
+                <a:solidFill>
+                  <a:srgbClr val="3B3B3B"/>
+                </a:solidFill>
+                <a:effectLst/>
+                <a:latin typeface="Consolas" panose="020B0609020204030204" pitchFamily="49" charset="0"/>
+              </a:rPr>
+              <a:t> </a:t>
+            </a:r>
+            <a:r>
+              <a:rPr lang="de-DE" sz="1200" b="0" dirty="0">
+                <a:solidFill>
+                  <a:srgbClr val="000000"/>
+                </a:solidFill>
+                <a:effectLst/>
+                <a:latin typeface="Consolas" panose="020B0609020204030204" pitchFamily="49" charset="0"/>
+              </a:rPr>
+              <a:t>=</a:t>
+            </a:r>
+            <a:r>
+              <a:rPr lang="de-DE" sz="1200" b="0" dirty="0">
+                <a:solidFill>
+                  <a:srgbClr val="3B3B3B"/>
+                </a:solidFill>
+                <a:effectLst/>
+                <a:latin typeface="Consolas" panose="020B0609020204030204" pitchFamily="49" charset="0"/>
+              </a:rPr>
+              <a:t> </a:t>
+            </a:r>
+            <a:r>
+              <a:rPr lang="de-DE" sz="1200" b="0" dirty="0">
+                <a:solidFill>
+                  <a:srgbClr val="001080"/>
+                </a:solidFill>
+                <a:effectLst/>
+                <a:latin typeface="Consolas" panose="020B0609020204030204" pitchFamily="49" charset="0"/>
+              </a:rPr>
+              <a:t>_</a:t>
+            </a:r>
+            <a:r>
+              <a:rPr lang="de-DE" sz="1200" b="0" dirty="0" err="1">
+                <a:solidFill>
+                  <a:srgbClr val="001080"/>
+                </a:solidFill>
+                <a:effectLst/>
+                <a:latin typeface="Consolas" panose="020B0609020204030204" pitchFamily="49" charset="0"/>
+              </a:rPr>
+              <a:t>legacySystem</a:t>
+            </a:r>
+            <a:r>
+              <a:rPr lang="de-DE" sz="1200" b="0" dirty="0" err="1">
+                <a:solidFill>
+                  <a:srgbClr val="000000"/>
+                </a:solidFill>
+                <a:effectLst/>
+                <a:latin typeface="Consolas" panose="020B0609020204030204" pitchFamily="49" charset="0"/>
+              </a:rPr>
+              <a:t>.</a:t>
+            </a:r>
+            <a:r>
+              <a:rPr lang="de-DE" sz="1200" b="0" dirty="0" err="1">
+                <a:solidFill>
+                  <a:srgbClr val="795E26"/>
+                </a:solidFill>
+                <a:effectLst/>
+                <a:latin typeface="Consolas" panose="020B0609020204030204" pitchFamily="49" charset="0"/>
+              </a:rPr>
+              <a:t>SuchePersonDatensatz</a:t>
+            </a:r>
+            <a:r>
+              <a:rPr lang="de-DE" sz="1200" b="0" dirty="0">
+                <a:solidFill>
+                  <a:srgbClr val="3B3B3B"/>
+                </a:solidFill>
+                <a:effectLst/>
+                <a:latin typeface="Consolas" panose="020B0609020204030204" pitchFamily="49" charset="0"/>
+              </a:rPr>
+              <a:t>(</a:t>
+            </a:r>
+            <a:r>
+              <a:rPr lang="de-DE" sz="1200" b="0" dirty="0" err="1">
+                <a:solidFill>
+                  <a:srgbClr val="001080"/>
+                </a:solidFill>
+                <a:effectLst/>
+                <a:latin typeface="Consolas" panose="020B0609020204030204" pitchFamily="49" charset="0"/>
+              </a:rPr>
+              <a:t>id</a:t>
+            </a:r>
+            <a:r>
+              <a:rPr lang="de-DE" sz="1200" b="0" dirty="0">
+                <a:solidFill>
+                  <a:srgbClr val="3B3B3B"/>
+                </a:solidFill>
+                <a:effectLst/>
+                <a:latin typeface="Consolas" panose="020B0609020204030204" pitchFamily="49" charset="0"/>
+              </a:rPr>
+              <a:t>);</a:t>
+            </a:r>
+          </a:p>
+          <a:p>
+            <a:pPr>
+              <a:lnSpc>
+                <a:spcPts val="1425"/>
+              </a:lnSpc>
+              <a:buNone/>
+            </a:pPr>
+            <a:r>
+              <a:rPr lang="de-DE" sz="1200" b="0" dirty="0">
+                <a:solidFill>
+                  <a:srgbClr val="3B3B3B"/>
+                </a:solidFill>
+                <a:effectLst/>
+                <a:latin typeface="Consolas" panose="020B0609020204030204" pitchFamily="49" charset="0"/>
+              </a:rPr>
+              <a:t>        </a:t>
+            </a:r>
+            <a:r>
+              <a:rPr lang="de-DE" sz="1200" b="0" dirty="0" err="1">
+                <a:solidFill>
+                  <a:srgbClr val="0000FF"/>
+                </a:solidFill>
+                <a:effectLst/>
+                <a:latin typeface="Consolas" panose="020B0609020204030204" pitchFamily="49" charset="0"/>
+              </a:rPr>
+              <a:t>string</a:t>
+            </a:r>
+            <a:r>
+              <a:rPr lang="de-DE" sz="1200" b="0" dirty="0">
+                <a:solidFill>
+                  <a:srgbClr val="3B3B3B"/>
+                </a:solidFill>
+                <a:effectLst/>
+                <a:latin typeface="Consolas" panose="020B0609020204030204" pitchFamily="49" charset="0"/>
+              </a:rPr>
+              <a:t>[] </a:t>
+            </a:r>
+            <a:r>
+              <a:rPr lang="de-DE" sz="1200" b="0" dirty="0">
+                <a:solidFill>
+                  <a:srgbClr val="001080"/>
+                </a:solidFill>
+                <a:effectLst/>
+                <a:latin typeface="Consolas" panose="020B0609020204030204" pitchFamily="49" charset="0"/>
+              </a:rPr>
+              <a:t>teile</a:t>
+            </a:r>
+            <a:r>
+              <a:rPr lang="de-DE" sz="1200" b="0" dirty="0">
+                <a:solidFill>
+                  <a:srgbClr val="3B3B3B"/>
+                </a:solidFill>
+                <a:effectLst/>
+                <a:latin typeface="Consolas" panose="020B0609020204030204" pitchFamily="49" charset="0"/>
+              </a:rPr>
+              <a:t> </a:t>
+            </a:r>
+            <a:r>
+              <a:rPr lang="de-DE" sz="1200" b="0" dirty="0">
+                <a:solidFill>
+                  <a:srgbClr val="000000"/>
+                </a:solidFill>
+                <a:effectLst/>
+                <a:latin typeface="Consolas" panose="020B0609020204030204" pitchFamily="49" charset="0"/>
+              </a:rPr>
+              <a:t>=</a:t>
+            </a:r>
+            <a:r>
+              <a:rPr lang="de-DE" sz="1200" b="0" dirty="0">
+                <a:solidFill>
+                  <a:srgbClr val="3B3B3B"/>
+                </a:solidFill>
+                <a:effectLst/>
+                <a:latin typeface="Consolas" panose="020B0609020204030204" pitchFamily="49" charset="0"/>
+              </a:rPr>
+              <a:t> </a:t>
+            </a:r>
+            <a:r>
+              <a:rPr lang="de-DE" sz="1200" b="0" dirty="0" err="1">
+                <a:solidFill>
+                  <a:srgbClr val="001080"/>
+                </a:solidFill>
+                <a:effectLst/>
+                <a:latin typeface="Consolas" panose="020B0609020204030204" pitchFamily="49" charset="0"/>
+              </a:rPr>
+              <a:t>rohDaten</a:t>
+            </a:r>
+            <a:r>
+              <a:rPr lang="de-DE" sz="1200" b="0" dirty="0" err="1">
+                <a:solidFill>
+                  <a:srgbClr val="000000"/>
+                </a:solidFill>
+                <a:effectLst/>
+                <a:latin typeface="Consolas" panose="020B0609020204030204" pitchFamily="49" charset="0"/>
+              </a:rPr>
+              <a:t>.</a:t>
+            </a:r>
+            <a:r>
+              <a:rPr lang="de-DE" sz="1200" b="0" dirty="0" err="1">
+                <a:solidFill>
+                  <a:srgbClr val="795E26"/>
+                </a:solidFill>
+                <a:effectLst/>
+                <a:latin typeface="Consolas" panose="020B0609020204030204" pitchFamily="49" charset="0"/>
+              </a:rPr>
+              <a:t>Split</a:t>
+            </a:r>
+            <a:r>
+              <a:rPr lang="de-DE" sz="1200" b="0" dirty="0">
+                <a:solidFill>
+                  <a:srgbClr val="3B3B3B"/>
+                </a:solidFill>
+                <a:effectLst/>
+                <a:latin typeface="Consolas" panose="020B0609020204030204" pitchFamily="49" charset="0"/>
+              </a:rPr>
+              <a:t>(</a:t>
+            </a:r>
+            <a:r>
+              <a:rPr lang="de-DE" sz="1200" b="0" dirty="0">
+                <a:solidFill>
+                  <a:srgbClr val="A31515"/>
+                </a:solidFill>
+                <a:effectLst/>
+                <a:latin typeface="Consolas" panose="020B0609020204030204" pitchFamily="49" charset="0"/>
+              </a:rPr>
+              <a:t>';'</a:t>
+            </a:r>
+            <a:r>
+              <a:rPr lang="de-DE" sz="1200" b="0" dirty="0">
+                <a:solidFill>
+                  <a:srgbClr val="3B3B3B"/>
+                </a:solidFill>
+                <a:effectLst/>
+                <a:latin typeface="Consolas" panose="020B0609020204030204" pitchFamily="49" charset="0"/>
+              </a:rPr>
+              <a:t>);</a:t>
+            </a:r>
+          </a:p>
+          <a:p>
+            <a:pPr>
+              <a:lnSpc>
+                <a:spcPts val="1425"/>
+              </a:lnSpc>
+              <a:buNone/>
+            </a:pPr>
+            <a:r>
+              <a:rPr lang="de-DE" sz="1200" b="0" dirty="0">
+                <a:solidFill>
+                  <a:srgbClr val="3B3B3B"/>
+                </a:solidFill>
+                <a:effectLst/>
+                <a:latin typeface="Consolas" panose="020B0609020204030204" pitchFamily="49" charset="0"/>
+              </a:rPr>
+              <a:t>        </a:t>
+            </a:r>
+          </a:p>
+          <a:p>
+            <a:pPr>
+              <a:lnSpc>
+                <a:spcPts val="1425"/>
+              </a:lnSpc>
+              <a:buNone/>
+            </a:pPr>
+            <a:r>
+              <a:rPr lang="de-DE" sz="1200" b="0" dirty="0">
+                <a:solidFill>
+                  <a:srgbClr val="3B3B3B"/>
+                </a:solidFill>
+                <a:effectLst/>
+                <a:latin typeface="Consolas" panose="020B0609020204030204" pitchFamily="49" charset="0"/>
+              </a:rPr>
+              <a:t>        </a:t>
+            </a:r>
+            <a:r>
+              <a:rPr lang="de-DE" sz="1200" b="0" dirty="0" err="1">
+                <a:solidFill>
+                  <a:srgbClr val="AF00DB"/>
+                </a:solidFill>
+                <a:effectLst/>
+                <a:latin typeface="Consolas" panose="020B0609020204030204" pitchFamily="49" charset="0"/>
+              </a:rPr>
+              <a:t>return</a:t>
+            </a:r>
+            <a:r>
+              <a:rPr lang="de-DE" sz="1200" b="0" dirty="0">
+                <a:solidFill>
+                  <a:srgbClr val="3B3B3B"/>
+                </a:solidFill>
+                <a:effectLst/>
+                <a:latin typeface="Consolas" panose="020B0609020204030204" pitchFamily="49" charset="0"/>
+              </a:rPr>
+              <a:t> </a:t>
+            </a:r>
+            <a:r>
+              <a:rPr lang="de-DE" sz="1200" b="0" dirty="0" err="1">
+                <a:solidFill>
+                  <a:srgbClr val="0000FF"/>
+                </a:solidFill>
+                <a:effectLst/>
                 <a:latin typeface="Consolas" panose="020B0609020204030204" pitchFamily="49" charset="0"/>
               </a:rPr>
               <a:t>new</a:t>
             </a:r>
             <a:r>
-              <a:rPr sz="1200" dirty="0">
-                <a:latin typeface="Consolas" panose="020B0609020204030204" pitchFamily="49" charset="0"/>
-              </a:rPr>
-              <a:t> </a:t>
-            </a:r>
-            <a:r>
-              <a:rPr lang="de-DE" sz="1200" dirty="0">
-                <a:latin typeface="Consolas" panose="020B0609020204030204" pitchFamily="49" charset="0"/>
-              </a:rPr>
-              <a:t>						                  </a:t>
-            </a:r>
-            <a:r>
-              <a:rPr sz="1200" dirty="0" err="1">
-                <a:solidFill>
-                  <a:srgbClr val="06287E"/>
-                </a:solidFill>
-                <a:latin typeface="Consolas" panose="020B0609020204030204" pitchFamily="49" charset="0"/>
-              </a:rPr>
-              <a:t>AltesRegisterSystem</a:t>
-            </a:r>
-            <a:r>
-              <a:rPr sz="1200" dirty="0">
-                <a:solidFill>
-                  <a:srgbClr val="666666"/>
-                </a:solidFill>
-                <a:latin typeface="Consolas" panose="020B0609020204030204" pitchFamily="49" charset="0"/>
-              </a:rPr>
-              <a:t>();</a:t>
-            </a:r>
-            <a:br>
-              <a:rPr sz="1200" dirty="0">
-                <a:latin typeface="Consolas" panose="020B0609020204030204" pitchFamily="49" charset="0"/>
-              </a:rPr>
-            </a:br>
-            <a:br>
-              <a:rPr sz="1200" dirty="0">
-                <a:latin typeface="Consolas" panose="020B0609020204030204" pitchFamily="49" charset="0"/>
-              </a:rPr>
-            </a:br>
-            <a:r>
-              <a:rPr sz="1200" dirty="0">
-                <a:latin typeface="Consolas" panose="020B0609020204030204" pitchFamily="49" charset="0"/>
-              </a:rPr>
-              <a:t>    </a:t>
-            </a:r>
-            <a:r>
-              <a:rPr sz="1200" b="1" dirty="0">
-                <a:solidFill>
-                  <a:srgbClr val="007020"/>
-                </a:solidFill>
-                <a:latin typeface="Consolas" panose="020B0609020204030204" pitchFamily="49" charset="0"/>
-              </a:rPr>
-              <a:t>public</a:t>
-            </a:r>
-            <a:r>
-              <a:rPr sz="1200" dirty="0">
-                <a:latin typeface="Consolas" panose="020B0609020204030204" pitchFamily="49" charset="0"/>
-              </a:rPr>
-              <a:t> Person </a:t>
-            </a:r>
-            <a:r>
-              <a:rPr sz="1200" dirty="0" err="1">
-                <a:solidFill>
-                  <a:srgbClr val="06287E"/>
-                </a:solidFill>
-                <a:latin typeface="Consolas" panose="020B0609020204030204" pitchFamily="49" charset="0"/>
-              </a:rPr>
-              <a:t>GetPerson</a:t>
-            </a:r>
-            <a:r>
-              <a:rPr sz="1200" dirty="0">
-                <a:solidFill>
-                  <a:srgbClr val="666666"/>
-                </a:solidFill>
+              <a:rPr lang="de-DE" sz="1200" b="0" dirty="0">
+                <a:solidFill>
+                  <a:srgbClr val="3B3B3B"/>
+                </a:solidFill>
+                <a:effectLst/>
+                <a:latin typeface="Consolas" panose="020B0609020204030204" pitchFamily="49" charset="0"/>
+              </a:rPr>
+              <a:t> </a:t>
+            </a:r>
+            <a:r>
+              <a:rPr lang="de-DE" sz="1200" b="0" dirty="0">
+                <a:solidFill>
+                  <a:srgbClr val="267F99"/>
+                </a:solidFill>
+                <a:effectLst/>
+                <a:latin typeface="Consolas" panose="020B0609020204030204" pitchFamily="49" charset="0"/>
+              </a:rPr>
+              <a:t>Person</a:t>
+            </a:r>
+            <a:r>
+              <a:rPr lang="de-DE" sz="1200" b="0" dirty="0">
+                <a:solidFill>
+                  <a:srgbClr val="3B3B3B"/>
+                </a:solidFill>
+                <a:effectLst/>
+                <a:latin typeface="Consolas" panose="020B0609020204030204" pitchFamily="49" charset="0"/>
+              </a:rPr>
+              <a:t> {</a:t>
+            </a:r>
+          </a:p>
+          <a:p>
+            <a:pPr>
+              <a:lnSpc>
+                <a:spcPts val="1425"/>
+              </a:lnSpc>
+              <a:buNone/>
+            </a:pPr>
+            <a:r>
+              <a:rPr lang="de-DE" sz="1200" b="0" dirty="0">
+                <a:solidFill>
+                  <a:srgbClr val="3B3B3B"/>
+                </a:solidFill>
+                <a:effectLst/>
+                <a:latin typeface="Consolas" panose="020B0609020204030204" pitchFamily="49" charset="0"/>
+              </a:rPr>
+              <a:t>            </a:t>
+            </a:r>
+            <a:r>
+              <a:rPr lang="de-DE" sz="1200" b="0" dirty="0">
+                <a:solidFill>
+                  <a:srgbClr val="001080"/>
+                </a:solidFill>
+                <a:effectLst/>
+                <a:latin typeface="Consolas" panose="020B0609020204030204" pitchFamily="49" charset="0"/>
+              </a:rPr>
+              <a:t>Nachname</a:t>
+            </a:r>
+            <a:r>
+              <a:rPr lang="de-DE" sz="1200" b="0" dirty="0">
+                <a:solidFill>
+                  <a:srgbClr val="3B3B3B"/>
+                </a:solidFill>
+                <a:effectLst/>
+                <a:latin typeface="Consolas" panose="020B0609020204030204" pitchFamily="49" charset="0"/>
+              </a:rPr>
+              <a:t> </a:t>
+            </a:r>
+            <a:r>
+              <a:rPr lang="de-DE" sz="1200" b="0" dirty="0">
+                <a:solidFill>
+                  <a:srgbClr val="000000"/>
+                </a:solidFill>
+                <a:effectLst/>
+                <a:latin typeface="Consolas" panose="020B0609020204030204" pitchFamily="49" charset="0"/>
+              </a:rPr>
+              <a:t>=</a:t>
+            </a:r>
+            <a:r>
+              <a:rPr lang="de-DE" sz="1200" b="0" dirty="0">
+                <a:solidFill>
+                  <a:srgbClr val="3B3B3B"/>
+                </a:solidFill>
+                <a:effectLst/>
+                <a:latin typeface="Consolas" panose="020B0609020204030204" pitchFamily="49" charset="0"/>
+              </a:rPr>
+              <a:t> </a:t>
+            </a:r>
+            <a:r>
+              <a:rPr lang="de-DE" sz="1200" b="0" dirty="0">
+                <a:solidFill>
+                  <a:srgbClr val="001080"/>
+                </a:solidFill>
+                <a:effectLst/>
+                <a:latin typeface="Consolas" panose="020B0609020204030204" pitchFamily="49" charset="0"/>
+              </a:rPr>
+              <a:t>teile</a:t>
+            </a:r>
+            <a:r>
+              <a:rPr lang="de-DE" sz="1200" b="0" dirty="0">
+                <a:solidFill>
+                  <a:srgbClr val="3B3B3B"/>
+                </a:solidFill>
+                <a:effectLst/>
+                <a:latin typeface="Consolas" panose="020B0609020204030204" pitchFamily="49" charset="0"/>
+              </a:rPr>
+              <a:t>[</a:t>
+            </a:r>
+            <a:r>
+              <a:rPr lang="de-DE" sz="1200" b="0" dirty="0">
+                <a:solidFill>
+                  <a:srgbClr val="098658"/>
+                </a:solidFill>
+                <a:effectLst/>
+                <a:latin typeface="Consolas" panose="020B0609020204030204" pitchFamily="49" charset="0"/>
+              </a:rPr>
+              <a:t>0</a:t>
+            </a:r>
+            <a:r>
+              <a:rPr lang="de-DE" sz="1200" b="0" dirty="0">
+                <a:solidFill>
+                  <a:srgbClr val="3B3B3B"/>
+                </a:solidFill>
+                <a:effectLst/>
+                <a:latin typeface="Consolas" panose="020B0609020204030204" pitchFamily="49" charset="0"/>
+              </a:rPr>
+              <a:t>],</a:t>
+            </a:r>
+          </a:p>
+          <a:p>
+            <a:pPr>
+              <a:lnSpc>
+                <a:spcPts val="1425"/>
+              </a:lnSpc>
+              <a:buNone/>
+            </a:pPr>
+            <a:r>
+              <a:rPr lang="de-DE" sz="1200" b="0" dirty="0">
+                <a:solidFill>
+                  <a:srgbClr val="3B3B3B"/>
+                </a:solidFill>
+                <a:effectLst/>
+                <a:latin typeface="Consolas" panose="020B0609020204030204" pitchFamily="49" charset="0"/>
+              </a:rPr>
+              <a:t>            </a:t>
+            </a:r>
+            <a:r>
+              <a:rPr lang="de-DE" sz="1200" b="0" dirty="0">
+                <a:solidFill>
+                  <a:srgbClr val="001080"/>
+                </a:solidFill>
+                <a:effectLst/>
+                <a:latin typeface="Consolas" panose="020B0609020204030204" pitchFamily="49" charset="0"/>
+              </a:rPr>
+              <a:t>Vorname</a:t>
+            </a:r>
+            <a:r>
+              <a:rPr lang="de-DE" sz="1200" b="0" dirty="0">
+                <a:solidFill>
+                  <a:srgbClr val="3B3B3B"/>
+                </a:solidFill>
+                <a:effectLst/>
+                <a:latin typeface="Consolas" panose="020B0609020204030204" pitchFamily="49" charset="0"/>
+              </a:rPr>
+              <a:t> </a:t>
+            </a:r>
+            <a:r>
+              <a:rPr lang="de-DE" sz="1200" b="0" dirty="0">
+                <a:solidFill>
+                  <a:srgbClr val="000000"/>
+                </a:solidFill>
+                <a:effectLst/>
+                <a:latin typeface="Consolas" panose="020B0609020204030204" pitchFamily="49" charset="0"/>
+              </a:rPr>
+              <a:t>=</a:t>
+            </a:r>
+            <a:r>
+              <a:rPr lang="de-DE" sz="1200" b="0" dirty="0">
+                <a:solidFill>
+                  <a:srgbClr val="3B3B3B"/>
+                </a:solidFill>
+                <a:effectLst/>
+                <a:latin typeface="Consolas" panose="020B0609020204030204" pitchFamily="49" charset="0"/>
+              </a:rPr>
+              <a:t> </a:t>
+            </a:r>
+            <a:r>
+              <a:rPr lang="de-DE" sz="1200" b="0" dirty="0">
+                <a:solidFill>
+                  <a:srgbClr val="001080"/>
+                </a:solidFill>
+                <a:effectLst/>
+                <a:latin typeface="Consolas" panose="020B0609020204030204" pitchFamily="49" charset="0"/>
+              </a:rPr>
+              <a:t>teile</a:t>
+            </a:r>
+            <a:r>
+              <a:rPr lang="de-DE" sz="1200" b="0" dirty="0">
+                <a:solidFill>
+                  <a:srgbClr val="3B3B3B"/>
+                </a:solidFill>
+                <a:effectLst/>
+                <a:latin typeface="Consolas" panose="020B0609020204030204" pitchFamily="49" charset="0"/>
+              </a:rPr>
+              <a:t>[</a:t>
+            </a:r>
+            <a:r>
+              <a:rPr lang="de-DE" sz="1200" b="0" dirty="0">
+                <a:solidFill>
+                  <a:srgbClr val="098658"/>
+                </a:solidFill>
+                <a:effectLst/>
+                <a:latin typeface="Consolas" panose="020B0609020204030204" pitchFamily="49" charset="0"/>
+              </a:rPr>
+              <a:t>1</a:t>
+            </a:r>
+            <a:r>
+              <a:rPr lang="de-DE" sz="1200" b="0" dirty="0">
+                <a:solidFill>
+                  <a:srgbClr val="3B3B3B"/>
+                </a:solidFill>
+                <a:effectLst/>
+                <a:latin typeface="Consolas" panose="020B0609020204030204" pitchFamily="49" charset="0"/>
+              </a:rPr>
+              <a:t>],</a:t>
+            </a:r>
+          </a:p>
+          <a:p>
+            <a:pPr>
+              <a:lnSpc>
+                <a:spcPts val="1425"/>
+              </a:lnSpc>
+              <a:buNone/>
+            </a:pPr>
+            <a:r>
+              <a:rPr lang="de-DE" sz="1200" b="0" dirty="0">
+                <a:solidFill>
+                  <a:srgbClr val="3B3B3B"/>
+                </a:solidFill>
+                <a:effectLst/>
+                <a:latin typeface="Consolas" panose="020B0609020204030204" pitchFamily="49" charset="0"/>
+              </a:rPr>
+              <a:t>            </a:t>
+            </a:r>
+            <a:r>
+              <a:rPr lang="de-DE" sz="1200" b="0" dirty="0">
+                <a:solidFill>
+                  <a:srgbClr val="001080"/>
+                </a:solidFill>
+                <a:effectLst/>
+                <a:latin typeface="Consolas" panose="020B0609020204030204" pitchFamily="49" charset="0"/>
+              </a:rPr>
+              <a:t>Geburtsdatum</a:t>
+            </a:r>
+            <a:r>
+              <a:rPr lang="de-DE" sz="1200" b="0" dirty="0">
+                <a:solidFill>
+                  <a:srgbClr val="3B3B3B"/>
+                </a:solidFill>
+                <a:effectLst/>
+                <a:latin typeface="Consolas" panose="020B0609020204030204" pitchFamily="49" charset="0"/>
+              </a:rPr>
+              <a:t> </a:t>
+            </a:r>
+            <a:r>
+              <a:rPr lang="de-DE" sz="1200" b="0" dirty="0">
+                <a:solidFill>
+                  <a:srgbClr val="000000"/>
+                </a:solidFill>
+                <a:effectLst/>
+                <a:latin typeface="Consolas" panose="020B0609020204030204" pitchFamily="49" charset="0"/>
+              </a:rPr>
+              <a:t>=</a:t>
+            </a:r>
+            <a:r>
+              <a:rPr lang="de-DE" sz="1200" b="0" dirty="0">
+                <a:solidFill>
+                  <a:srgbClr val="3B3B3B"/>
+                </a:solidFill>
+                <a:effectLst/>
+                <a:latin typeface="Consolas" panose="020B0609020204030204" pitchFamily="49" charset="0"/>
+              </a:rPr>
+              <a:t> </a:t>
+            </a:r>
+            <a:r>
+              <a:rPr lang="de-DE" sz="1200" b="0" dirty="0" err="1">
+                <a:solidFill>
+                  <a:srgbClr val="267F99"/>
+                </a:solidFill>
+                <a:effectLst/>
+                <a:latin typeface="Consolas" panose="020B0609020204030204" pitchFamily="49" charset="0"/>
+              </a:rPr>
+              <a:t>DateTime</a:t>
+            </a:r>
+            <a:r>
+              <a:rPr lang="de-DE" sz="1200" b="0" dirty="0" err="1">
+                <a:solidFill>
+                  <a:srgbClr val="000000"/>
+                </a:solidFill>
+                <a:effectLst/>
+                <a:latin typeface="Consolas" panose="020B0609020204030204" pitchFamily="49" charset="0"/>
+              </a:rPr>
+              <a:t>.</a:t>
+            </a:r>
+            <a:r>
+              <a:rPr lang="de-DE" sz="1200" b="0" dirty="0" err="1">
+                <a:solidFill>
+                  <a:srgbClr val="795E26"/>
+                </a:solidFill>
+                <a:effectLst/>
+                <a:latin typeface="Consolas" panose="020B0609020204030204" pitchFamily="49" charset="0"/>
+              </a:rPr>
+              <a:t>Parse</a:t>
+            </a:r>
+            <a:r>
+              <a:rPr lang="de-DE" sz="1200" b="0" dirty="0">
+                <a:solidFill>
+                  <a:srgbClr val="3B3B3B"/>
+                </a:solidFill>
+                <a:effectLst/>
                 <a:latin typeface="Consolas" panose="020B0609020204030204" pitchFamily="49" charset="0"/>
               </a:rPr>
               <a:t>(</a:t>
             </a:r>
             <a:r>
-              <a:rPr sz="1200" dirty="0">
-                <a:solidFill>
-                  <a:srgbClr val="902000"/>
-                </a:solidFill>
-                <a:latin typeface="Consolas" panose="020B0609020204030204" pitchFamily="49" charset="0"/>
-              </a:rPr>
-              <a:t>string</a:t>
-            </a:r>
-            <a:r>
-              <a:rPr sz="1200" dirty="0">
-                <a:latin typeface="Consolas" panose="020B0609020204030204" pitchFamily="49" charset="0"/>
-              </a:rPr>
-              <a:t> id</a:t>
-            </a:r>
-            <a:r>
-              <a:rPr sz="1200" dirty="0">
-                <a:solidFill>
-                  <a:srgbClr val="666666"/>
-                </a:solidFill>
-                <a:latin typeface="Consolas" panose="020B0609020204030204" pitchFamily="49" charset="0"/>
-              </a:rPr>
-              <a:t>)</a:t>
-            </a:r>
-            <a:br>
-              <a:rPr sz="1200" dirty="0">
-                <a:latin typeface="Consolas" panose="020B0609020204030204" pitchFamily="49" charset="0"/>
-              </a:rPr>
-            </a:br>
-            <a:r>
-              <a:rPr sz="1200" dirty="0">
-                <a:latin typeface="Consolas" panose="020B0609020204030204" pitchFamily="49" charset="0"/>
-              </a:rPr>
-              <a:t>    </a:t>
-            </a:r>
-            <a:r>
-              <a:rPr sz="1200" dirty="0">
-                <a:solidFill>
-                  <a:srgbClr val="666666"/>
-                </a:solidFill>
-                <a:latin typeface="Consolas" panose="020B0609020204030204" pitchFamily="49" charset="0"/>
-              </a:rPr>
-              <a:t>{</a:t>
-            </a:r>
-            <a:br>
-              <a:rPr sz="1200" dirty="0">
-                <a:latin typeface="Consolas" panose="020B0609020204030204" pitchFamily="49" charset="0"/>
-              </a:rPr>
-            </a:br>
-            <a:r>
-              <a:rPr sz="1200" dirty="0">
-                <a:latin typeface="Consolas" panose="020B0609020204030204" pitchFamily="49" charset="0"/>
-              </a:rPr>
-              <a:t>        </a:t>
-            </a:r>
-            <a:r>
-              <a:rPr sz="1200" dirty="0">
-                <a:solidFill>
-                  <a:srgbClr val="902000"/>
-                </a:solidFill>
-                <a:latin typeface="Consolas" panose="020B0609020204030204" pitchFamily="49" charset="0"/>
-              </a:rPr>
-              <a:t>string</a:t>
-            </a:r>
-            <a:r>
-              <a:rPr sz="1200" dirty="0">
-                <a:latin typeface="Consolas" panose="020B0609020204030204" pitchFamily="49" charset="0"/>
-              </a:rPr>
-              <a:t> </a:t>
-            </a:r>
-            <a:r>
-              <a:rPr sz="1200" dirty="0" err="1">
-                <a:latin typeface="Consolas" panose="020B0609020204030204" pitchFamily="49" charset="0"/>
-              </a:rPr>
-              <a:t>rohDaten</a:t>
-            </a:r>
-            <a:r>
-              <a:rPr sz="1200" dirty="0">
-                <a:latin typeface="Consolas" panose="020B0609020204030204" pitchFamily="49" charset="0"/>
-              </a:rPr>
-              <a:t> </a:t>
-            </a:r>
-            <a:r>
-              <a:rPr sz="1200" dirty="0">
-                <a:solidFill>
-                  <a:srgbClr val="666666"/>
-                </a:solidFill>
-                <a:latin typeface="Consolas" panose="020B0609020204030204" pitchFamily="49" charset="0"/>
-              </a:rPr>
-              <a:t>=</a:t>
-            </a:r>
-            <a:r>
-              <a:rPr sz="1200" dirty="0">
-                <a:latin typeface="Consolas" panose="020B0609020204030204" pitchFamily="49" charset="0"/>
-              </a:rPr>
-              <a:t> _</a:t>
-            </a:r>
-            <a:r>
-              <a:rPr sz="1200" dirty="0" err="1">
-                <a:latin typeface="Consolas" panose="020B0609020204030204" pitchFamily="49" charset="0"/>
-              </a:rPr>
-              <a:t>legacySystem</a:t>
-            </a:r>
-            <a:r>
-              <a:rPr sz="1200" dirty="0" err="1">
-                <a:solidFill>
-                  <a:srgbClr val="666666"/>
-                </a:solidFill>
-                <a:latin typeface="Consolas" panose="020B0609020204030204" pitchFamily="49" charset="0"/>
-              </a:rPr>
-              <a:t>.</a:t>
-            </a:r>
-            <a:r>
-              <a:rPr sz="1200" dirty="0" err="1">
-                <a:solidFill>
-                  <a:srgbClr val="06287E"/>
-                </a:solidFill>
-                <a:latin typeface="Consolas" panose="020B0609020204030204" pitchFamily="49" charset="0"/>
-              </a:rPr>
-              <a:t>SuchePersonDatensatz</a:t>
-            </a:r>
-            <a:r>
-              <a:rPr sz="1200" dirty="0">
-                <a:solidFill>
-                  <a:srgbClr val="666666"/>
-                </a:solidFill>
-                <a:latin typeface="Consolas" panose="020B0609020204030204" pitchFamily="49" charset="0"/>
-              </a:rPr>
-              <a:t>(</a:t>
-            </a:r>
-            <a:r>
-              <a:rPr sz="1200" dirty="0">
-                <a:latin typeface="Consolas" panose="020B0609020204030204" pitchFamily="49" charset="0"/>
-              </a:rPr>
-              <a:t>id</a:t>
-            </a:r>
-            <a:r>
-              <a:rPr sz="1200" dirty="0">
-                <a:solidFill>
-                  <a:srgbClr val="666666"/>
-                </a:solidFill>
-                <a:latin typeface="Consolas" panose="020B0609020204030204" pitchFamily="49" charset="0"/>
-              </a:rPr>
-              <a:t>);</a:t>
-            </a:r>
-            <a:br>
-              <a:rPr sz="1200" dirty="0">
-                <a:latin typeface="Consolas" panose="020B0609020204030204" pitchFamily="49" charset="0"/>
-              </a:rPr>
-            </a:br>
-            <a:r>
-              <a:rPr sz="1200" dirty="0">
-                <a:latin typeface="Consolas" panose="020B0609020204030204" pitchFamily="49" charset="0"/>
-              </a:rPr>
-              <a:t>        </a:t>
-            </a:r>
-            <a:r>
-              <a:rPr sz="1200" dirty="0">
-                <a:solidFill>
-                  <a:srgbClr val="902000"/>
-                </a:solidFill>
-                <a:latin typeface="Consolas" panose="020B0609020204030204" pitchFamily="49" charset="0"/>
-              </a:rPr>
-              <a:t>string</a:t>
-            </a:r>
-            <a:r>
-              <a:rPr sz="1200" dirty="0">
-                <a:solidFill>
-                  <a:srgbClr val="666666"/>
-                </a:solidFill>
-                <a:latin typeface="Consolas" panose="020B0609020204030204" pitchFamily="49" charset="0"/>
-              </a:rPr>
-              <a:t>[]</a:t>
-            </a:r>
-            <a:r>
-              <a:rPr sz="1200" dirty="0">
-                <a:latin typeface="Consolas" panose="020B0609020204030204" pitchFamily="49" charset="0"/>
-              </a:rPr>
-              <a:t> </a:t>
-            </a:r>
-            <a:r>
-              <a:rPr sz="1200" dirty="0" err="1">
+              <a:rPr lang="de-DE" sz="1200" b="0" dirty="0">
+                <a:solidFill>
+                  <a:srgbClr val="001080"/>
+                </a:solidFill>
+                <a:effectLst/>
                 <a:latin typeface="Consolas" panose="020B0609020204030204" pitchFamily="49" charset="0"/>
               </a:rPr>
               <a:t>teile</a:t>
             </a:r>
             <a:r>
-              <a:rPr sz="1200" dirty="0">
-                <a:latin typeface="Consolas" panose="020B0609020204030204" pitchFamily="49" charset="0"/>
-              </a:rPr>
-              <a:t> </a:t>
-            </a:r>
-            <a:r>
-              <a:rPr sz="1200" dirty="0">
-                <a:solidFill>
-                  <a:srgbClr val="666666"/>
-                </a:solidFill>
-                <a:latin typeface="Consolas" panose="020B0609020204030204" pitchFamily="49" charset="0"/>
-              </a:rPr>
-              <a:t>=</a:t>
-            </a:r>
-            <a:r>
-              <a:rPr sz="1200" dirty="0">
-                <a:latin typeface="Consolas" panose="020B0609020204030204" pitchFamily="49" charset="0"/>
-              </a:rPr>
-              <a:t> </a:t>
-            </a:r>
-            <a:r>
-              <a:rPr sz="1200" dirty="0" err="1">
-                <a:latin typeface="Consolas" panose="020B0609020204030204" pitchFamily="49" charset="0"/>
-              </a:rPr>
-              <a:t>rohDaten</a:t>
-            </a:r>
-            <a:r>
-              <a:rPr sz="1200" dirty="0" err="1">
-                <a:solidFill>
-                  <a:srgbClr val="666666"/>
-                </a:solidFill>
-                <a:latin typeface="Consolas" panose="020B0609020204030204" pitchFamily="49" charset="0"/>
-              </a:rPr>
-              <a:t>.</a:t>
-            </a:r>
-            <a:r>
-              <a:rPr sz="1200" dirty="0" err="1">
-                <a:solidFill>
-                  <a:srgbClr val="06287E"/>
-                </a:solidFill>
-                <a:latin typeface="Consolas" panose="020B0609020204030204" pitchFamily="49" charset="0"/>
-              </a:rPr>
-              <a:t>Split</a:t>
-            </a:r>
-            <a:r>
-              <a:rPr sz="1200" dirty="0">
-                <a:solidFill>
-                  <a:srgbClr val="666666"/>
-                </a:solidFill>
-                <a:latin typeface="Consolas" panose="020B0609020204030204" pitchFamily="49" charset="0"/>
-              </a:rPr>
-              <a:t>(</a:t>
-            </a:r>
-            <a:r>
-              <a:rPr sz="1200" dirty="0">
-                <a:solidFill>
-                  <a:srgbClr val="4070A0"/>
-                </a:solidFill>
-                <a:latin typeface="Consolas" panose="020B0609020204030204" pitchFamily="49" charset="0"/>
-              </a:rPr>
-              <a:t>';'</a:t>
-            </a:r>
-            <a:r>
-              <a:rPr sz="1200" dirty="0">
-                <a:solidFill>
-                  <a:srgbClr val="666666"/>
-                </a:solidFill>
-                <a:latin typeface="Consolas" panose="020B0609020204030204" pitchFamily="49" charset="0"/>
-              </a:rPr>
-              <a:t>);</a:t>
-            </a:r>
-            <a:br>
-              <a:rPr sz="1200" dirty="0">
-                <a:latin typeface="Consolas" panose="020B0609020204030204" pitchFamily="49" charset="0"/>
-              </a:rPr>
-            </a:br>
-            <a:r>
-              <a:rPr sz="1200" dirty="0">
-                <a:latin typeface="Consolas" panose="020B0609020204030204" pitchFamily="49" charset="0"/>
-              </a:rPr>
-              <a:t>        </a:t>
-            </a:r>
-            <a:br>
-              <a:rPr sz="1200" dirty="0">
-                <a:latin typeface="Consolas" panose="020B0609020204030204" pitchFamily="49" charset="0"/>
-              </a:rPr>
-            </a:br>
-            <a:r>
-              <a:rPr sz="1200" dirty="0">
-                <a:latin typeface="Consolas" panose="020B0609020204030204" pitchFamily="49" charset="0"/>
-              </a:rPr>
-              <a:t>        </a:t>
-            </a:r>
-            <a:r>
-              <a:rPr sz="1200" b="1" dirty="0">
-                <a:solidFill>
-                  <a:srgbClr val="007020"/>
-                </a:solidFill>
-                <a:latin typeface="Consolas" panose="020B0609020204030204" pitchFamily="49" charset="0"/>
-              </a:rPr>
-              <a:t>return</a:t>
-            </a:r>
-            <a:r>
-              <a:rPr sz="1200" dirty="0">
-                <a:latin typeface="Consolas" panose="020B0609020204030204" pitchFamily="49" charset="0"/>
-              </a:rPr>
-              <a:t> </a:t>
-            </a:r>
-            <a:r>
-              <a:rPr sz="1200" b="1" dirty="0">
-                <a:solidFill>
-                  <a:srgbClr val="007020"/>
-                </a:solidFill>
-                <a:latin typeface="Consolas" panose="020B0609020204030204" pitchFamily="49" charset="0"/>
-              </a:rPr>
-              <a:t>new</a:t>
-            </a:r>
-            <a:r>
-              <a:rPr sz="1200" dirty="0">
-                <a:latin typeface="Consolas" panose="020B0609020204030204" pitchFamily="49" charset="0"/>
-              </a:rPr>
-              <a:t> Person </a:t>
-            </a:r>
-            <a:r>
-              <a:rPr sz="1200" dirty="0">
-                <a:solidFill>
-                  <a:srgbClr val="666666"/>
-                </a:solidFill>
-                <a:latin typeface="Consolas" panose="020B0609020204030204" pitchFamily="49" charset="0"/>
-              </a:rPr>
-              <a:t>{</a:t>
-            </a:r>
-            <a:br>
-              <a:rPr sz="1200" dirty="0">
-                <a:latin typeface="Consolas" panose="020B0609020204030204" pitchFamily="49" charset="0"/>
-              </a:rPr>
-            </a:br>
-            <a:r>
-              <a:rPr sz="1200" dirty="0">
-                <a:latin typeface="Consolas" panose="020B0609020204030204" pitchFamily="49" charset="0"/>
-              </a:rPr>
-              <a:t>            </a:t>
-            </a:r>
-            <a:r>
-              <a:rPr sz="1200" dirty="0" err="1">
-                <a:latin typeface="Consolas" panose="020B0609020204030204" pitchFamily="49" charset="0"/>
-              </a:rPr>
-              <a:t>Nachname</a:t>
-            </a:r>
-            <a:r>
-              <a:rPr sz="1200" dirty="0">
-                <a:latin typeface="Consolas" panose="020B0609020204030204" pitchFamily="49" charset="0"/>
-              </a:rPr>
-              <a:t> </a:t>
-            </a:r>
-            <a:r>
-              <a:rPr sz="1200" dirty="0">
-                <a:solidFill>
-                  <a:srgbClr val="666666"/>
-                </a:solidFill>
-                <a:latin typeface="Consolas" panose="020B0609020204030204" pitchFamily="49" charset="0"/>
-              </a:rPr>
-              <a:t>=</a:t>
-            </a:r>
-            <a:r>
-              <a:rPr sz="1200" dirty="0">
-                <a:latin typeface="Consolas" panose="020B0609020204030204" pitchFamily="49" charset="0"/>
-              </a:rPr>
-              <a:t> </a:t>
-            </a:r>
-            <a:r>
-              <a:rPr sz="1200" dirty="0" err="1">
-                <a:latin typeface="Consolas" panose="020B0609020204030204" pitchFamily="49" charset="0"/>
-              </a:rPr>
-              <a:t>teile</a:t>
-            </a:r>
-            <a:r>
-              <a:rPr sz="1200" dirty="0">
-                <a:solidFill>
-                  <a:srgbClr val="666666"/>
-                </a:solidFill>
+              <a:rPr lang="de-DE" sz="1200" b="0" dirty="0">
+                <a:solidFill>
+                  <a:srgbClr val="3B3B3B"/>
+                </a:solidFill>
+                <a:effectLst/>
                 <a:latin typeface="Consolas" panose="020B0609020204030204" pitchFamily="49" charset="0"/>
               </a:rPr>
               <a:t>[</a:t>
             </a:r>
             <a:r>
-              <a:rPr sz="1200" dirty="0">
-                <a:solidFill>
-                  <a:srgbClr val="40A070"/>
-                </a:solidFill>
-                <a:latin typeface="Consolas" panose="020B0609020204030204" pitchFamily="49" charset="0"/>
-              </a:rPr>
-              <a:t>0</a:t>
-            </a:r>
-            <a:r>
-              <a:rPr sz="1200" dirty="0">
-                <a:solidFill>
-                  <a:srgbClr val="666666"/>
-                </a:solidFill>
-                <a:latin typeface="Consolas" panose="020B0609020204030204" pitchFamily="49" charset="0"/>
-              </a:rPr>
-              <a:t>],</a:t>
-            </a:r>
-            <a:br>
-              <a:rPr sz="1200" dirty="0">
-                <a:latin typeface="Consolas" panose="020B0609020204030204" pitchFamily="49" charset="0"/>
-              </a:rPr>
-            </a:br>
-            <a:r>
-              <a:rPr sz="1200" dirty="0">
-                <a:latin typeface="Consolas" panose="020B0609020204030204" pitchFamily="49" charset="0"/>
-              </a:rPr>
-              <a:t>            </a:t>
-            </a:r>
-            <a:r>
-              <a:rPr sz="1200" dirty="0" err="1">
-                <a:latin typeface="Consolas" panose="020B0609020204030204" pitchFamily="49" charset="0"/>
-              </a:rPr>
-              <a:t>Vorname</a:t>
-            </a:r>
-            <a:r>
-              <a:rPr sz="1200" dirty="0">
-                <a:latin typeface="Consolas" panose="020B0609020204030204" pitchFamily="49" charset="0"/>
-              </a:rPr>
-              <a:t> </a:t>
-            </a:r>
-            <a:r>
-              <a:rPr sz="1200" dirty="0">
-                <a:solidFill>
-                  <a:srgbClr val="666666"/>
-                </a:solidFill>
-                <a:latin typeface="Consolas" panose="020B0609020204030204" pitchFamily="49" charset="0"/>
-              </a:rPr>
-              <a:t>=</a:t>
-            </a:r>
-            <a:r>
-              <a:rPr sz="1200" dirty="0">
-                <a:latin typeface="Consolas" panose="020B0609020204030204" pitchFamily="49" charset="0"/>
-              </a:rPr>
-              <a:t> </a:t>
-            </a:r>
-            <a:r>
-              <a:rPr sz="1200" dirty="0" err="1">
-                <a:latin typeface="Consolas" panose="020B0609020204030204" pitchFamily="49" charset="0"/>
-              </a:rPr>
-              <a:t>teile</a:t>
-            </a:r>
-            <a:r>
-              <a:rPr sz="1200" dirty="0">
-                <a:solidFill>
-                  <a:srgbClr val="666666"/>
-                </a:solidFill>
-                <a:latin typeface="Consolas" panose="020B0609020204030204" pitchFamily="49" charset="0"/>
-              </a:rPr>
-              <a:t>[</a:t>
-            </a:r>
-            <a:r>
-              <a:rPr sz="1200" dirty="0">
-                <a:solidFill>
-                  <a:srgbClr val="40A070"/>
-                </a:solidFill>
-                <a:latin typeface="Consolas" panose="020B0609020204030204" pitchFamily="49" charset="0"/>
-              </a:rPr>
-              <a:t>1</a:t>
-            </a:r>
-            <a:r>
-              <a:rPr sz="1200" dirty="0">
-                <a:solidFill>
-                  <a:srgbClr val="666666"/>
-                </a:solidFill>
-                <a:latin typeface="Consolas" panose="020B0609020204030204" pitchFamily="49" charset="0"/>
-              </a:rPr>
-              <a:t>],</a:t>
-            </a:r>
-            <a:br>
-              <a:rPr sz="1200" dirty="0">
-                <a:latin typeface="Consolas" panose="020B0609020204030204" pitchFamily="49" charset="0"/>
-              </a:rPr>
-            </a:br>
-            <a:r>
-              <a:rPr sz="1200" dirty="0">
-                <a:latin typeface="Consolas" panose="020B0609020204030204" pitchFamily="49" charset="0"/>
-              </a:rPr>
-              <a:t>            </a:t>
-            </a:r>
-            <a:r>
-              <a:rPr sz="1200" dirty="0" err="1">
-                <a:latin typeface="Consolas" panose="020B0609020204030204" pitchFamily="49" charset="0"/>
-              </a:rPr>
-              <a:t>Geburtsdatum</a:t>
-            </a:r>
-            <a:r>
-              <a:rPr sz="1200" dirty="0">
-                <a:latin typeface="Consolas" panose="020B0609020204030204" pitchFamily="49" charset="0"/>
-              </a:rPr>
-              <a:t> </a:t>
-            </a:r>
-            <a:r>
-              <a:rPr sz="1200" dirty="0">
-                <a:solidFill>
-                  <a:srgbClr val="666666"/>
-                </a:solidFill>
-                <a:latin typeface="Consolas" panose="020B0609020204030204" pitchFamily="49" charset="0"/>
-              </a:rPr>
-              <a:t>=</a:t>
-            </a:r>
-            <a:r>
-              <a:rPr sz="1200" dirty="0">
-                <a:latin typeface="Consolas" panose="020B0609020204030204" pitchFamily="49" charset="0"/>
-              </a:rPr>
-              <a:t> </a:t>
-            </a:r>
-            <a:r>
-              <a:rPr sz="1200" dirty="0" err="1">
-                <a:latin typeface="Consolas" panose="020B0609020204030204" pitchFamily="49" charset="0"/>
-              </a:rPr>
-              <a:t>DateTime</a:t>
-            </a:r>
-            <a:r>
-              <a:rPr sz="1200" dirty="0" err="1">
-                <a:solidFill>
-                  <a:srgbClr val="666666"/>
-                </a:solidFill>
-                <a:latin typeface="Consolas" panose="020B0609020204030204" pitchFamily="49" charset="0"/>
-              </a:rPr>
-              <a:t>.</a:t>
-            </a:r>
-            <a:r>
-              <a:rPr sz="1200" dirty="0" err="1">
-                <a:solidFill>
-                  <a:srgbClr val="06287E"/>
-                </a:solidFill>
-                <a:latin typeface="Consolas" panose="020B0609020204030204" pitchFamily="49" charset="0"/>
-              </a:rPr>
-              <a:t>Parse</a:t>
-            </a:r>
-            <a:r>
-              <a:rPr sz="1200" dirty="0">
-                <a:solidFill>
-                  <a:srgbClr val="666666"/>
-                </a:solidFill>
-                <a:latin typeface="Consolas" panose="020B0609020204030204" pitchFamily="49" charset="0"/>
-              </a:rPr>
-              <a:t>(</a:t>
-            </a:r>
-            <a:r>
-              <a:rPr sz="1200" dirty="0" err="1">
-                <a:latin typeface="Consolas" panose="020B0609020204030204" pitchFamily="49" charset="0"/>
-              </a:rPr>
-              <a:t>teile</a:t>
-            </a:r>
-            <a:r>
-              <a:rPr sz="1200" dirty="0">
-                <a:solidFill>
-                  <a:srgbClr val="666666"/>
-                </a:solidFill>
-                <a:latin typeface="Consolas" panose="020B0609020204030204" pitchFamily="49" charset="0"/>
-              </a:rPr>
-              <a:t>[</a:t>
-            </a:r>
-            <a:r>
-              <a:rPr sz="1200" dirty="0">
-                <a:solidFill>
-                  <a:srgbClr val="40A070"/>
-                </a:solidFill>
+              <a:rPr lang="de-DE" sz="1200" b="0" dirty="0">
+                <a:solidFill>
+                  <a:srgbClr val="098658"/>
+                </a:solidFill>
+                <a:effectLst/>
                 <a:latin typeface="Consolas" panose="020B0609020204030204" pitchFamily="49" charset="0"/>
               </a:rPr>
               <a:t>2</a:t>
             </a:r>
             <a:r>
-              <a:rPr sz="1200" dirty="0">
-                <a:solidFill>
-                  <a:srgbClr val="666666"/>
-                </a:solidFill>
+              <a:rPr lang="de-DE" sz="1200" b="0" dirty="0">
+                <a:solidFill>
+                  <a:srgbClr val="3B3B3B"/>
+                </a:solidFill>
+                <a:effectLst/>
                 <a:latin typeface="Consolas" panose="020B0609020204030204" pitchFamily="49" charset="0"/>
               </a:rPr>
               <a:t>])</a:t>
             </a:r>
-            <a:br>
-              <a:rPr sz="1200" dirty="0">
-                <a:latin typeface="Consolas" panose="020B0609020204030204" pitchFamily="49" charset="0"/>
-              </a:rPr>
-            </a:br>
-            <a:r>
-              <a:rPr sz="1200" dirty="0">
-                <a:latin typeface="Consolas" panose="020B0609020204030204" pitchFamily="49" charset="0"/>
-              </a:rPr>
-              <a:t>        </a:t>
-            </a:r>
-            <a:r>
-              <a:rPr sz="1200" dirty="0">
-                <a:solidFill>
-                  <a:srgbClr val="666666"/>
-                </a:solidFill>
-                <a:latin typeface="Consolas" panose="020B0609020204030204" pitchFamily="49" charset="0"/>
-              </a:rPr>
-              <a:t>};</a:t>
-            </a:r>
-            <a:br>
-              <a:rPr sz="1200" dirty="0">
-                <a:latin typeface="Consolas" panose="020B0609020204030204" pitchFamily="49" charset="0"/>
-              </a:rPr>
-            </a:br>
-            <a:r>
-              <a:rPr sz="1200" dirty="0">
-                <a:latin typeface="Consolas" panose="020B0609020204030204" pitchFamily="49" charset="0"/>
-              </a:rPr>
-              <a:t>    </a:t>
-            </a:r>
-            <a:r>
-              <a:rPr sz="1200" dirty="0">
-                <a:solidFill>
-                  <a:srgbClr val="666666"/>
-                </a:solidFill>
-                <a:latin typeface="Consolas" panose="020B0609020204030204" pitchFamily="49" charset="0"/>
-              </a:rPr>
-              <a:t>}</a:t>
-            </a:r>
-            <a:br>
-              <a:rPr sz="1200" dirty="0">
-                <a:latin typeface="Consolas" panose="020B0609020204030204" pitchFamily="49" charset="0"/>
-              </a:rPr>
-            </a:br>
-            <a:r>
-              <a:rPr sz="1200" dirty="0">
-                <a:solidFill>
-                  <a:srgbClr val="666666"/>
-                </a:solidFill>
+          </a:p>
+          <a:p>
+            <a:pPr>
+              <a:lnSpc>
+                <a:spcPts val="1425"/>
+              </a:lnSpc>
+              <a:buNone/>
+            </a:pPr>
+            <a:r>
+              <a:rPr lang="de-DE" sz="1200" b="0" dirty="0">
+                <a:solidFill>
+                  <a:srgbClr val="3B3B3B"/>
+                </a:solidFill>
+                <a:effectLst/>
+                <a:latin typeface="Consolas" panose="020B0609020204030204" pitchFamily="49" charset="0"/>
+              </a:rPr>
+              <a:t>        };</a:t>
+            </a:r>
+          </a:p>
+          <a:p>
+            <a:pPr>
+              <a:lnSpc>
+                <a:spcPts val="1425"/>
+              </a:lnSpc>
+              <a:buNone/>
+            </a:pPr>
+            <a:r>
+              <a:rPr lang="de-DE" sz="1200" b="0" dirty="0">
+                <a:solidFill>
+                  <a:srgbClr val="3B3B3B"/>
+                </a:solidFill>
+                <a:effectLst/>
+                <a:latin typeface="Consolas" panose="020B0609020204030204" pitchFamily="49" charset="0"/>
+              </a:rPr>
+              <a:t>    }</a:t>
+            </a:r>
+          </a:p>
+          <a:p>
+            <a:pPr>
+              <a:lnSpc>
+                <a:spcPts val="1425"/>
+              </a:lnSpc>
+              <a:buNone/>
+            </a:pPr>
+            <a:r>
+              <a:rPr lang="de-DE" sz="1200" b="0" dirty="0">
+                <a:solidFill>
+                  <a:srgbClr val="3B3B3B"/>
+                </a:solidFill>
+                <a:effectLst/>
                 <a:latin typeface="Consolas" panose="020B0609020204030204" pitchFamily="49" charset="0"/>
               </a:rPr>
               <a:t>}</a:t>

--- a/Woche_2_DesignPatterns_I/02_Design_Patterns_I_v01.pptx
+++ b/Woche_2_DesignPatterns_I/02_Design_Patterns_I_v01.pptx
@@ -7,6 +7,9 @@
   <p:notesMasterIdLst>
     <p:notesMasterId r:id="rId54"/>
   </p:notesMasterIdLst>
+  <p:handoutMasterIdLst>
+    <p:handoutMasterId r:id="rId55"/>
+  </p:handoutMasterIdLst>
   <p:sldIdLst>
     <p:sldId id="256" r:id="rId2"/>
     <p:sldId id="257" r:id="rId3"/>
@@ -180,1191 +183,15 @@
 </p:presentation>
 </file>
 
-<file path=ppt/revisionInfo.xml><?xml version="1.0" encoding="utf-8"?>
-<p1510:revInfo xmlns:a="http://schemas.openxmlformats.org/drawingml/2006/main" xmlns:r="http://schemas.openxmlformats.org/officeDocument/2006/relationships" xmlns:p1510="http://schemas.microsoft.com/office/powerpoint/2015/10/main">
-  <p1510:revLst>
-    <p1510:client id="{FA2062A3-A281-4DB5-BC3C-2D65F072144E}" v="4" dt="2026-04-02T16:05:06.416"/>
-  </p1510:revLst>
-</p1510:revInfo>
-</file>
-
 <file path=ppt/changesInfos/changesInfo1.xml><?xml version="1.0" encoding="utf-8"?>
 <pc:chgInfo xmlns:a="http://schemas.openxmlformats.org/drawingml/2006/main" xmlns:r="http://schemas.openxmlformats.org/officeDocument/2006/relationships" xmlns:ac="http://schemas.microsoft.com/office/drawing/2013/main/command" xmlns:pc="http://schemas.microsoft.com/office/powerpoint/2013/main/command">
   <pc:docChgLst>
-    <pc:chgData name="Peter Bernhardt" userId="f2333933-0b12-4d6e-972f-f87625423892" providerId="ADAL" clId="{54BAB7D7-C378-4C4A-B0F8-9DF09AB8FC9C}"/>
-    <pc:docChg chg="undo custSel addSld delSld modSld modMainMaster">
-      <pc:chgData name="Peter Bernhardt" userId="f2333933-0b12-4d6e-972f-f87625423892" providerId="ADAL" clId="{54BAB7D7-C378-4C4A-B0F8-9DF09AB8FC9C}" dt="2026-03-18T17:52:00.811" v="796" actId="14100"/>
+    <pc:chgData name="Peter Bernhardt" userId="f2333933-0b12-4d6e-972f-f87625423892" providerId="ADAL" clId="{2C628E33-589C-449E-BBA5-ED05E3E5CC01}"/>
+    <pc:docChg chg="custSel modHandout">
+      <pc:chgData name="Peter Bernhardt" userId="f2333933-0b12-4d6e-972f-f87625423892" providerId="ADAL" clId="{2C628E33-589C-449E-BBA5-ED05E3E5CC01}" dt="2026-04-21T11:31:19.851" v="0" actId="478"/>
       <pc:docMkLst>
         <pc:docMk/>
       </pc:docMkLst>
-      <pc:sldChg chg="addSp delSp modSp del mod chgLayout">
-        <pc:chgData name="Peter Bernhardt" userId="f2333933-0b12-4d6e-972f-f87625423892" providerId="ADAL" clId="{54BAB7D7-C378-4C4A-B0F8-9DF09AB8FC9C}" dt="2026-03-18T17:27:59.585" v="473" actId="47"/>
-        <pc:sldMkLst>
-          <pc:docMk/>
-          <pc:sldMk cId="0" sldId="256"/>
-        </pc:sldMkLst>
-        <pc:spChg chg="mod ord">
-          <ac:chgData name="Peter Bernhardt" userId="f2333933-0b12-4d6e-972f-f87625423892" providerId="ADAL" clId="{54BAB7D7-C378-4C4A-B0F8-9DF09AB8FC9C}" dt="2026-03-18T17:15:04.664" v="428" actId="27636"/>
-          <ac:spMkLst>
-            <pc:docMk/>
-            <pc:sldMk cId="0" sldId="256"/>
-            <ac:spMk id="2" creationId="{00000000-0000-0000-0000-000000000000}"/>
-          </ac:spMkLst>
-        </pc:spChg>
-        <pc:spChg chg="mod ord">
-          <ac:chgData name="Peter Bernhardt" userId="f2333933-0b12-4d6e-972f-f87625423892" providerId="ADAL" clId="{54BAB7D7-C378-4C4A-B0F8-9DF09AB8FC9C}" dt="2026-03-18T17:15:14.733" v="430" actId="20577"/>
-          <ac:spMkLst>
-            <pc:docMk/>
-            <pc:sldMk cId="0" sldId="256"/>
-            <ac:spMk id="3" creationId="{00000000-0000-0000-0000-000000000000}"/>
-          </ac:spMkLst>
-        </pc:spChg>
-        <pc:spChg chg="mod ord">
-          <ac:chgData name="Peter Bernhardt" userId="f2333933-0b12-4d6e-972f-f87625423892" providerId="ADAL" clId="{54BAB7D7-C378-4C4A-B0F8-9DF09AB8FC9C}" dt="2026-03-18T17:15:04.648" v="426" actId="6264"/>
-          <ac:spMkLst>
-            <pc:docMk/>
-            <pc:sldMk cId="0" sldId="256"/>
-            <ac:spMk id="4" creationId="{00000000-0000-0000-0000-000000000000}"/>
-          </ac:spMkLst>
-        </pc:spChg>
-      </pc:sldChg>
-      <pc:sldChg chg="modSp del mod">
-        <pc:chgData name="Peter Bernhardt" userId="f2333933-0b12-4d6e-972f-f87625423892" providerId="ADAL" clId="{54BAB7D7-C378-4C4A-B0F8-9DF09AB8FC9C}" dt="2026-03-18T17:27:59.585" v="473" actId="47"/>
-        <pc:sldMkLst>
-          <pc:docMk/>
-          <pc:sldMk cId="0" sldId="257"/>
-        </pc:sldMkLst>
-        <pc:spChg chg="mod">
-          <ac:chgData name="Peter Bernhardt" userId="f2333933-0b12-4d6e-972f-f87625423892" providerId="ADAL" clId="{54BAB7D7-C378-4C4A-B0F8-9DF09AB8FC9C}" dt="2026-03-18T16:39:28.101" v="79" actId="790"/>
-          <ac:spMkLst>
-            <pc:docMk/>
-            <pc:sldMk cId="0" sldId="257"/>
-            <ac:spMk id="2" creationId="{00000000-0000-0000-0000-000000000000}"/>
-          </ac:spMkLst>
-        </pc:spChg>
-      </pc:sldChg>
-      <pc:sldChg chg="modSp del mod">
-        <pc:chgData name="Peter Bernhardt" userId="f2333933-0b12-4d6e-972f-f87625423892" providerId="ADAL" clId="{54BAB7D7-C378-4C4A-B0F8-9DF09AB8FC9C}" dt="2026-03-18T17:27:59.585" v="473" actId="47"/>
-        <pc:sldMkLst>
-          <pc:docMk/>
-          <pc:sldMk cId="0" sldId="258"/>
-        </pc:sldMkLst>
-        <pc:spChg chg="mod">
-          <ac:chgData name="Peter Bernhardt" userId="f2333933-0b12-4d6e-972f-f87625423892" providerId="ADAL" clId="{54BAB7D7-C378-4C4A-B0F8-9DF09AB8FC9C}" dt="2026-03-18T16:39:28.101" v="79" actId="790"/>
-          <ac:spMkLst>
-            <pc:docMk/>
-            <pc:sldMk cId="0" sldId="258"/>
-            <ac:spMk id="2" creationId="{00000000-0000-0000-0000-000000000000}"/>
-          </ac:spMkLst>
-        </pc:spChg>
-        <pc:spChg chg="mod">
-          <ac:chgData name="Peter Bernhardt" userId="f2333933-0b12-4d6e-972f-f87625423892" providerId="ADAL" clId="{54BAB7D7-C378-4C4A-B0F8-9DF09AB8FC9C}" dt="2026-03-18T16:39:28.261" v="82" actId="27636"/>
-          <ac:spMkLst>
-            <pc:docMk/>
-            <pc:sldMk cId="0" sldId="258"/>
-            <ac:spMk id="3" creationId="{00000000-0000-0000-0000-000000000000}"/>
-          </ac:spMkLst>
-        </pc:spChg>
-      </pc:sldChg>
-      <pc:sldChg chg="modSp del mod">
-        <pc:chgData name="Peter Bernhardt" userId="f2333933-0b12-4d6e-972f-f87625423892" providerId="ADAL" clId="{54BAB7D7-C378-4C4A-B0F8-9DF09AB8FC9C}" dt="2026-03-18T17:27:59.585" v="473" actId="47"/>
-        <pc:sldMkLst>
-          <pc:docMk/>
-          <pc:sldMk cId="0" sldId="259"/>
-        </pc:sldMkLst>
-        <pc:spChg chg="mod">
-          <ac:chgData name="Peter Bernhardt" userId="f2333933-0b12-4d6e-972f-f87625423892" providerId="ADAL" clId="{54BAB7D7-C378-4C4A-B0F8-9DF09AB8FC9C}" dt="2026-03-18T16:39:28.101" v="79" actId="790"/>
-          <ac:spMkLst>
-            <pc:docMk/>
-            <pc:sldMk cId="0" sldId="259"/>
-            <ac:spMk id="2" creationId="{00000000-0000-0000-0000-000000000000}"/>
-          </ac:spMkLst>
-        </pc:spChg>
-        <pc:spChg chg="mod">
-          <ac:chgData name="Peter Bernhardt" userId="f2333933-0b12-4d6e-972f-f87625423892" providerId="ADAL" clId="{54BAB7D7-C378-4C4A-B0F8-9DF09AB8FC9C}" dt="2026-03-18T16:39:28.267" v="83" actId="27636"/>
-          <ac:spMkLst>
-            <pc:docMk/>
-            <pc:sldMk cId="0" sldId="259"/>
-            <ac:spMk id="3" creationId="{00000000-0000-0000-0000-000000000000}"/>
-          </ac:spMkLst>
-        </pc:spChg>
-      </pc:sldChg>
-      <pc:sldChg chg="addSp delSp modSp del mod setBg delDesignElem chgLayout">
-        <pc:chgData name="Peter Bernhardt" userId="f2333933-0b12-4d6e-972f-f87625423892" providerId="ADAL" clId="{54BAB7D7-C378-4C4A-B0F8-9DF09AB8FC9C}" dt="2026-03-18T17:27:59.585" v="473" actId="47"/>
-        <pc:sldMkLst>
-          <pc:docMk/>
-          <pc:sldMk cId="0" sldId="260"/>
-        </pc:sldMkLst>
-        <pc:spChg chg="mod ord">
-          <ac:chgData name="Peter Bernhardt" userId="f2333933-0b12-4d6e-972f-f87625423892" providerId="ADAL" clId="{54BAB7D7-C378-4C4A-B0F8-9DF09AB8FC9C}" dt="2026-03-18T17:15:26.880" v="432" actId="14100"/>
-          <ac:spMkLst>
-            <pc:docMk/>
-            <pc:sldMk cId="0" sldId="260"/>
-            <ac:spMk id="2" creationId="{00000000-0000-0000-0000-000000000000}"/>
-          </ac:spMkLst>
-        </pc:spChg>
-      </pc:sldChg>
-      <pc:sldChg chg="modSp del mod">
-        <pc:chgData name="Peter Bernhardt" userId="f2333933-0b12-4d6e-972f-f87625423892" providerId="ADAL" clId="{54BAB7D7-C378-4C4A-B0F8-9DF09AB8FC9C}" dt="2026-03-18T17:27:59.585" v="473" actId="47"/>
-        <pc:sldMkLst>
-          <pc:docMk/>
-          <pc:sldMk cId="0" sldId="261"/>
-        </pc:sldMkLst>
-        <pc:spChg chg="mod">
-          <ac:chgData name="Peter Bernhardt" userId="f2333933-0b12-4d6e-972f-f87625423892" providerId="ADAL" clId="{54BAB7D7-C378-4C4A-B0F8-9DF09AB8FC9C}" dt="2026-03-18T16:39:28.101" v="79" actId="790"/>
-          <ac:spMkLst>
-            <pc:docMk/>
-            <pc:sldMk cId="0" sldId="261"/>
-            <ac:spMk id="2" creationId="{00000000-0000-0000-0000-000000000000}"/>
-          </ac:spMkLst>
-        </pc:spChg>
-        <pc:spChg chg="mod">
-          <ac:chgData name="Peter Bernhardt" userId="f2333933-0b12-4d6e-972f-f87625423892" providerId="ADAL" clId="{54BAB7D7-C378-4C4A-B0F8-9DF09AB8FC9C}" dt="2026-03-18T16:39:28.277" v="85" actId="27636"/>
-          <ac:spMkLst>
-            <pc:docMk/>
-            <pc:sldMk cId="0" sldId="261"/>
-            <ac:spMk id="3" creationId="{00000000-0000-0000-0000-000000000000}"/>
-          </ac:spMkLst>
-        </pc:spChg>
-      </pc:sldChg>
-      <pc:sldChg chg="modSp del mod">
-        <pc:chgData name="Peter Bernhardt" userId="f2333933-0b12-4d6e-972f-f87625423892" providerId="ADAL" clId="{54BAB7D7-C378-4C4A-B0F8-9DF09AB8FC9C}" dt="2026-03-18T17:27:59.585" v="473" actId="47"/>
-        <pc:sldMkLst>
-          <pc:docMk/>
-          <pc:sldMk cId="0" sldId="262"/>
-        </pc:sldMkLst>
-        <pc:spChg chg="mod">
-          <ac:chgData name="Peter Bernhardt" userId="f2333933-0b12-4d6e-972f-f87625423892" providerId="ADAL" clId="{54BAB7D7-C378-4C4A-B0F8-9DF09AB8FC9C}" dt="2026-03-18T16:39:28.101" v="79" actId="790"/>
-          <ac:spMkLst>
-            <pc:docMk/>
-            <pc:sldMk cId="0" sldId="262"/>
-            <ac:spMk id="2" creationId="{00000000-0000-0000-0000-000000000000}"/>
-          </ac:spMkLst>
-        </pc:spChg>
-        <pc:spChg chg="mod">
-          <ac:chgData name="Peter Bernhardt" userId="f2333933-0b12-4d6e-972f-f87625423892" providerId="ADAL" clId="{54BAB7D7-C378-4C4A-B0F8-9DF09AB8FC9C}" dt="2026-03-18T16:39:28.277" v="86" actId="27636"/>
-          <ac:spMkLst>
-            <pc:docMk/>
-            <pc:sldMk cId="0" sldId="262"/>
-            <ac:spMk id="3" creationId="{00000000-0000-0000-0000-000000000000}"/>
-          </ac:spMkLst>
-        </pc:spChg>
-      </pc:sldChg>
-      <pc:sldChg chg="modSp del mod">
-        <pc:chgData name="Peter Bernhardt" userId="f2333933-0b12-4d6e-972f-f87625423892" providerId="ADAL" clId="{54BAB7D7-C378-4C4A-B0F8-9DF09AB8FC9C}" dt="2026-03-18T17:27:59.585" v="473" actId="47"/>
-        <pc:sldMkLst>
-          <pc:docMk/>
-          <pc:sldMk cId="0" sldId="263"/>
-        </pc:sldMkLst>
-        <pc:spChg chg="mod">
-          <ac:chgData name="Peter Bernhardt" userId="f2333933-0b12-4d6e-972f-f87625423892" providerId="ADAL" clId="{54BAB7D7-C378-4C4A-B0F8-9DF09AB8FC9C}" dt="2026-03-18T16:39:28.101" v="79" actId="790"/>
-          <ac:spMkLst>
-            <pc:docMk/>
-            <pc:sldMk cId="0" sldId="263"/>
-            <ac:spMk id="2" creationId="{00000000-0000-0000-0000-000000000000}"/>
-          </ac:spMkLst>
-        </pc:spChg>
-      </pc:sldChg>
-      <pc:sldChg chg="modSp del mod">
-        <pc:chgData name="Peter Bernhardt" userId="f2333933-0b12-4d6e-972f-f87625423892" providerId="ADAL" clId="{54BAB7D7-C378-4C4A-B0F8-9DF09AB8FC9C}" dt="2026-03-18T17:27:59.585" v="473" actId="47"/>
-        <pc:sldMkLst>
-          <pc:docMk/>
-          <pc:sldMk cId="0" sldId="264"/>
-        </pc:sldMkLst>
-        <pc:spChg chg="mod">
-          <ac:chgData name="Peter Bernhardt" userId="f2333933-0b12-4d6e-972f-f87625423892" providerId="ADAL" clId="{54BAB7D7-C378-4C4A-B0F8-9DF09AB8FC9C}" dt="2026-03-18T16:41:22.087" v="209" actId="14100"/>
-          <ac:spMkLst>
-            <pc:docMk/>
-            <pc:sldMk cId="0" sldId="264"/>
-            <ac:spMk id="2" creationId="{00000000-0000-0000-0000-000000000000}"/>
-          </ac:spMkLst>
-        </pc:spChg>
-        <pc:spChg chg="mod">
-          <ac:chgData name="Peter Bernhardt" userId="f2333933-0b12-4d6e-972f-f87625423892" providerId="ADAL" clId="{54BAB7D7-C378-4C4A-B0F8-9DF09AB8FC9C}" dt="2026-03-18T17:22:43.779" v="463" actId="207"/>
-          <ac:spMkLst>
-            <pc:docMk/>
-            <pc:sldMk cId="0" sldId="264"/>
-            <ac:spMk id="3" creationId="{00000000-0000-0000-0000-000000000000}"/>
-          </ac:spMkLst>
-        </pc:spChg>
-      </pc:sldChg>
-      <pc:sldChg chg="modSp del mod">
-        <pc:chgData name="Peter Bernhardt" userId="f2333933-0b12-4d6e-972f-f87625423892" providerId="ADAL" clId="{54BAB7D7-C378-4C4A-B0F8-9DF09AB8FC9C}" dt="2026-03-18T17:27:59.585" v="473" actId="47"/>
-        <pc:sldMkLst>
-          <pc:docMk/>
-          <pc:sldMk cId="0" sldId="266"/>
-        </pc:sldMkLst>
-        <pc:spChg chg="mod">
-          <ac:chgData name="Peter Bernhardt" userId="f2333933-0b12-4d6e-972f-f87625423892" providerId="ADAL" clId="{54BAB7D7-C378-4C4A-B0F8-9DF09AB8FC9C}" dt="2026-03-18T16:39:28.308" v="91" actId="27636"/>
-          <ac:spMkLst>
-            <pc:docMk/>
-            <pc:sldMk cId="0" sldId="266"/>
-            <ac:spMk id="2" creationId="{00000000-0000-0000-0000-000000000000}"/>
-          </ac:spMkLst>
-        </pc:spChg>
-        <pc:spChg chg="mod">
-          <ac:chgData name="Peter Bernhardt" userId="f2333933-0b12-4d6e-972f-f87625423892" providerId="ADAL" clId="{54BAB7D7-C378-4C4A-B0F8-9DF09AB8FC9C}" dt="2026-03-18T16:39:28.308" v="92" actId="27636"/>
-          <ac:spMkLst>
-            <pc:docMk/>
-            <pc:sldMk cId="0" sldId="266"/>
-            <ac:spMk id="3" creationId="{00000000-0000-0000-0000-000000000000}"/>
-          </ac:spMkLst>
-        </pc:spChg>
-      </pc:sldChg>
-      <pc:sldChg chg="modSp del mod">
-        <pc:chgData name="Peter Bernhardt" userId="f2333933-0b12-4d6e-972f-f87625423892" providerId="ADAL" clId="{54BAB7D7-C378-4C4A-B0F8-9DF09AB8FC9C}" dt="2026-03-18T17:27:59.585" v="473" actId="47"/>
-        <pc:sldMkLst>
-          <pc:docMk/>
-          <pc:sldMk cId="0" sldId="267"/>
-        </pc:sldMkLst>
-        <pc:spChg chg="mod">
-          <ac:chgData name="Peter Bernhardt" userId="f2333933-0b12-4d6e-972f-f87625423892" providerId="ADAL" clId="{54BAB7D7-C378-4C4A-B0F8-9DF09AB8FC9C}" dt="2026-03-18T16:39:28.101" v="79" actId="790"/>
-          <ac:spMkLst>
-            <pc:docMk/>
-            <pc:sldMk cId="0" sldId="267"/>
-            <ac:spMk id="2" creationId="{00000000-0000-0000-0000-000000000000}"/>
-          </ac:spMkLst>
-        </pc:spChg>
-        <pc:spChg chg="mod">
-          <ac:chgData name="Peter Bernhardt" userId="f2333933-0b12-4d6e-972f-f87625423892" providerId="ADAL" clId="{54BAB7D7-C378-4C4A-B0F8-9DF09AB8FC9C}" dt="2026-03-18T16:39:28.325" v="93" actId="27636"/>
-          <ac:spMkLst>
-            <pc:docMk/>
-            <pc:sldMk cId="0" sldId="267"/>
-            <ac:spMk id="3" creationId="{00000000-0000-0000-0000-000000000000}"/>
-          </ac:spMkLst>
-        </pc:spChg>
-      </pc:sldChg>
-      <pc:sldChg chg="modSp del mod">
-        <pc:chgData name="Peter Bernhardt" userId="f2333933-0b12-4d6e-972f-f87625423892" providerId="ADAL" clId="{54BAB7D7-C378-4C4A-B0F8-9DF09AB8FC9C}" dt="2026-03-18T17:27:59.585" v="473" actId="47"/>
-        <pc:sldMkLst>
-          <pc:docMk/>
-          <pc:sldMk cId="0" sldId="268"/>
-        </pc:sldMkLst>
-        <pc:spChg chg="mod">
-          <ac:chgData name="Peter Bernhardt" userId="f2333933-0b12-4d6e-972f-f87625423892" providerId="ADAL" clId="{54BAB7D7-C378-4C4A-B0F8-9DF09AB8FC9C}" dt="2026-03-18T16:39:28.333" v="95" actId="27636"/>
-          <ac:spMkLst>
-            <pc:docMk/>
-            <pc:sldMk cId="0" sldId="268"/>
-            <ac:spMk id="2" creationId="{00000000-0000-0000-0000-000000000000}"/>
-          </ac:spMkLst>
-        </pc:spChg>
-        <pc:spChg chg="mod">
-          <ac:chgData name="Peter Bernhardt" userId="f2333933-0b12-4d6e-972f-f87625423892" providerId="ADAL" clId="{54BAB7D7-C378-4C4A-B0F8-9DF09AB8FC9C}" dt="2026-03-18T16:39:28.332" v="94" actId="27636"/>
-          <ac:spMkLst>
-            <pc:docMk/>
-            <pc:sldMk cId="0" sldId="268"/>
-            <ac:spMk id="3" creationId="{00000000-0000-0000-0000-000000000000}"/>
-          </ac:spMkLst>
-        </pc:spChg>
-      </pc:sldChg>
-      <pc:sldChg chg="addSp delSp modSp del mod setBg delDesignElem chgLayout">
-        <pc:chgData name="Peter Bernhardt" userId="f2333933-0b12-4d6e-972f-f87625423892" providerId="ADAL" clId="{54BAB7D7-C378-4C4A-B0F8-9DF09AB8FC9C}" dt="2026-03-18T17:27:59.585" v="473" actId="47"/>
-        <pc:sldMkLst>
-          <pc:docMk/>
-          <pc:sldMk cId="0" sldId="269"/>
-        </pc:sldMkLst>
-        <pc:spChg chg="mod ord">
-          <ac:chgData name="Peter Bernhardt" userId="f2333933-0b12-4d6e-972f-f87625423892" providerId="ADAL" clId="{54BAB7D7-C378-4C4A-B0F8-9DF09AB8FC9C}" dt="2026-03-18T17:15:30.999" v="433" actId="6264"/>
-          <ac:spMkLst>
-            <pc:docMk/>
-            <pc:sldMk cId="0" sldId="269"/>
-            <ac:spMk id="2" creationId="{00000000-0000-0000-0000-000000000000}"/>
-          </ac:spMkLst>
-        </pc:spChg>
-      </pc:sldChg>
-      <pc:sldChg chg="modSp del mod">
-        <pc:chgData name="Peter Bernhardt" userId="f2333933-0b12-4d6e-972f-f87625423892" providerId="ADAL" clId="{54BAB7D7-C378-4C4A-B0F8-9DF09AB8FC9C}" dt="2026-03-18T17:27:59.585" v="473" actId="47"/>
-        <pc:sldMkLst>
-          <pc:docMk/>
-          <pc:sldMk cId="0" sldId="270"/>
-        </pc:sldMkLst>
-        <pc:spChg chg="mod">
-          <ac:chgData name="Peter Bernhardt" userId="f2333933-0b12-4d6e-972f-f87625423892" providerId="ADAL" clId="{54BAB7D7-C378-4C4A-B0F8-9DF09AB8FC9C}" dt="2026-03-18T16:41:22.087" v="209" actId="14100"/>
-          <ac:spMkLst>
-            <pc:docMk/>
-            <pc:sldMk cId="0" sldId="270"/>
-            <ac:spMk id="2" creationId="{00000000-0000-0000-0000-000000000000}"/>
-          </ac:spMkLst>
-        </pc:spChg>
-        <pc:spChg chg="mod">
-          <ac:chgData name="Peter Bernhardt" userId="f2333933-0b12-4d6e-972f-f87625423892" providerId="ADAL" clId="{54BAB7D7-C378-4C4A-B0F8-9DF09AB8FC9C}" dt="2026-03-18T16:39:28.340" v="97" actId="27636"/>
-          <ac:spMkLst>
-            <pc:docMk/>
-            <pc:sldMk cId="0" sldId="270"/>
-            <ac:spMk id="3" creationId="{00000000-0000-0000-0000-000000000000}"/>
-          </ac:spMkLst>
-        </pc:spChg>
-      </pc:sldChg>
-      <pc:sldChg chg="modSp del mod">
-        <pc:chgData name="Peter Bernhardt" userId="f2333933-0b12-4d6e-972f-f87625423892" providerId="ADAL" clId="{54BAB7D7-C378-4C4A-B0F8-9DF09AB8FC9C}" dt="2026-03-18T17:27:59.585" v="473" actId="47"/>
-        <pc:sldMkLst>
-          <pc:docMk/>
-          <pc:sldMk cId="0" sldId="271"/>
-        </pc:sldMkLst>
-        <pc:spChg chg="mod">
-          <ac:chgData name="Peter Bernhardt" userId="f2333933-0b12-4d6e-972f-f87625423892" providerId="ADAL" clId="{54BAB7D7-C378-4C4A-B0F8-9DF09AB8FC9C}" dt="2026-03-18T16:39:28.342" v="100" actId="27636"/>
-          <ac:spMkLst>
-            <pc:docMk/>
-            <pc:sldMk cId="0" sldId="271"/>
-            <ac:spMk id="2" creationId="{00000000-0000-0000-0000-000000000000}"/>
-          </ac:spMkLst>
-        </pc:spChg>
-        <pc:spChg chg="mod">
-          <ac:chgData name="Peter Bernhardt" userId="f2333933-0b12-4d6e-972f-f87625423892" providerId="ADAL" clId="{54BAB7D7-C378-4C4A-B0F8-9DF09AB8FC9C}" dt="2026-03-18T16:39:28.342" v="99" actId="27636"/>
-          <ac:spMkLst>
-            <pc:docMk/>
-            <pc:sldMk cId="0" sldId="271"/>
-            <ac:spMk id="3" creationId="{00000000-0000-0000-0000-000000000000}"/>
-          </ac:spMkLst>
-        </pc:spChg>
-      </pc:sldChg>
-      <pc:sldChg chg="modSp del mod">
-        <pc:chgData name="Peter Bernhardt" userId="f2333933-0b12-4d6e-972f-f87625423892" providerId="ADAL" clId="{54BAB7D7-C378-4C4A-B0F8-9DF09AB8FC9C}" dt="2026-03-18T17:27:59.585" v="473" actId="47"/>
-        <pc:sldMkLst>
-          <pc:docMk/>
-          <pc:sldMk cId="0" sldId="272"/>
-        </pc:sldMkLst>
-        <pc:spChg chg="mod">
-          <ac:chgData name="Peter Bernhardt" userId="f2333933-0b12-4d6e-972f-f87625423892" providerId="ADAL" clId="{54BAB7D7-C378-4C4A-B0F8-9DF09AB8FC9C}" dt="2026-03-18T16:41:22.087" v="209" actId="14100"/>
-          <ac:spMkLst>
-            <pc:docMk/>
-            <pc:sldMk cId="0" sldId="272"/>
-            <ac:spMk id="2" creationId="{00000000-0000-0000-0000-000000000000}"/>
-          </ac:spMkLst>
-        </pc:spChg>
-      </pc:sldChg>
-      <pc:sldChg chg="modSp del mod">
-        <pc:chgData name="Peter Bernhardt" userId="f2333933-0b12-4d6e-972f-f87625423892" providerId="ADAL" clId="{54BAB7D7-C378-4C4A-B0F8-9DF09AB8FC9C}" dt="2026-03-18T17:27:59.585" v="473" actId="47"/>
-        <pc:sldMkLst>
-          <pc:docMk/>
-          <pc:sldMk cId="0" sldId="273"/>
-        </pc:sldMkLst>
-        <pc:spChg chg="mod">
-          <ac:chgData name="Peter Bernhardt" userId="f2333933-0b12-4d6e-972f-f87625423892" providerId="ADAL" clId="{54BAB7D7-C378-4C4A-B0F8-9DF09AB8FC9C}" dt="2026-03-18T16:39:28.101" v="79" actId="790"/>
-          <ac:spMkLst>
-            <pc:docMk/>
-            <pc:sldMk cId="0" sldId="273"/>
-            <ac:spMk id="2" creationId="{00000000-0000-0000-0000-000000000000}"/>
-          </ac:spMkLst>
-        </pc:spChg>
-        <pc:spChg chg="mod">
-          <ac:chgData name="Peter Bernhardt" userId="f2333933-0b12-4d6e-972f-f87625423892" providerId="ADAL" clId="{54BAB7D7-C378-4C4A-B0F8-9DF09AB8FC9C}" dt="2026-03-18T16:39:28.783" v="103" actId="27636"/>
-          <ac:spMkLst>
-            <pc:docMk/>
-            <pc:sldMk cId="0" sldId="273"/>
-            <ac:spMk id="3" creationId="{00000000-0000-0000-0000-000000000000}"/>
-          </ac:spMkLst>
-        </pc:spChg>
-      </pc:sldChg>
-      <pc:sldChg chg="modSp del mod">
-        <pc:chgData name="Peter Bernhardt" userId="f2333933-0b12-4d6e-972f-f87625423892" providerId="ADAL" clId="{54BAB7D7-C378-4C4A-B0F8-9DF09AB8FC9C}" dt="2026-03-18T17:27:59.585" v="473" actId="47"/>
-        <pc:sldMkLst>
-          <pc:docMk/>
-          <pc:sldMk cId="0" sldId="274"/>
-        </pc:sldMkLst>
-        <pc:spChg chg="mod">
-          <ac:chgData name="Peter Bernhardt" userId="f2333933-0b12-4d6e-972f-f87625423892" providerId="ADAL" clId="{54BAB7D7-C378-4C4A-B0F8-9DF09AB8FC9C}" dt="2026-03-18T16:39:28.101" v="79" actId="790"/>
-          <ac:spMkLst>
-            <pc:docMk/>
-            <pc:sldMk cId="0" sldId="274"/>
-            <ac:spMk id="2" creationId="{00000000-0000-0000-0000-000000000000}"/>
-          </ac:spMkLst>
-        </pc:spChg>
-        <pc:spChg chg="mod">
-          <ac:chgData name="Peter Bernhardt" userId="f2333933-0b12-4d6e-972f-f87625423892" providerId="ADAL" clId="{54BAB7D7-C378-4C4A-B0F8-9DF09AB8FC9C}" dt="2026-03-18T16:39:28.791" v="104" actId="27636"/>
-          <ac:spMkLst>
-            <pc:docMk/>
-            <pc:sldMk cId="0" sldId="274"/>
-            <ac:spMk id="3" creationId="{00000000-0000-0000-0000-000000000000}"/>
-          </ac:spMkLst>
-        </pc:spChg>
-      </pc:sldChg>
-      <pc:sldChg chg="modSp del mod">
-        <pc:chgData name="Peter Bernhardt" userId="f2333933-0b12-4d6e-972f-f87625423892" providerId="ADAL" clId="{54BAB7D7-C378-4C4A-B0F8-9DF09AB8FC9C}" dt="2026-03-18T17:27:59.585" v="473" actId="47"/>
-        <pc:sldMkLst>
-          <pc:docMk/>
-          <pc:sldMk cId="0" sldId="275"/>
-        </pc:sldMkLst>
-        <pc:spChg chg="mod">
-          <ac:chgData name="Peter Bernhardt" userId="f2333933-0b12-4d6e-972f-f87625423892" providerId="ADAL" clId="{54BAB7D7-C378-4C4A-B0F8-9DF09AB8FC9C}" dt="2026-03-18T16:39:28.804" v="106" actId="27636"/>
-          <ac:spMkLst>
-            <pc:docMk/>
-            <pc:sldMk cId="0" sldId="275"/>
-            <ac:spMk id="2" creationId="{00000000-0000-0000-0000-000000000000}"/>
-          </ac:spMkLst>
-        </pc:spChg>
-        <pc:spChg chg="mod">
-          <ac:chgData name="Peter Bernhardt" userId="f2333933-0b12-4d6e-972f-f87625423892" providerId="ADAL" clId="{54BAB7D7-C378-4C4A-B0F8-9DF09AB8FC9C}" dt="2026-03-18T16:39:28.802" v="105" actId="27636"/>
-          <ac:spMkLst>
-            <pc:docMk/>
-            <pc:sldMk cId="0" sldId="275"/>
-            <ac:spMk id="3" creationId="{00000000-0000-0000-0000-000000000000}"/>
-          </ac:spMkLst>
-        </pc:spChg>
-      </pc:sldChg>
-      <pc:sldChg chg="modSp del mod">
-        <pc:chgData name="Peter Bernhardt" userId="f2333933-0b12-4d6e-972f-f87625423892" providerId="ADAL" clId="{54BAB7D7-C378-4C4A-B0F8-9DF09AB8FC9C}" dt="2026-03-18T17:27:59.585" v="473" actId="47"/>
-        <pc:sldMkLst>
-          <pc:docMk/>
-          <pc:sldMk cId="0" sldId="276"/>
-        </pc:sldMkLst>
-        <pc:spChg chg="mod">
-          <ac:chgData name="Peter Bernhardt" userId="f2333933-0b12-4d6e-972f-f87625423892" providerId="ADAL" clId="{54BAB7D7-C378-4C4A-B0F8-9DF09AB8FC9C}" dt="2026-03-18T16:39:28.807" v="107" actId="27636"/>
-          <ac:spMkLst>
-            <pc:docMk/>
-            <pc:sldMk cId="0" sldId="276"/>
-            <ac:spMk id="2" creationId="{00000000-0000-0000-0000-000000000000}"/>
-          </ac:spMkLst>
-        </pc:spChg>
-        <pc:spChg chg="mod">
-          <ac:chgData name="Peter Bernhardt" userId="f2333933-0b12-4d6e-972f-f87625423892" providerId="ADAL" clId="{54BAB7D7-C378-4C4A-B0F8-9DF09AB8FC9C}" dt="2026-03-18T16:39:28.807" v="108" actId="27636"/>
-          <ac:spMkLst>
-            <pc:docMk/>
-            <pc:sldMk cId="0" sldId="276"/>
-            <ac:spMk id="3" creationId="{00000000-0000-0000-0000-000000000000}"/>
-          </ac:spMkLst>
-        </pc:spChg>
-      </pc:sldChg>
-      <pc:sldChg chg="modSp del mod">
-        <pc:chgData name="Peter Bernhardt" userId="f2333933-0b12-4d6e-972f-f87625423892" providerId="ADAL" clId="{54BAB7D7-C378-4C4A-B0F8-9DF09AB8FC9C}" dt="2026-03-18T17:27:59.585" v="473" actId="47"/>
-        <pc:sldMkLst>
-          <pc:docMk/>
-          <pc:sldMk cId="0" sldId="277"/>
-        </pc:sldMkLst>
-        <pc:spChg chg="mod">
-          <ac:chgData name="Peter Bernhardt" userId="f2333933-0b12-4d6e-972f-f87625423892" providerId="ADAL" clId="{54BAB7D7-C378-4C4A-B0F8-9DF09AB8FC9C}" dt="2026-03-18T16:39:28.101" v="79" actId="790"/>
-          <ac:spMkLst>
-            <pc:docMk/>
-            <pc:sldMk cId="0" sldId="277"/>
-            <ac:spMk id="2" creationId="{00000000-0000-0000-0000-000000000000}"/>
-          </ac:spMkLst>
-        </pc:spChg>
-        <pc:spChg chg="mod">
-          <ac:chgData name="Peter Bernhardt" userId="f2333933-0b12-4d6e-972f-f87625423892" providerId="ADAL" clId="{54BAB7D7-C378-4C4A-B0F8-9DF09AB8FC9C}" dt="2026-03-18T16:39:28.807" v="109" actId="27636"/>
-          <ac:spMkLst>
-            <pc:docMk/>
-            <pc:sldMk cId="0" sldId="277"/>
-            <ac:spMk id="3" creationId="{00000000-0000-0000-0000-000000000000}"/>
-          </ac:spMkLst>
-        </pc:spChg>
-      </pc:sldChg>
-      <pc:sldChg chg="modSp del mod">
-        <pc:chgData name="Peter Bernhardt" userId="f2333933-0b12-4d6e-972f-f87625423892" providerId="ADAL" clId="{54BAB7D7-C378-4C4A-B0F8-9DF09AB8FC9C}" dt="2026-03-18T17:27:59.585" v="473" actId="47"/>
-        <pc:sldMkLst>
-          <pc:docMk/>
-          <pc:sldMk cId="0" sldId="278"/>
-        </pc:sldMkLst>
-        <pc:spChg chg="mod">
-          <ac:chgData name="Peter Bernhardt" userId="f2333933-0b12-4d6e-972f-f87625423892" providerId="ADAL" clId="{54BAB7D7-C378-4C4A-B0F8-9DF09AB8FC9C}" dt="2026-03-18T16:39:28.101" v="79" actId="790"/>
-          <ac:spMkLst>
-            <pc:docMk/>
-            <pc:sldMk cId="0" sldId="278"/>
-            <ac:spMk id="2" creationId="{00000000-0000-0000-0000-000000000000}"/>
-          </ac:spMkLst>
-        </pc:spChg>
-        <pc:spChg chg="mod">
-          <ac:chgData name="Peter Bernhardt" userId="f2333933-0b12-4d6e-972f-f87625423892" providerId="ADAL" clId="{54BAB7D7-C378-4C4A-B0F8-9DF09AB8FC9C}" dt="2026-03-18T16:39:28.830" v="110" actId="27636"/>
-          <ac:spMkLst>
-            <pc:docMk/>
-            <pc:sldMk cId="0" sldId="278"/>
-            <ac:spMk id="3" creationId="{00000000-0000-0000-0000-000000000000}"/>
-          </ac:spMkLst>
-        </pc:spChg>
-      </pc:sldChg>
-      <pc:sldChg chg="modSp del mod">
-        <pc:chgData name="Peter Bernhardt" userId="f2333933-0b12-4d6e-972f-f87625423892" providerId="ADAL" clId="{54BAB7D7-C378-4C4A-B0F8-9DF09AB8FC9C}" dt="2026-03-18T17:27:59.585" v="473" actId="47"/>
-        <pc:sldMkLst>
-          <pc:docMk/>
-          <pc:sldMk cId="0" sldId="279"/>
-        </pc:sldMkLst>
-        <pc:spChg chg="mod">
-          <ac:chgData name="Peter Bernhardt" userId="f2333933-0b12-4d6e-972f-f87625423892" providerId="ADAL" clId="{54BAB7D7-C378-4C4A-B0F8-9DF09AB8FC9C}" dt="2026-03-18T16:39:28.832" v="111" actId="27636"/>
-          <ac:spMkLst>
-            <pc:docMk/>
-            <pc:sldMk cId="0" sldId="279"/>
-            <ac:spMk id="2" creationId="{00000000-0000-0000-0000-000000000000}"/>
-          </ac:spMkLst>
-        </pc:spChg>
-        <pc:spChg chg="mod">
-          <ac:chgData name="Peter Bernhardt" userId="f2333933-0b12-4d6e-972f-f87625423892" providerId="ADAL" clId="{54BAB7D7-C378-4C4A-B0F8-9DF09AB8FC9C}" dt="2026-03-18T16:39:28.839" v="112" actId="27636"/>
-          <ac:spMkLst>
-            <pc:docMk/>
-            <pc:sldMk cId="0" sldId="279"/>
-            <ac:spMk id="3" creationId="{00000000-0000-0000-0000-000000000000}"/>
-          </ac:spMkLst>
-        </pc:spChg>
-      </pc:sldChg>
-      <pc:sldChg chg="addSp modSp del mod chgLayout">
-        <pc:chgData name="Peter Bernhardt" userId="f2333933-0b12-4d6e-972f-f87625423892" providerId="ADAL" clId="{54BAB7D7-C378-4C4A-B0F8-9DF09AB8FC9C}" dt="2026-03-18T17:27:59.585" v="473" actId="47"/>
-        <pc:sldMkLst>
-          <pc:docMk/>
-          <pc:sldMk cId="0" sldId="280"/>
-        </pc:sldMkLst>
-        <pc:spChg chg="mod ord">
-          <ac:chgData name="Peter Bernhardt" userId="f2333933-0b12-4d6e-972f-f87625423892" providerId="ADAL" clId="{54BAB7D7-C378-4C4A-B0F8-9DF09AB8FC9C}" dt="2026-03-18T16:47:36.106" v="303" actId="700"/>
-          <ac:spMkLst>
-            <pc:docMk/>
-            <pc:sldMk cId="0" sldId="280"/>
-            <ac:spMk id="2" creationId="{00000000-0000-0000-0000-000000000000}"/>
-          </ac:spMkLst>
-        </pc:spChg>
-      </pc:sldChg>
-      <pc:sldChg chg="modSp del mod">
-        <pc:chgData name="Peter Bernhardt" userId="f2333933-0b12-4d6e-972f-f87625423892" providerId="ADAL" clId="{54BAB7D7-C378-4C4A-B0F8-9DF09AB8FC9C}" dt="2026-03-18T17:27:59.585" v="473" actId="47"/>
-        <pc:sldMkLst>
-          <pc:docMk/>
-          <pc:sldMk cId="0" sldId="282"/>
-        </pc:sldMkLst>
-        <pc:spChg chg="mod">
-          <ac:chgData name="Peter Bernhardt" userId="f2333933-0b12-4d6e-972f-f87625423892" providerId="ADAL" clId="{54BAB7D7-C378-4C4A-B0F8-9DF09AB8FC9C}" dt="2026-03-18T16:39:28.101" v="79" actId="790"/>
-          <ac:spMkLst>
-            <pc:docMk/>
-            <pc:sldMk cId="0" sldId="282"/>
-            <ac:spMk id="2" creationId="{00000000-0000-0000-0000-000000000000}"/>
-          </ac:spMkLst>
-        </pc:spChg>
-        <pc:spChg chg="mod">
-          <ac:chgData name="Peter Bernhardt" userId="f2333933-0b12-4d6e-972f-f87625423892" providerId="ADAL" clId="{54BAB7D7-C378-4C4A-B0F8-9DF09AB8FC9C}" dt="2026-03-18T16:39:28.858" v="115" actId="27636"/>
-          <ac:spMkLst>
-            <pc:docMk/>
-            <pc:sldMk cId="0" sldId="282"/>
-            <ac:spMk id="3" creationId="{00000000-0000-0000-0000-000000000000}"/>
-          </ac:spMkLst>
-        </pc:spChg>
-      </pc:sldChg>
-      <pc:sldChg chg="modSp del mod">
-        <pc:chgData name="Peter Bernhardt" userId="f2333933-0b12-4d6e-972f-f87625423892" providerId="ADAL" clId="{54BAB7D7-C378-4C4A-B0F8-9DF09AB8FC9C}" dt="2026-03-18T17:27:59.585" v="473" actId="47"/>
-        <pc:sldMkLst>
-          <pc:docMk/>
-          <pc:sldMk cId="0" sldId="283"/>
-        </pc:sldMkLst>
-        <pc:spChg chg="mod">
-          <ac:chgData name="Peter Bernhardt" userId="f2333933-0b12-4d6e-972f-f87625423892" providerId="ADAL" clId="{54BAB7D7-C378-4C4A-B0F8-9DF09AB8FC9C}" dt="2026-03-18T16:39:28.101" v="79" actId="790"/>
-          <ac:spMkLst>
-            <pc:docMk/>
-            <pc:sldMk cId="0" sldId="283"/>
-            <ac:spMk id="2" creationId="{00000000-0000-0000-0000-000000000000}"/>
-          </ac:spMkLst>
-        </pc:spChg>
-        <pc:spChg chg="mod">
-          <ac:chgData name="Peter Bernhardt" userId="f2333933-0b12-4d6e-972f-f87625423892" providerId="ADAL" clId="{54BAB7D7-C378-4C4A-B0F8-9DF09AB8FC9C}" dt="2026-03-18T16:39:28.866" v="116" actId="27636"/>
-          <ac:spMkLst>
-            <pc:docMk/>
-            <pc:sldMk cId="0" sldId="283"/>
-            <ac:spMk id="3" creationId="{00000000-0000-0000-0000-000000000000}"/>
-          </ac:spMkLst>
-        </pc:spChg>
-      </pc:sldChg>
-      <pc:sldChg chg="addSp modSp del mod">
-        <pc:chgData name="Peter Bernhardt" userId="f2333933-0b12-4d6e-972f-f87625423892" providerId="ADAL" clId="{54BAB7D7-C378-4C4A-B0F8-9DF09AB8FC9C}" dt="2026-03-18T17:27:59.585" v="473" actId="47"/>
-        <pc:sldMkLst>
-          <pc:docMk/>
-          <pc:sldMk cId="0" sldId="284"/>
-        </pc:sldMkLst>
-        <pc:spChg chg="mod">
-          <ac:chgData name="Peter Bernhardt" userId="f2333933-0b12-4d6e-972f-f87625423892" providerId="ADAL" clId="{54BAB7D7-C378-4C4A-B0F8-9DF09AB8FC9C}" dt="2026-03-18T16:39:28.869" v="117" actId="27636"/>
-          <ac:spMkLst>
-            <pc:docMk/>
-            <pc:sldMk cId="0" sldId="284"/>
-            <ac:spMk id="2" creationId="{00000000-0000-0000-0000-000000000000}"/>
-          </ac:spMkLst>
-        </pc:spChg>
-        <pc:spChg chg="mod">
-          <ac:chgData name="Peter Bernhardt" userId="f2333933-0b12-4d6e-972f-f87625423892" providerId="ADAL" clId="{54BAB7D7-C378-4C4A-B0F8-9DF09AB8FC9C}" dt="2026-03-18T17:16:09.844" v="437" actId="27636"/>
-          <ac:spMkLst>
-            <pc:docMk/>
-            <pc:sldMk cId="0" sldId="284"/>
-            <ac:spMk id="3" creationId="{00000000-0000-0000-0000-000000000000}"/>
-          </ac:spMkLst>
-        </pc:spChg>
-      </pc:sldChg>
-      <pc:sldChg chg="modSp del mod">
-        <pc:chgData name="Peter Bernhardt" userId="f2333933-0b12-4d6e-972f-f87625423892" providerId="ADAL" clId="{54BAB7D7-C378-4C4A-B0F8-9DF09AB8FC9C}" dt="2026-03-18T17:27:59.585" v="473" actId="47"/>
-        <pc:sldMkLst>
-          <pc:docMk/>
-          <pc:sldMk cId="0" sldId="285"/>
-        </pc:sldMkLst>
-        <pc:spChg chg="mod">
-          <ac:chgData name="Peter Bernhardt" userId="f2333933-0b12-4d6e-972f-f87625423892" providerId="ADAL" clId="{54BAB7D7-C378-4C4A-B0F8-9DF09AB8FC9C}" dt="2026-03-18T16:39:28.101" v="79" actId="790"/>
-          <ac:spMkLst>
-            <pc:docMk/>
-            <pc:sldMk cId="0" sldId="285"/>
-            <ac:spMk id="2" creationId="{00000000-0000-0000-0000-000000000000}"/>
-          </ac:spMkLst>
-        </pc:spChg>
-        <pc:spChg chg="mod">
-          <ac:chgData name="Peter Bernhardt" userId="f2333933-0b12-4d6e-972f-f87625423892" providerId="ADAL" clId="{54BAB7D7-C378-4C4A-B0F8-9DF09AB8FC9C}" dt="2026-03-18T16:39:28.869" v="119" actId="27636"/>
-          <ac:spMkLst>
-            <pc:docMk/>
-            <pc:sldMk cId="0" sldId="285"/>
-            <ac:spMk id="3" creationId="{00000000-0000-0000-0000-000000000000}"/>
-          </ac:spMkLst>
-        </pc:spChg>
-      </pc:sldChg>
-      <pc:sldChg chg="modSp del mod">
-        <pc:chgData name="Peter Bernhardt" userId="f2333933-0b12-4d6e-972f-f87625423892" providerId="ADAL" clId="{54BAB7D7-C378-4C4A-B0F8-9DF09AB8FC9C}" dt="2026-03-18T17:27:59.585" v="473" actId="47"/>
-        <pc:sldMkLst>
-          <pc:docMk/>
-          <pc:sldMk cId="0" sldId="286"/>
-        </pc:sldMkLst>
-        <pc:spChg chg="mod">
-          <ac:chgData name="Peter Bernhardt" userId="f2333933-0b12-4d6e-972f-f87625423892" providerId="ADAL" clId="{54BAB7D7-C378-4C4A-B0F8-9DF09AB8FC9C}" dt="2026-03-18T16:39:28.101" v="79" actId="790"/>
-          <ac:spMkLst>
-            <pc:docMk/>
-            <pc:sldMk cId="0" sldId="286"/>
-            <ac:spMk id="2" creationId="{00000000-0000-0000-0000-000000000000}"/>
-          </ac:spMkLst>
-        </pc:spChg>
-      </pc:sldChg>
-      <pc:sldChg chg="modSp del mod">
-        <pc:chgData name="Peter Bernhardt" userId="f2333933-0b12-4d6e-972f-f87625423892" providerId="ADAL" clId="{54BAB7D7-C378-4C4A-B0F8-9DF09AB8FC9C}" dt="2026-03-18T17:27:59.585" v="473" actId="47"/>
-        <pc:sldMkLst>
-          <pc:docMk/>
-          <pc:sldMk cId="0" sldId="287"/>
-        </pc:sldMkLst>
-        <pc:spChg chg="mod">
-          <ac:chgData name="Peter Bernhardt" userId="f2333933-0b12-4d6e-972f-f87625423892" providerId="ADAL" clId="{54BAB7D7-C378-4C4A-B0F8-9DF09AB8FC9C}" dt="2026-03-18T16:39:28.101" v="79" actId="790"/>
-          <ac:spMkLst>
-            <pc:docMk/>
-            <pc:sldMk cId="0" sldId="287"/>
-            <ac:spMk id="2" creationId="{00000000-0000-0000-0000-000000000000}"/>
-          </ac:spMkLst>
-        </pc:spChg>
-        <pc:spChg chg="mod">
-          <ac:chgData name="Peter Bernhardt" userId="f2333933-0b12-4d6e-972f-f87625423892" providerId="ADAL" clId="{54BAB7D7-C378-4C4A-B0F8-9DF09AB8FC9C}" dt="2026-03-18T16:39:28.899" v="121" actId="27636"/>
-          <ac:spMkLst>
-            <pc:docMk/>
-            <pc:sldMk cId="0" sldId="287"/>
-            <ac:spMk id="3" creationId="{00000000-0000-0000-0000-000000000000}"/>
-          </ac:spMkLst>
-        </pc:spChg>
-      </pc:sldChg>
-      <pc:sldChg chg="modSp del mod">
-        <pc:chgData name="Peter Bernhardt" userId="f2333933-0b12-4d6e-972f-f87625423892" providerId="ADAL" clId="{54BAB7D7-C378-4C4A-B0F8-9DF09AB8FC9C}" dt="2026-03-18T17:27:59.585" v="473" actId="47"/>
-        <pc:sldMkLst>
-          <pc:docMk/>
-          <pc:sldMk cId="0" sldId="288"/>
-        </pc:sldMkLst>
-        <pc:spChg chg="mod">
-          <ac:chgData name="Peter Bernhardt" userId="f2333933-0b12-4d6e-972f-f87625423892" providerId="ADAL" clId="{54BAB7D7-C378-4C4A-B0F8-9DF09AB8FC9C}" dt="2026-03-18T16:39:28.904" v="122" actId="27636"/>
-          <ac:spMkLst>
-            <pc:docMk/>
-            <pc:sldMk cId="0" sldId="288"/>
-            <ac:spMk id="2" creationId="{00000000-0000-0000-0000-000000000000}"/>
-          </ac:spMkLst>
-        </pc:spChg>
-        <pc:spChg chg="mod">
-          <ac:chgData name="Peter Bernhardt" userId="f2333933-0b12-4d6e-972f-f87625423892" providerId="ADAL" clId="{54BAB7D7-C378-4C4A-B0F8-9DF09AB8FC9C}" dt="2026-03-18T16:39:28.910" v="123" actId="27636"/>
-          <ac:spMkLst>
-            <pc:docMk/>
-            <pc:sldMk cId="0" sldId="288"/>
-            <ac:spMk id="3" creationId="{00000000-0000-0000-0000-000000000000}"/>
-          </ac:spMkLst>
-        </pc:spChg>
-      </pc:sldChg>
-      <pc:sldChg chg="modSp del mod">
-        <pc:chgData name="Peter Bernhardt" userId="f2333933-0b12-4d6e-972f-f87625423892" providerId="ADAL" clId="{54BAB7D7-C378-4C4A-B0F8-9DF09AB8FC9C}" dt="2026-03-18T17:27:59.585" v="473" actId="47"/>
-        <pc:sldMkLst>
-          <pc:docMk/>
-          <pc:sldMk cId="0" sldId="290"/>
-        </pc:sldMkLst>
-        <pc:spChg chg="mod">
-          <ac:chgData name="Peter Bernhardt" userId="f2333933-0b12-4d6e-972f-f87625423892" providerId="ADAL" clId="{54BAB7D7-C378-4C4A-B0F8-9DF09AB8FC9C}" dt="2026-03-18T16:41:22.087" v="209" actId="14100"/>
-          <ac:spMkLst>
-            <pc:docMk/>
-            <pc:sldMk cId="0" sldId="290"/>
-            <ac:spMk id="2" creationId="{00000000-0000-0000-0000-000000000000}"/>
-          </ac:spMkLst>
-        </pc:spChg>
-        <pc:spChg chg="mod">
-          <ac:chgData name="Peter Bernhardt" userId="f2333933-0b12-4d6e-972f-f87625423892" providerId="ADAL" clId="{54BAB7D7-C378-4C4A-B0F8-9DF09AB8FC9C}" dt="2026-03-18T16:39:28.921" v="126" actId="27636"/>
-          <ac:spMkLst>
-            <pc:docMk/>
-            <pc:sldMk cId="0" sldId="290"/>
-            <ac:spMk id="3" creationId="{00000000-0000-0000-0000-000000000000}"/>
-          </ac:spMkLst>
-        </pc:spChg>
-      </pc:sldChg>
-      <pc:sldChg chg="modSp del mod">
-        <pc:chgData name="Peter Bernhardt" userId="f2333933-0b12-4d6e-972f-f87625423892" providerId="ADAL" clId="{54BAB7D7-C378-4C4A-B0F8-9DF09AB8FC9C}" dt="2026-03-18T17:27:59.585" v="473" actId="47"/>
-        <pc:sldMkLst>
-          <pc:docMk/>
-          <pc:sldMk cId="0" sldId="291"/>
-        </pc:sldMkLst>
-        <pc:spChg chg="mod">
-          <ac:chgData name="Peter Bernhardt" userId="f2333933-0b12-4d6e-972f-f87625423892" providerId="ADAL" clId="{54BAB7D7-C378-4C4A-B0F8-9DF09AB8FC9C}" dt="2026-03-18T16:39:28.927" v="127" actId="27636"/>
-          <ac:spMkLst>
-            <pc:docMk/>
-            <pc:sldMk cId="0" sldId="291"/>
-            <ac:spMk id="2" creationId="{00000000-0000-0000-0000-000000000000}"/>
-          </ac:spMkLst>
-        </pc:spChg>
-        <pc:spChg chg="mod">
-          <ac:chgData name="Peter Bernhardt" userId="f2333933-0b12-4d6e-972f-f87625423892" providerId="ADAL" clId="{54BAB7D7-C378-4C4A-B0F8-9DF09AB8FC9C}" dt="2026-03-18T16:39:28.931" v="128" actId="27636"/>
-          <ac:spMkLst>
-            <pc:docMk/>
-            <pc:sldMk cId="0" sldId="291"/>
-            <ac:spMk id="3" creationId="{00000000-0000-0000-0000-000000000000}"/>
-          </ac:spMkLst>
-        </pc:spChg>
-      </pc:sldChg>
-      <pc:sldChg chg="modSp del mod">
-        <pc:chgData name="Peter Bernhardt" userId="f2333933-0b12-4d6e-972f-f87625423892" providerId="ADAL" clId="{54BAB7D7-C378-4C4A-B0F8-9DF09AB8FC9C}" dt="2026-03-18T17:27:59.585" v="473" actId="47"/>
-        <pc:sldMkLst>
-          <pc:docMk/>
-          <pc:sldMk cId="0" sldId="292"/>
-        </pc:sldMkLst>
-        <pc:spChg chg="mod">
-          <ac:chgData name="Peter Bernhardt" userId="f2333933-0b12-4d6e-972f-f87625423892" providerId="ADAL" clId="{54BAB7D7-C378-4C4A-B0F8-9DF09AB8FC9C}" dt="2026-03-18T16:39:28.933" v="130" actId="27636"/>
-          <ac:spMkLst>
-            <pc:docMk/>
-            <pc:sldMk cId="0" sldId="292"/>
-            <ac:spMk id="2" creationId="{00000000-0000-0000-0000-000000000000}"/>
-          </ac:spMkLst>
-        </pc:spChg>
-        <pc:spChg chg="mod">
-          <ac:chgData name="Peter Bernhardt" userId="f2333933-0b12-4d6e-972f-f87625423892" providerId="ADAL" clId="{54BAB7D7-C378-4C4A-B0F8-9DF09AB8FC9C}" dt="2026-03-18T16:39:28.933" v="129" actId="27636"/>
-          <ac:spMkLst>
-            <pc:docMk/>
-            <pc:sldMk cId="0" sldId="292"/>
-            <ac:spMk id="3" creationId="{00000000-0000-0000-0000-000000000000}"/>
-          </ac:spMkLst>
-        </pc:spChg>
-      </pc:sldChg>
-      <pc:sldChg chg="modSp del mod">
-        <pc:chgData name="Peter Bernhardt" userId="f2333933-0b12-4d6e-972f-f87625423892" providerId="ADAL" clId="{54BAB7D7-C378-4C4A-B0F8-9DF09AB8FC9C}" dt="2026-03-18T17:27:59.585" v="473" actId="47"/>
-        <pc:sldMkLst>
-          <pc:docMk/>
-          <pc:sldMk cId="0" sldId="293"/>
-        </pc:sldMkLst>
-        <pc:spChg chg="mod">
-          <ac:chgData name="Peter Bernhardt" userId="f2333933-0b12-4d6e-972f-f87625423892" providerId="ADAL" clId="{54BAB7D7-C378-4C4A-B0F8-9DF09AB8FC9C}" dt="2026-03-18T16:39:28.933" v="131" actId="27636"/>
-          <ac:spMkLst>
-            <pc:docMk/>
-            <pc:sldMk cId="0" sldId="293"/>
-            <ac:spMk id="2" creationId="{00000000-0000-0000-0000-000000000000}"/>
-          </ac:spMkLst>
-        </pc:spChg>
-        <pc:spChg chg="mod">
-          <ac:chgData name="Peter Bernhardt" userId="f2333933-0b12-4d6e-972f-f87625423892" providerId="ADAL" clId="{54BAB7D7-C378-4C4A-B0F8-9DF09AB8FC9C}" dt="2026-03-18T16:39:28.949" v="132" actId="27636"/>
-          <ac:spMkLst>
-            <pc:docMk/>
-            <pc:sldMk cId="0" sldId="293"/>
-            <ac:spMk id="3" creationId="{00000000-0000-0000-0000-000000000000}"/>
-          </ac:spMkLst>
-        </pc:spChg>
-      </pc:sldChg>
-      <pc:sldChg chg="modSp del mod">
-        <pc:chgData name="Peter Bernhardt" userId="f2333933-0b12-4d6e-972f-f87625423892" providerId="ADAL" clId="{54BAB7D7-C378-4C4A-B0F8-9DF09AB8FC9C}" dt="2026-03-18T17:27:59.585" v="473" actId="47"/>
-        <pc:sldMkLst>
-          <pc:docMk/>
-          <pc:sldMk cId="0" sldId="294"/>
-        </pc:sldMkLst>
-        <pc:spChg chg="mod">
-          <ac:chgData name="Peter Bernhardt" userId="f2333933-0b12-4d6e-972f-f87625423892" providerId="ADAL" clId="{54BAB7D7-C378-4C4A-B0F8-9DF09AB8FC9C}" dt="2026-03-18T16:39:28.101" v="79" actId="790"/>
-          <ac:spMkLst>
-            <pc:docMk/>
-            <pc:sldMk cId="0" sldId="294"/>
-            <ac:spMk id="2" creationId="{00000000-0000-0000-0000-000000000000}"/>
-          </ac:spMkLst>
-        </pc:spChg>
-        <pc:spChg chg="mod">
-          <ac:chgData name="Peter Bernhardt" userId="f2333933-0b12-4d6e-972f-f87625423892" providerId="ADAL" clId="{54BAB7D7-C378-4C4A-B0F8-9DF09AB8FC9C}" dt="2026-03-18T16:39:28.966" v="133" actId="27636"/>
-          <ac:spMkLst>
-            <pc:docMk/>
-            <pc:sldMk cId="0" sldId="294"/>
-            <ac:spMk id="3" creationId="{00000000-0000-0000-0000-000000000000}"/>
-          </ac:spMkLst>
-        </pc:spChg>
-      </pc:sldChg>
-      <pc:sldChg chg="modSp del mod">
-        <pc:chgData name="Peter Bernhardt" userId="f2333933-0b12-4d6e-972f-f87625423892" providerId="ADAL" clId="{54BAB7D7-C378-4C4A-B0F8-9DF09AB8FC9C}" dt="2026-03-18T17:27:59.585" v="473" actId="47"/>
-        <pc:sldMkLst>
-          <pc:docMk/>
-          <pc:sldMk cId="0" sldId="295"/>
-        </pc:sldMkLst>
-        <pc:spChg chg="mod">
-          <ac:chgData name="Peter Bernhardt" userId="f2333933-0b12-4d6e-972f-f87625423892" providerId="ADAL" clId="{54BAB7D7-C378-4C4A-B0F8-9DF09AB8FC9C}" dt="2026-03-18T16:41:22.087" v="209" actId="14100"/>
-          <ac:spMkLst>
-            <pc:docMk/>
-            <pc:sldMk cId="0" sldId="295"/>
-            <ac:spMk id="2" creationId="{00000000-0000-0000-0000-000000000000}"/>
-          </ac:spMkLst>
-        </pc:spChg>
-      </pc:sldChg>
-      <pc:sldChg chg="modSp del mod">
-        <pc:chgData name="Peter Bernhardt" userId="f2333933-0b12-4d6e-972f-f87625423892" providerId="ADAL" clId="{54BAB7D7-C378-4C4A-B0F8-9DF09AB8FC9C}" dt="2026-03-18T17:27:59.585" v="473" actId="47"/>
-        <pc:sldMkLst>
-          <pc:docMk/>
-          <pc:sldMk cId="0" sldId="296"/>
-        </pc:sldMkLst>
-        <pc:spChg chg="mod">
-          <ac:chgData name="Peter Bernhardt" userId="f2333933-0b12-4d6e-972f-f87625423892" providerId="ADAL" clId="{54BAB7D7-C378-4C4A-B0F8-9DF09AB8FC9C}" dt="2026-03-18T17:16:52.359" v="442" actId="20577"/>
-          <ac:spMkLst>
-            <pc:docMk/>
-            <pc:sldMk cId="0" sldId="296"/>
-            <ac:spMk id="2" creationId="{00000000-0000-0000-0000-000000000000}"/>
-          </ac:spMkLst>
-        </pc:spChg>
-        <pc:spChg chg="mod">
-          <ac:chgData name="Peter Bernhardt" userId="f2333933-0b12-4d6e-972f-f87625423892" providerId="ADAL" clId="{54BAB7D7-C378-4C4A-B0F8-9DF09AB8FC9C}" dt="2026-03-18T16:39:28.101" v="79" actId="790"/>
-          <ac:spMkLst>
-            <pc:docMk/>
-            <pc:sldMk cId="0" sldId="296"/>
-            <ac:spMk id="3" creationId="{00000000-0000-0000-0000-000000000000}"/>
-          </ac:spMkLst>
-        </pc:spChg>
-      </pc:sldChg>
-      <pc:sldChg chg="modSp del mod">
-        <pc:chgData name="Peter Bernhardt" userId="f2333933-0b12-4d6e-972f-f87625423892" providerId="ADAL" clId="{54BAB7D7-C378-4C4A-B0F8-9DF09AB8FC9C}" dt="2026-03-18T17:27:59.585" v="473" actId="47"/>
-        <pc:sldMkLst>
-          <pc:docMk/>
-          <pc:sldMk cId="0" sldId="297"/>
-        </pc:sldMkLst>
-        <pc:spChg chg="mod">
-          <ac:chgData name="Peter Bernhardt" userId="f2333933-0b12-4d6e-972f-f87625423892" providerId="ADAL" clId="{54BAB7D7-C378-4C4A-B0F8-9DF09AB8FC9C}" dt="2026-03-18T16:39:28.101" v="79" actId="790"/>
-          <ac:spMkLst>
-            <pc:docMk/>
-            <pc:sldMk cId="0" sldId="297"/>
-            <ac:spMk id="2" creationId="{00000000-0000-0000-0000-000000000000}"/>
-          </ac:spMkLst>
-        </pc:spChg>
-        <pc:spChg chg="mod">
-          <ac:chgData name="Peter Bernhardt" userId="f2333933-0b12-4d6e-972f-f87625423892" providerId="ADAL" clId="{54BAB7D7-C378-4C4A-B0F8-9DF09AB8FC9C}" dt="2026-03-18T16:39:28.979" v="136" actId="27636"/>
-          <ac:spMkLst>
-            <pc:docMk/>
-            <pc:sldMk cId="0" sldId="297"/>
-            <ac:spMk id="3" creationId="{00000000-0000-0000-0000-000000000000}"/>
-          </ac:spMkLst>
-        </pc:spChg>
-      </pc:sldChg>
-      <pc:sldChg chg="modSp del mod modClrScheme chgLayout">
-        <pc:chgData name="Peter Bernhardt" userId="f2333933-0b12-4d6e-972f-f87625423892" providerId="ADAL" clId="{54BAB7D7-C378-4C4A-B0F8-9DF09AB8FC9C}" dt="2026-03-18T17:27:59.585" v="473" actId="47"/>
-        <pc:sldMkLst>
-          <pc:docMk/>
-          <pc:sldMk cId="0" sldId="298"/>
-        </pc:sldMkLst>
-        <pc:spChg chg="mod ord">
-          <ac:chgData name="Peter Bernhardt" userId="f2333933-0b12-4d6e-972f-f87625423892" providerId="ADAL" clId="{54BAB7D7-C378-4C4A-B0F8-9DF09AB8FC9C}" dt="2026-03-18T17:02:45.579" v="309" actId="27636"/>
-          <ac:spMkLst>
-            <pc:docMk/>
-            <pc:sldMk cId="0" sldId="298"/>
-            <ac:spMk id="2" creationId="{00000000-0000-0000-0000-000000000000}"/>
-          </ac:spMkLst>
-        </pc:spChg>
-      </pc:sldChg>
-      <pc:sldChg chg="modSp del mod">
-        <pc:chgData name="Peter Bernhardt" userId="f2333933-0b12-4d6e-972f-f87625423892" providerId="ADAL" clId="{54BAB7D7-C378-4C4A-B0F8-9DF09AB8FC9C}" dt="2026-03-18T17:04:17.363" v="331" actId="47"/>
-        <pc:sldMkLst>
-          <pc:docMk/>
-          <pc:sldMk cId="0" sldId="299"/>
-        </pc:sldMkLst>
-        <pc:spChg chg="mod">
-          <ac:chgData name="Peter Bernhardt" userId="f2333933-0b12-4d6e-972f-f87625423892" providerId="ADAL" clId="{54BAB7D7-C378-4C4A-B0F8-9DF09AB8FC9C}" dt="2026-03-18T16:39:28.101" v="79" actId="790"/>
-          <ac:spMkLst>
-            <pc:docMk/>
-            <pc:sldMk cId="0" sldId="299"/>
-            <ac:spMk id="3" creationId="{00000000-0000-0000-0000-000000000000}"/>
-          </ac:spMkLst>
-        </pc:spChg>
-      </pc:sldChg>
-      <pc:sldChg chg="modSp del mod">
-        <pc:chgData name="Peter Bernhardt" userId="f2333933-0b12-4d6e-972f-f87625423892" providerId="ADAL" clId="{54BAB7D7-C378-4C4A-B0F8-9DF09AB8FC9C}" dt="2026-03-18T17:27:59.585" v="473" actId="47"/>
-        <pc:sldMkLst>
-          <pc:docMk/>
-          <pc:sldMk cId="0" sldId="300"/>
-        </pc:sldMkLst>
-        <pc:spChg chg="mod">
-          <ac:chgData name="Peter Bernhardt" userId="f2333933-0b12-4d6e-972f-f87625423892" providerId="ADAL" clId="{54BAB7D7-C378-4C4A-B0F8-9DF09AB8FC9C}" dt="2026-03-18T16:39:28.101" v="79" actId="790"/>
-          <ac:spMkLst>
-            <pc:docMk/>
-            <pc:sldMk cId="0" sldId="300"/>
-            <ac:spMk id="2" creationId="{00000000-0000-0000-0000-000000000000}"/>
-          </ac:spMkLst>
-        </pc:spChg>
-        <pc:spChg chg="mod">
-          <ac:chgData name="Peter Bernhardt" userId="f2333933-0b12-4d6e-972f-f87625423892" providerId="ADAL" clId="{54BAB7D7-C378-4C4A-B0F8-9DF09AB8FC9C}" dt="2026-03-18T16:39:28.994" v="138" actId="27636"/>
-          <ac:spMkLst>
-            <pc:docMk/>
-            <pc:sldMk cId="0" sldId="300"/>
-            <ac:spMk id="3" creationId="{00000000-0000-0000-0000-000000000000}"/>
-          </ac:spMkLst>
-        </pc:spChg>
-      </pc:sldChg>
-      <pc:sldChg chg="modSp del mod">
-        <pc:chgData name="Peter Bernhardt" userId="f2333933-0b12-4d6e-972f-f87625423892" providerId="ADAL" clId="{54BAB7D7-C378-4C4A-B0F8-9DF09AB8FC9C}" dt="2026-03-18T17:27:59.585" v="473" actId="47"/>
-        <pc:sldMkLst>
-          <pc:docMk/>
-          <pc:sldMk cId="0" sldId="301"/>
-        </pc:sldMkLst>
-        <pc:spChg chg="mod">
-          <ac:chgData name="Peter Bernhardt" userId="f2333933-0b12-4d6e-972f-f87625423892" providerId="ADAL" clId="{54BAB7D7-C378-4C4A-B0F8-9DF09AB8FC9C}" dt="2026-03-18T16:41:22.087" v="209" actId="14100"/>
-          <ac:spMkLst>
-            <pc:docMk/>
-            <pc:sldMk cId="0" sldId="301"/>
-            <ac:spMk id="2" creationId="{00000000-0000-0000-0000-000000000000}"/>
-          </ac:spMkLst>
-        </pc:spChg>
-        <pc:spChg chg="mod">
-          <ac:chgData name="Peter Bernhardt" userId="f2333933-0b12-4d6e-972f-f87625423892" providerId="ADAL" clId="{54BAB7D7-C378-4C4A-B0F8-9DF09AB8FC9C}" dt="2026-03-18T16:39:29.008" v="140" actId="27636"/>
-          <ac:spMkLst>
-            <pc:docMk/>
-            <pc:sldMk cId="0" sldId="301"/>
-            <ac:spMk id="3" creationId="{00000000-0000-0000-0000-000000000000}"/>
-          </ac:spMkLst>
-        </pc:spChg>
-      </pc:sldChg>
-      <pc:sldChg chg="modSp del mod">
-        <pc:chgData name="Peter Bernhardt" userId="f2333933-0b12-4d6e-972f-f87625423892" providerId="ADAL" clId="{54BAB7D7-C378-4C4A-B0F8-9DF09AB8FC9C}" dt="2026-03-18T17:27:59.585" v="473" actId="47"/>
-        <pc:sldMkLst>
-          <pc:docMk/>
-          <pc:sldMk cId="0" sldId="302"/>
-        </pc:sldMkLst>
-        <pc:spChg chg="mod">
-          <ac:chgData name="Peter Bernhardt" userId="f2333933-0b12-4d6e-972f-f87625423892" providerId="ADAL" clId="{54BAB7D7-C378-4C4A-B0F8-9DF09AB8FC9C}" dt="2026-03-18T16:39:29.012" v="141" actId="27636"/>
-          <ac:spMkLst>
-            <pc:docMk/>
-            <pc:sldMk cId="0" sldId="302"/>
-            <ac:spMk id="2" creationId="{00000000-0000-0000-0000-000000000000}"/>
-          </ac:spMkLst>
-        </pc:spChg>
-        <pc:spChg chg="mod">
-          <ac:chgData name="Peter Bernhardt" userId="f2333933-0b12-4d6e-972f-f87625423892" providerId="ADAL" clId="{54BAB7D7-C378-4C4A-B0F8-9DF09AB8FC9C}" dt="2026-03-18T16:39:29.014" v="142" actId="27636"/>
-          <ac:spMkLst>
-            <pc:docMk/>
-            <pc:sldMk cId="0" sldId="302"/>
-            <ac:spMk id="3" creationId="{00000000-0000-0000-0000-000000000000}"/>
-          </ac:spMkLst>
-        </pc:spChg>
-      </pc:sldChg>
-      <pc:sldChg chg="addSp delSp modSp del mod">
-        <pc:chgData name="Peter Bernhardt" userId="f2333933-0b12-4d6e-972f-f87625423892" providerId="ADAL" clId="{54BAB7D7-C378-4C4A-B0F8-9DF09AB8FC9C}" dt="2026-03-18T17:27:59.585" v="473" actId="47"/>
-        <pc:sldMkLst>
-          <pc:docMk/>
-          <pc:sldMk cId="0" sldId="303"/>
-        </pc:sldMkLst>
-        <pc:spChg chg="mod">
-          <ac:chgData name="Peter Bernhardt" userId="f2333933-0b12-4d6e-972f-f87625423892" providerId="ADAL" clId="{54BAB7D7-C378-4C4A-B0F8-9DF09AB8FC9C}" dt="2026-03-18T17:11:20.837" v="369" actId="20577"/>
-          <ac:spMkLst>
-            <pc:docMk/>
-            <pc:sldMk cId="0" sldId="303"/>
-            <ac:spMk id="2" creationId="{00000000-0000-0000-0000-000000000000}"/>
-          </ac:spMkLst>
-        </pc:spChg>
-        <pc:spChg chg="mod">
-          <ac:chgData name="Peter Bernhardt" userId="f2333933-0b12-4d6e-972f-f87625423892" providerId="ADAL" clId="{54BAB7D7-C378-4C4A-B0F8-9DF09AB8FC9C}" dt="2026-03-18T17:16:09.887" v="438" actId="27636"/>
-          <ac:spMkLst>
-            <pc:docMk/>
-            <pc:sldMk cId="0" sldId="303"/>
-            <ac:spMk id="3" creationId="{00000000-0000-0000-0000-000000000000}"/>
-          </ac:spMkLst>
-        </pc:spChg>
-      </pc:sldChg>
-      <pc:sldChg chg="addSp modSp del mod chgLayout">
-        <pc:chgData name="Peter Bernhardt" userId="f2333933-0b12-4d6e-972f-f87625423892" providerId="ADAL" clId="{54BAB7D7-C378-4C4A-B0F8-9DF09AB8FC9C}" dt="2026-03-18T17:27:59.585" v="473" actId="47"/>
-        <pc:sldMkLst>
-          <pc:docMk/>
-          <pc:sldMk cId="0" sldId="304"/>
-        </pc:sldMkLst>
-        <pc:spChg chg="mod ord">
-          <ac:chgData name="Peter Bernhardt" userId="f2333933-0b12-4d6e-972f-f87625423892" providerId="ADAL" clId="{54BAB7D7-C378-4C4A-B0F8-9DF09AB8FC9C}" dt="2026-03-18T16:48:06.705" v="306" actId="700"/>
-          <ac:spMkLst>
-            <pc:docMk/>
-            <pc:sldMk cId="0" sldId="304"/>
-            <ac:spMk id="2" creationId="{00000000-0000-0000-0000-000000000000}"/>
-          </ac:spMkLst>
-        </pc:spChg>
-      </pc:sldChg>
-      <pc:sldChg chg="modSp del mod">
-        <pc:chgData name="Peter Bernhardt" userId="f2333933-0b12-4d6e-972f-f87625423892" providerId="ADAL" clId="{54BAB7D7-C378-4C4A-B0F8-9DF09AB8FC9C}" dt="2026-03-18T17:27:59.585" v="473" actId="47"/>
-        <pc:sldMkLst>
-          <pc:docMk/>
-          <pc:sldMk cId="0" sldId="305"/>
-        </pc:sldMkLst>
-        <pc:spChg chg="mod">
-          <ac:chgData name="Peter Bernhardt" userId="f2333933-0b12-4d6e-972f-f87625423892" providerId="ADAL" clId="{54BAB7D7-C378-4C4A-B0F8-9DF09AB8FC9C}" dt="2026-03-18T16:39:28.101" v="79" actId="790"/>
-          <ac:spMkLst>
-            <pc:docMk/>
-            <pc:sldMk cId="0" sldId="305"/>
-            <ac:spMk id="2" creationId="{00000000-0000-0000-0000-000000000000}"/>
-          </ac:spMkLst>
-        </pc:spChg>
-        <pc:spChg chg="mod">
-          <ac:chgData name="Peter Bernhardt" userId="f2333933-0b12-4d6e-972f-f87625423892" providerId="ADAL" clId="{54BAB7D7-C378-4C4A-B0F8-9DF09AB8FC9C}" dt="2026-03-18T16:39:29.041" v="146" actId="27636"/>
-          <ac:spMkLst>
-            <pc:docMk/>
-            <pc:sldMk cId="0" sldId="305"/>
-            <ac:spMk id="3" creationId="{00000000-0000-0000-0000-000000000000}"/>
-          </ac:spMkLst>
-        </pc:spChg>
-      </pc:sldChg>
-      <pc:sldChg chg="modSp del mod">
-        <pc:chgData name="Peter Bernhardt" userId="f2333933-0b12-4d6e-972f-f87625423892" providerId="ADAL" clId="{54BAB7D7-C378-4C4A-B0F8-9DF09AB8FC9C}" dt="2026-03-18T17:27:59.585" v="473" actId="47"/>
-        <pc:sldMkLst>
-          <pc:docMk/>
-          <pc:sldMk cId="0" sldId="306"/>
-        </pc:sldMkLst>
-        <pc:spChg chg="mod">
-          <ac:chgData name="Peter Bernhardt" userId="f2333933-0b12-4d6e-972f-f87625423892" providerId="ADAL" clId="{54BAB7D7-C378-4C4A-B0F8-9DF09AB8FC9C}" dt="2026-03-18T16:39:29.043" v="147" actId="27636"/>
-          <ac:spMkLst>
-            <pc:docMk/>
-            <pc:sldMk cId="0" sldId="306"/>
-            <ac:spMk id="2" creationId="{00000000-0000-0000-0000-000000000000}"/>
-          </ac:spMkLst>
-        </pc:spChg>
-        <pc:spChg chg="mod">
-          <ac:chgData name="Peter Bernhardt" userId="f2333933-0b12-4d6e-972f-f87625423892" providerId="ADAL" clId="{54BAB7D7-C378-4C4A-B0F8-9DF09AB8FC9C}" dt="2026-03-18T16:39:29.055" v="148" actId="27636"/>
-          <ac:spMkLst>
-            <pc:docMk/>
-            <pc:sldMk cId="0" sldId="306"/>
-            <ac:spMk id="3" creationId="{00000000-0000-0000-0000-000000000000}"/>
-          </ac:spMkLst>
-        </pc:spChg>
-      </pc:sldChg>
-      <pc:sldChg chg="modSp del mod">
-        <pc:chgData name="Peter Bernhardt" userId="f2333933-0b12-4d6e-972f-f87625423892" providerId="ADAL" clId="{54BAB7D7-C378-4C4A-B0F8-9DF09AB8FC9C}" dt="2026-03-18T17:27:59.585" v="473" actId="47"/>
-        <pc:sldMkLst>
-          <pc:docMk/>
-          <pc:sldMk cId="0" sldId="307"/>
-        </pc:sldMkLst>
-        <pc:spChg chg="mod">
-          <ac:chgData name="Peter Bernhardt" userId="f2333933-0b12-4d6e-972f-f87625423892" providerId="ADAL" clId="{54BAB7D7-C378-4C4A-B0F8-9DF09AB8FC9C}" dt="2026-03-18T16:39:28.101" v="79" actId="790"/>
-          <ac:spMkLst>
-            <pc:docMk/>
-            <pc:sldMk cId="0" sldId="307"/>
-            <ac:spMk id="2" creationId="{00000000-0000-0000-0000-000000000000}"/>
-          </ac:spMkLst>
-        </pc:spChg>
-      </pc:sldChg>
-      <pc:sldChg chg="modSp del mod">
-        <pc:chgData name="Peter Bernhardt" userId="f2333933-0b12-4d6e-972f-f87625423892" providerId="ADAL" clId="{54BAB7D7-C378-4C4A-B0F8-9DF09AB8FC9C}" dt="2026-03-18T17:27:59.585" v="473" actId="47"/>
-        <pc:sldMkLst>
-          <pc:docMk/>
-          <pc:sldMk cId="0" sldId="308"/>
-        </pc:sldMkLst>
-        <pc:spChg chg="mod">
-          <ac:chgData name="Peter Bernhardt" userId="f2333933-0b12-4d6e-972f-f87625423892" providerId="ADAL" clId="{54BAB7D7-C378-4C4A-B0F8-9DF09AB8FC9C}" dt="2026-03-18T16:39:28.101" v="79" actId="790"/>
-          <ac:spMkLst>
-            <pc:docMk/>
-            <pc:sldMk cId="0" sldId="308"/>
-            <ac:spMk id="2" creationId="{00000000-0000-0000-0000-000000000000}"/>
-          </ac:spMkLst>
-        </pc:spChg>
-        <pc:spChg chg="mod">
-          <ac:chgData name="Peter Bernhardt" userId="f2333933-0b12-4d6e-972f-f87625423892" providerId="ADAL" clId="{54BAB7D7-C378-4C4A-B0F8-9DF09AB8FC9C}" dt="2026-03-18T16:39:29.174" v="150" actId="27636"/>
-          <ac:spMkLst>
-            <pc:docMk/>
-            <pc:sldMk cId="0" sldId="308"/>
-            <ac:spMk id="3" creationId="{00000000-0000-0000-0000-000000000000}"/>
-          </ac:spMkLst>
-        </pc:spChg>
-      </pc:sldChg>
-      <pc:sldChg chg="addSp modSp del mod chgLayout">
-        <pc:chgData name="Peter Bernhardt" userId="f2333933-0b12-4d6e-972f-f87625423892" providerId="ADAL" clId="{54BAB7D7-C378-4C4A-B0F8-9DF09AB8FC9C}" dt="2026-03-18T17:27:59.585" v="473" actId="47"/>
-        <pc:sldMkLst>
-          <pc:docMk/>
-          <pc:sldMk cId="0" sldId="309"/>
-        </pc:sldMkLst>
-        <pc:spChg chg="mod ord">
-          <ac:chgData name="Peter Bernhardt" userId="f2333933-0b12-4d6e-972f-f87625423892" providerId="ADAL" clId="{54BAB7D7-C378-4C4A-B0F8-9DF09AB8FC9C}" dt="2026-03-18T16:48:01.054" v="305" actId="700"/>
-          <ac:spMkLst>
-            <pc:docMk/>
-            <pc:sldMk cId="0" sldId="309"/>
-            <ac:spMk id="2" creationId="{00000000-0000-0000-0000-000000000000}"/>
-          </ac:spMkLst>
-        </pc:spChg>
-      </pc:sldChg>
-      <pc:sldMasterChg chg="modSp mod modSldLayout">
-        <pc:chgData name="Peter Bernhardt" userId="f2333933-0b12-4d6e-972f-f87625423892" providerId="ADAL" clId="{54BAB7D7-C378-4C4A-B0F8-9DF09AB8FC9C}" dt="2026-03-18T17:16:09.783" v="436" actId="403"/>
-        <pc:sldMasterMkLst>
-          <pc:docMk/>
-          <pc:sldMasterMk cId="3715007525" sldId="2147483750"/>
-        </pc:sldMasterMkLst>
-        <pc:spChg chg="mod">
-          <ac:chgData name="Peter Bernhardt" userId="f2333933-0b12-4d6e-972f-f87625423892" providerId="ADAL" clId="{54BAB7D7-C378-4C4A-B0F8-9DF09AB8FC9C}" dt="2026-03-18T16:41:48.305" v="241" actId="20577"/>
-          <ac:spMkLst>
-            <pc:docMk/>
-            <pc:sldMasterMk cId="3715007525" sldId="2147483750"/>
-            <ac:spMk id="2" creationId="{00000000-0000-0000-0000-000000000000}"/>
-          </ac:spMkLst>
-        </pc:spChg>
-        <pc:spChg chg="mod">
-          <ac:chgData name="Peter Bernhardt" userId="f2333933-0b12-4d6e-972f-f87625423892" providerId="ADAL" clId="{54BAB7D7-C378-4C4A-B0F8-9DF09AB8FC9C}" dt="2026-03-18T16:42:03.580" v="272" actId="14100"/>
-          <ac:spMkLst>
-            <pc:docMk/>
-            <pc:sldMasterMk cId="3715007525" sldId="2147483750"/>
-            <ac:spMk id="3" creationId="{00000000-0000-0000-0000-000000000000}"/>
-          </ac:spMkLst>
-        </pc:spChg>
-        <pc:cxnChg chg="mod">
-          <ac:chgData name="Peter Bernhardt" userId="f2333933-0b12-4d6e-972f-f87625423892" providerId="ADAL" clId="{54BAB7D7-C378-4C4A-B0F8-9DF09AB8FC9C}" dt="2026-03-18T16:41:55.705" v="265" actId="1035"/>
-          <ac:cxnSpMkLst>
-            <pc:docMk/>
-            <pc:sldMasterMk cId="3715007525" sldId="2147483750"/>
-            <ac:cxnSpMk id="10" creationId="{00000000-0000-0000-0000-000000000000}"/>
-          </ac:cxnSpMkLst>
-        </pc:cxnChg>
-        <pc:sldLayoutChg chg="modSp mod">
-          <pc:chgData name="Peter Bernhardt" userId="f2333933-0b12-4d6e-972f-f87625423892" providerId="ADAL" clId="{54BAB7D7-C378-4C4A-B0F8-9DF09AB8FC9C}" dt="2026-03-18T16:42:12.756" v="279" actId="404"/>
-          <pc:sldLayoutMkLst>
-            <pc:docMk/>
-            <pc:sldMasterMk cId="3715007525" sldId="2147483750"/>
-            <pc:sldLayoutMk cId="1222138658" sldId="2147483751"/>
-          </pc:sldLayoutMkLst>
-          <pc:spChg chg="mod">
-            <ac:chgData name="Peter Bernhardt" userId="f2333933-0b12-4d6e-972f-f87625423892" providerId="ADAL" clId="{54BAB7D7-C378-4C4A-B0F8-9DF09AB8FC9C}" dt="2026-03-18T16:42:12.756" v="279" actId="404"/>
-            <ac:spMkLst>
-              <pc:docMk/>
-              <pc:sldMasterMk cId="3715007525" sldId="2147483750"/>
-              <pc:sldLayoutMk cId="1222138658" sldId="2147483751"/>
-              <ac:spMk id="2" creationId="{00000000-0000-0000-0000-000000000000}"/>
-            </ac:spMkLst>
-          </pc:spChg>
-        </pc:sldLayoutChg>
-        <pc:sldLayoutChg chg="modSp mod">
-          <pc:chgData name="Peter Bernhardt" userId="f2333933-0b12-4d6e-972f-f87625423892" providerId="ADAL" clId="{54BAB7D7-C378-4C4A-B0F8-9DF09AB8FC9C}" dt="2026-03-18T17:16:09.783" v="436" actId="403"/>
-          <pc:sldLayoutMkLst>
-            <pc:docMk/>
-            <pc:sldMasterMk cId="3715007525" sldId="2147483750"/>
-            <pc:sldLayoutMk cId="2723228330" sldId="2147483752"/>
-          </pc:sldLayoutMkLst>
-          <pc:spChg chg="mod">
-            <ac:chgData name="Peter Bernhardt" userId="f2333933-0b12-4d6e-972f-f87625423892" providerId="ADAL" clId="{54BAB7D7-C378-4C4A-B0F8-9DF09AB8FC9C}" dt="2026-03-18T16:41:24.217" v="210" actId="255"/>
-            <ac:spMkLst>
-              <pc:docMk/>
-              <pc:sldMasterMk cId="3715007525" sldId="2147483750"/>
-              <pc:sldLayoutMk cId="2723228330" sldId="2147483752"/>
-              <ac:spMk id="2" creationId="{00000000-0000-0000-0000-000000000000}"/>
-            </ac:spMkLst>
-          </pc:spChg>
-          <pc:spChg chg="mod">
-            <ac:chgData name="Peter Bernhardt" userId="f2333933-0b12-4d6e-972f-f87625423892" providerId="ADAL" clId="{54BAB7D7-C378-4C4A-B0F8-9DF09AB8FC9C}" dt="2026-03-18T17:16:09.783" v="436" actId="403"/>
-            <ac:spMkLst>
-              <pc:docMk/>
-              <pc:sldMasterMk cId="3715007525" sldId="2147483750"/>
-              <pc:sldLayoutMk cId="2723228330" sldId="2147483752"/>
-              <ac:spMk id="3" creationId="{00000000-0000-0000-0000-000000000000}"/>
-            </ac:spMkLst>
-          </pc:spChg>
-        </pc:sldLayoutChg>
-        <pc:sldLayoutChg chg="modSp mod">
-          <pc:chgData name="Peter Bernhardt" userId="f2333933-0b12-4d6e-972f-f87625423892" providerId="ADAL" clId="{54BAB7D7-C378-4C4A-B0F8-9DF09AB8FC9C}" dt="2026-03-18T16:46:14.357" v="293" actId="113"/>
-          <pc:sldLayoutMkLst>
-            <pc:docMk/>
-            <pc:sldMasterMk cId="3715007525" sldId="2147483750"/>
-            <pc:sldLayoutMk cId="1145065635" sldId="2147483753"/>
-          </pc:sldLayoutMkLst>
-          <pc:spChg chg="mod">
-            <ac:chgData name="Peter Bernhardt" userId="f2333933-0b12-4d6e-972f-f87625423892" providerId="ADAL" clId="{54BAB7D7-C378-4C4A-B0F8-9DF09AB8FC9C}" dt="2026-03-18T16:46:14.357" v="293" actId="113"/>
-            <ac:spMkLst>
-              <pc:docMk/>
-              <pc:sldMasterMk cId="3715007525" sldId="2147483750"/>
-              <pc:sldLayoutMk cId="1145065635" sldId="2147483753"/>
-              <ac:spMk id="2" creationId="{00000000-0000-0000-0000-000000000000}"/>
-            </ac:spMkLst>
-          </pc:spChg>
-        </pc:sldLayoutChg>
-      </pc:sldMasterChg>
     </pc:docChg>
   </pc:docChgLst>
   <pc:docChgLst>
@@ -2247,6 +1074,154 @@
 </pc:chgInfo>
 </file>
 
+<file path=ppt/handoutMasters/handoutMaster1.xml><?xml version="1.0" encoding="utf-8"?>
+<p:handoutMaster xmlns:a="http://schemas.openxmlformats.org/drawingml/2006/main" xmlns:r="http://schemas.openxmlformats.org/officeDocument/2006/relationships" xmlns:p="http://schemas.openxmlformats.org/presentationml/2006/main">
+  <p:cSld>
+    <p:bg>
+      <p:bgRef idx="1001">
+        <a:schemeClr val="bg1"/>
+      </p:bgRef>
+    </p:bg>
+    <p:spTree>
+      <p:nvGrpSpPr>
+        <p:cNvPr id="1" name=""/>
+        <p:cNvGrpSpPr/>
+        <p:nvPr/>
+      </p:nvGrpSpPr>
+      <p:grpSpPr>
+        <a:xfrm>
+          <a:off x="0" y="0"/>
+          <a:ext cx="0" cy="0"/>
+          <a:chOff x="0" y="0"/>
+          <a:chExt cx="0" cy="0"/>
+        </a:xfrm>
+      </p:grpSpPr>
+      <p:sp>
+        <p:nvSpPr>
+          <p:cNvPr id="2" name="Kopfzeilenplatzhalter 1">
+            <a:extLst>
+              <a:ext uri="{FF2B5EF4-FFF2-40B4-BE49-F238E27FC236}">
+                <a16:creationId xmlns:a16="http://schemas.microsoft.com/office/drawing/2014/main" id="{878C30F9-3518-6249-BC48-D81258888C27}"/>
+              </a:ext>
+            </a:extLst>
+          </p:cNvPr>
+          <p:cNvSpPr>
+            <a:spLocks noGrp="1"/>
+          </p:cNvSpPr>
+          <p:nvPr>
+            <p:ph type="hdr" sz="quarter"/>
+          </p:nvPr>
+        </p:nvSpPr>
+        <p:spPr>
+          <a:xfrm>
+            <a:off x="0" y="0"/>
+            <a:ext cx="2971800" cy="458788"/>
+          </a:xfrm>
+          <a:prstGeom prst="rect">
+            <a:avLst/>
+          </a:prstGeom>
+        </p:spPr>
+        <p:txBody>
+          <a:bodyPr vert="horz" lIns="91440" tIns="45720" rIns="91440" bIns="45720" rtlCol="0"/>
+          <a:lstStyle>
+            <a:lvl1pPr algn="l">
+              <a:defRPr sz="1200"/>
+            </a:lvl1pPr>
+          </a:lstStyle>
+          <a:p>
+            <a:endParaRPr lang="de-DE"/>
+          </a:p>
+        </p:txBody>
+      </p:sp>
+      <p:sp>
+        <p:nvSpPr>
+          <p:cNvPr id="4" name="Fußzeilenplatzhalter 3">
+            <a:extLst>
+              <a:ext uri="{FF2B5EF4-FFF2-40B4-BE49-F238E27FC236}">
+                <a16:creationId xmlns:a16="http://schemas.microsoft.com/office/drawing/2014/main" id="{F711E78F-CED5-2B79-C835-25BF729104BC}"/>
+              </a:ext>
+            </a:extLst>
+          </p:cNvPr>
+          <p:cNvSpPr>
+            <a:spLocks noGrp="1"/>
+          </p:cNvSpPr>
+          <p:nvPr>
+            <p:ph type="ftr" sz="quarter" idx="2"/>
+          </p:nvPr>
+        </p:nvSpPr>
+        <p:spPr>
+          <a:xfrm>
+            <a:off x="0" y="8685213"/>
+            <a:ext cx="2971800" cy="458787"/>
+          </a:xfrm>
+          <a:prstGeom prst="rect">
+            <a:avLst/>
+          </a:prstGeom>
+        </p:spPr>
+        <p:txBody>
+          <a:bodyPr vert="horz" lIns="91440" tIns="45720" rIns="91440" bIns="45720" rtlCol="0" anchor="b"/>
+          <a:lstStyle>
+            <a:lvl1pPr algn="l">
+              <a:defRPr sz="1200"/>
+            </a:lvl1pPr>
+          </a:lstStyle>
+          <a:p>
+            <a:endParaRPr lang="de-DE"/>
+          </a:p>
+        </p:txBody>
+      </p:sp>
+      <p:sp>
+        <p:nvSpPr>
+          <p:cNvPr id="5" name="Foliennummernplatzhalter 4">
+            <a:extLst>
+              <a:ext uri="{FF2B5EF4-FFF2-40B4-BE49-F238E27FC236}">
+                <a16:creationId xmlns:a16="http://schemas.microsoft.com/office/drawing/2014/main" id="{C992C264-5205-BC53-AC25-CA797D4E3732}"/>
+              </a:ext>
+            </a:extLst>
+          </p:cNvPr>
+          <p:cNvSpPr>
+            <a:spLocks noGrp="1"/>
+          </p:cNvSpPr>
+          <p:nvPr>
+            <p:ph type="sldNum" sz="quarter" idx="3"/>
+          </p:nvPr>
+        </p:nvSpPr>
+        <p:spPr>
+          <a:xfrm>
+            <a:off x="3884613" y="8685213"/>
+            <a:ext cx="2971800" cy="458787"/>
+          </a:xfrm>
+          <a:prstGeom prst="rect">
+            <a:avLst/>
+          </a:prstGeom>
+        </p:spPr>
+        <p:txBody>
+          <a:bodyPr vert="horz" lIns="91440" tIns="45720" rIns="91440" bIns="45720" rtlCol="0" anchor="b"/>
+          <a:lstStyle>
+            <a:lvl1pPr algn="r">
+              <a:defRPr sz="1200"/>
+            </a:lvl1pPr>
+          </a:lstStyle>
+          <a:p>
+            <a:fld id="{12D9B193-74BD-4E64-A982-2408E8351895}" type="slidenum">
+              <a:rPr lang="de-DE" smtClean="0"/>
+              <a:t>‹Nr.›</a:t>
+            </a:fld>
+            <a:endParaRPr lang="de-DE"/>
+          </a:p>
+        </p:txBody>
+      </p:sp>
+    </p:spTree>
+    <p:extLst>
+      <p:ext uri="{BB962C8B-B14F-4D97-AF65-F5344CB8AC3E}">
+        <p14:creationId xmlns:p14="http://schemas.microsoft.com/office/powerpoint/2010/main" val="2829280907"/>
+      </p:ext>
+    </p:extLst>
+  </p:cSld>
+  <p:clrMap bg1="lt1" tx1="dk1" bg2="lt2" tx2="dk2" accent1="accent1" accent2="accent2" accent3="accent3" accent4="accent4" accent5="accent5" accent6="accent6" hlink="hlink" folHlink="folHlink"/>
+</p:handoutMaster>
+</file>
+
 <file path=ppt/notesMasters/notesMaster1.xml><?xml version="1.0" encoding="utf-8"?>
 <p:notesMaster xmlns:a="http://schemas.openxmlformats.org/drawingml/2006/main" xmlns:r="http://schemas.openxmlformats.org/officeDocument/2006/relationships" xmlns:p="http://schemas.openxmlformats.org/presentationml/2006/main">
   <p:cSld>
@@ -2801,7 +1776,7 @@
           <a:p>
             <a:fld id="{241EB5C9-1307-BA42-ABA2-0BC069CD8E7F}" type="datetimeFigureOut">
               <a:rPr lang="en-US" smtClean="0"/>
-              <a:t>4/2/2026</a:t>
+              <a:t>4/21/2026</a:t>
             </a:fld>
             <a:endParaRPr lang="en-US"/>
           </a:p>
@@ -3009,7 +1984,7 @@
           <a:p>
             <a:fld id="{241EB5C9-1307-BA42-ABA2-0BC069CD8E7F}" type="datetimeFigureOut">
               <a:rPr lang="en-US" smtClean="0"/>
-              <a:t>4/2/2026</a:t>
+              <a:t>4/21/2026</a:t>
             </a:fld>
             <a:endParaRPr lang="en-US"/>
           </a:p>
@@ -3265,7 +2240,7 @@
           <a:p>
             <a:fld id="{241EB5C9-1307-BA42-ABA2-0BC069CD8E7F}" type="datetimeFigureOut">
               <a:rPr lang="en-US" smtClean="0"/>
-              <a:t>4/2/2026</a:t>
+              <a:t>4/21/2026</a:t>
             </a:fld>
             <a:endParaRPr lang="en-US"/>
           </a:p>
@@ -3453,7 +2428,7 @@
           <a:p>
             <a:fld id="{241EB5C9-1307-BA42-ABA2-0BC069CD8E7F}" type="datetimeFigureOut">
               <a:rPr lang="en-US" smtClean="0"/>
-              <a:t>4/2/2026</a:t>
+              <a:t>4/21/2026</a:t>
             </a:fld>
             <a:endParaRPr lang="en-US"/>
           </a:p>
@@ -3810,7 +2785,7 @@
           <a:p>
             <a:fld id="{241EB5C9-1307-BA42-ABA2-0BC069CD8E7F}" type="datetimeFigureOut">
               <a:rPr lang="en-US" smtClean="0"/>
-              <a:t>4/2/2026</a:t>
+              <a:t>4/21/2026</a:t>
             </a:fld>
             <a:endParaRPr lang="en-US"/>
           </a:p>
@@ -4085,7 +3060,7 @@
           <a:p>
             <a:fld id="{241EB5C9-1307-BA42-ABA2-0BC069CD8E7F}" type="datetimeFigureOut">
               <a:rPr lang="en-US" smtClean="0"/>
-              <a:t>4/2/2026</a:t>
+              <a:t>4/21/2026</a:t>
             </a:fld>
             <a:endParaRPr lang="en-US"/>
           </a:p>
@@ -4464,7 +3439,7 @@
           <a:p>
             <a:fld id="{241EB5C9-1307-BA42-ABA2-0BC069CD8E7F}" type="datetimeFigureOut">
               <a:rPr lang="en-US" smtClean="0"/>
-              <a:t>4/2/2026</a:t>
+              <a:t>4/21/2026</a:t>
             </a:fld>
             <a:endParaRPr lang="en-US"/>
           </a:p>
@@ -4582,7 +3557,7 @@
           <a:p>
             <a:fld id="{241EB5C9-1307-BA42-ABA2-0BC069CD8E7F}" type="datetimeFigureOut">
               <a:rPr lang="en-US" smtClean="0"/>
-              <a:t>4/2/2026</a:t>
+              <a:t>4/21/2026</a:t>
             </a:fld>
             <a:endParaRPr lang="en-US"/>
           </a:p>
@@ -4753,7 +3728,7 @@
           <a:p>
             <a:fld id="{241EB5C9-1307-BA42-ABA2-0BC069CD8E7F}" type="datetimeFigureOut">
               <a:rPr lang="en-US" smtClean="0"/>
-              <a:t>4/2/2026</a:t>
+              <a:t>4/21/2026</a:t>
             </a:fld>
             <a:endParaRPr lang="en-US"/>
           </a:p>
@@ -5121,7 +4096,7 @@
           <a:p>
             <a:fld id="{241EB5C9-1307-BA42-ABA2-0BC069CD8E7F}" type="datetimeFigureOut">
               <a:rPr lang="en-US" smtClean="0"/>
-              <a:t>4/2/2026</a:t>
+              <a:t>4/21/2026</a:t>
             </a:fld>
             <a:endParaRPr lang="en-US"/>
           </a:p>
@@ -5498,7 +4473,7 @@
           <a:p>
             <a:fld id="{241EB5C9-1307-BA42-ABA2-0BC069CD8E7F}" type="datetimeFigureOut">
               <a:rPr lang="en-US" smtClean="0"/>
-              <a:t>4/2/2026</a:t>
+              <a:t>4/21/2026</a:t>
             </a:fld>
             <a:endParaRPr lang="en-US"/>
           </a:p>
@@ -5799,7 +4774,7 @@
           <a:p>
             <a:fld id="{241EB5C9-1307-BA42-ABA2-0BC069CD8E7F}" type="datetimeFigureOut">
               <a:rPr lang="en-US" smtClean="0"/>
-              <a:t>4/2/2026</a:t>
+              <a:t>4/21/2026</a:t>
             </a:fld>
             <a:endParaRPr lang="en-US"/>
           </a:p>
@@ -28042,4 +27017,319 @@
     </a:ext>
   </a:extLst>
 </a:theme>
+</file>
+
+<file path=ppt/theme/theme3.xml><?xml version="1.0" encoding="utf-8"?>
+<a:theme xmlns:a="http://schemas.openxmlformats.org/drawingml/2006/main" name="Office">
+  <a:themeElements>
+    <a:clrScheme name="Office">
+      <a:dk1>
+        <a:sysClr val="windowText" lastClr="000000"/>
+      </a:dk1>
+      <a:lt1>
+        <a:sysClr val="window" lastClr="FFFFFF"/>
+      </a:lt1>
+      <a:dk2>
+        <a:srgbClr val="0E2841"/>
+      </a:dk2>
+      <a:lt2>
+        <a:srgbClr val="E8E8E8"/>
+      </a:lt2>
+      <a:accent1>
+        <a:srgbClr val="156082"/>
+      </a:accent1>
+      <a:accent2>
+        <a:srgbClr val="E97132"/>
+      </a:accent2>
+      <a:accent3>
+        <a:srgbClr val="196B24"/>
+      </a:accent3>
+      <a:accent4>
+        <a:srgbClr val="0F9ED5"/>
+      </a:accent4>
+      <a:accent5>
+        <a:srgbClr val="A02B93"/>
+      </a:accent5>
+      <a:accent6>
+        <a:srgbClr val="4EA72E"/>
+      </a:accent6>
+      <a:hlink>
+        <a:srgbClr val="467886"/>
+      </a:hlink>
+      <a:folHlink>
+        <a:srgbClr val="96607D"/>
+      </a:folHlink>
+    </a:clrScheme>
+    <a:fontScheme name="Office">
+      <a:majorFont>
+        <a:latin typeface="Aptos Display" panose="02110004020202020204"/>
+        <a:ea typeface=""/>
+        <a:cs typeface=""/>
+        <a:font script="Jpan" typeface="游ゴシック Light"/>
+        <a:font script="Hang" typeface="맑은 고딕"/>
+        <a:font script="Hans" typeface="等线 Light"/>
+        <a:font script="Hant" typeface="新細明體"/>
+        <a:font script="Arab" typeface="Times New Roman"/>
+        <a:font script="Hebr" typeface="Times New Roman"/>
+        <a:font script="Thai" typeface="Angsana New"/>
+        <a:font script="Ethi" typeface="Nyala"/>
+        <a:font script="Beng" typeface="Vrinda"/>
+        <a:font script="Gujr" typeface="Shruti"/>
+        <a:font script="Khmr" typeface="MoolBoran"/>
+        <a:font script="Knda" typeface="Tunga"/>
+        <a:font script="Guru" typeface="Raavi"/>
+        <a:font script="Cans" typeface="Euphemia"/>
+        <a:font script="Cher" typeface="Plantagenet Cherokee"/>
+        <a:font script="Yiii" typeface="Microsoft Yi Baiti"/>
+        <a:font script="Tibt" typeface="Microsoft Himalaya"/>
+        <a:font script="Thaa" typeface="MV Boli"/>
+        <a:font script="Deva" typeface="Mangal"/>
+        <a:font script="Telu" typeface="Gautami"/>
+        <a:font script="Taml" typeface="Latha"/>
+        <a:font script="Syrc" typeface="Estrangelo Edessa"/>
+        <a:font script="Orya" typeface="Kalinga"/>
+        <a:font script="Mlym" typeface="Kartika"/>
+        <a:font script="Laoo" typeface="DokChampa"/>
+        <a:font script="Sinh" typeface="Iskoola Pota"/>
+        <a:font script="Mong" typeface="Mongolian Baiti"/>
+        <a:font script="Viet" typeface="Times New Roman"/>
+        <a:font script="Uigh" typeface="Microsoft Uighur"/>
+        <a:font script="Geor" typeface="Sylfaen"/>
+        <a:font script="Armn" typeface="Arial"/>
+        <a:font script="Bugi" typeface="Leelawadee UI"/>
+        <a:font script="Bopo" typeface="Microsoft JhengHei"/>
+        <a:font script="Java" typeface="Javanese Text"/>
+        <a:font script="Lisu" typeface="Segoe UI"/>
+        <a:font script="Mymr" typeface="Myanmar Text"/>
+        <a:font script="Nkoo" typeface="Ebrima"/>
+        <a:font script="Olck" typeface="Nirmala UI"/>
+        <a:font script="Osma" typeface="Ebrima"/>
+        <a:font script="Phag" typeface="Phagspa"/>
+        <a:font script="Syrn" typeface="Estrangelo Edessa"/>
+        <a:font script="Syrj" typeface="Estrangelo Edessa"/>
+        <a:font script="Syre" typeface="Estrangelo Edessa"/>
+        <a:font script="Sora" typeface="Nirmala UI"/>
+        <a:font script="Tale" typeface="Microsoft Tai Le"/>
+        <a:font script="Talu" typeface="Microsoft New Tai Lue"/>
+        <a:font script="Tfng" typeface="Ebrima"/>
+      </a:majorFont>
+      <a:minorFont>
+        <a:latin typeface="Aptos" panose="02110004020202020204"/>
+        <a:ea typeface=""/>
+        <a:cs typeface=""/>
+        <a:font script="Jpan" typeface="游ゴシック"/>
+        <a:font script="Hang" typeface="맑은 고딕"/>
+        <a:font script="Hans" typeface="等线"/>
+        <a:font script="Hant" typeface="新細明體"/>
+        <a:font script="Arab" typeface="Arial"/>
+        <a:font script="Hebr" typeface="Arial"/>
+        <a:font script="Thai" typeface="Cordia New"/>
+        <a:font script="Ethi" typeface="Nyala"/>
+        <a:font script="Beng" typeface="Vrinda"/>
+        <a:font script="Gujr" typeface="Shruti"/>
+        <a:font script="Khmr" typeface="DaunPenh"/>
+        <a:font script="Knda" typeface="Tunga"/>
+        <a:font script="Guru" typeface="Raavi"/>
+        <a:font script="Cans" typeface="Euphemia"/>
+        <a:font script="Cher" typeface="Plantagenet Cherokee"/>
+        <a:font script="Yiii" typeface="Microsoft Yi Baiti"/>
+        <a:font script="Tibt" typeface="Microsoft Himalaya"/>
+        <a:font script="Thaa" typeface="MV Boli"/>
+        <a:font script="Deva" typeface="Mangal"/>
+        <a:font script="Telu" typeface="Gautami"/>
+        <a:font script="Taml" typeface="Latha"/>
+        <a:font script="Syrc" typeface="Estrangelo Edessa"/>
+        <a:font script="Orya" typeface="Kalinga"/>
+        <a:font script="Mlym" typeface="Kartika"/>
+        <a:font script="Laoo" typeface="DokChampa"/>
+        <a:font script="Sinh" typeface="Iskoola Pota"/>
+        <a:font script="Mong" typeface="Mongolian Baiti"/>
+        <a:font script="Viet" typeface="Arial"/>
+        <a:font script="Uigh" typeface="Microsoft Uighur"/>
+        <a:font script="Geor" typeface="Sylfaen"/>
+        <a:font script="Armn" typeface="Arial"/>
+        <a:font script="Bugi" typeface="Leelawadee UI"/>
+        <a:font script="Bopo" typeface="Microsoft JhengHei"/>
+        <a:font script="Java" typeface="Javanese Text"/>
+        <a:font script="Lisu" typeface="Segoe UI"/>
+        <a:font script="Mymr" typeface="Myanmar Text"/>
+        <a:font script="Nkoo" typeface="Ebrima"/>
+        <a:font script="Olck" typeface="Nirmala UI"/>
+        <a:font script="Osma" typeface="Ebrima"/>
+        <a:font script="Phag" typeface="Phagspa"/>
+        <a:font script="Syrn" typeface="Estrangelo Edessa"/>
+        <a:font script="Syrj" typeface="Estrangelo Edessa"/>
+        <a:font script="Syre" typeface="Estrangelo Edessa"/>
+        <a:font script="Sora" typeface="Nirmala UI"/>
+        <a:font script="Tale" typeface="Microsoft Tai Le"/>
+        <a:font script="Talu" typeface="Microsoft New Tai Lue"/>
+        <a:font script="Tfng" typeface="Ebrima"/>
+      </a:minorFont>
+    </a:fontScheme>
+    <a:fmtScheme name="Office">
+      <a:fillStyleLst>
+        <a:solidFill>
+          <a:schemeClr val="phClr"/>
+        </a:solidFill>
+        <a:gradFill rotWithShape="1">
+          <a:gsLst>
+            <a:gs pos="0">
+              <a:schemeClr val="phClr">
+                <a:lumMod val="110000"/>
+                <a:satMod val="105000"/>
+                <a:tint val="67000"/>
+              </a:schemeClr>
+            </a:gs>
+            <a:gs pos="50000">
+              <a:schemeClr val="phClr">
+                <a:lumMod val="105000"/>
+                <a:satMod val="103000"/>
+                <a:tint val="73000"/>
+              </a:schemeClr>
+            </a:gs>
+            <a:gs pos="100000">
+              <a:schemeClr val="phClr">
+                <a:lumMod val="105000"/>
+                <a:satMod val="109000"/>
+                <a:tint val="81000"/>
+              </a:schemeClr>
+            </a:gs>
+          </a:gsLst>
+          <a:lin ang="5400000" scaled="0"/>
+        </a:gradFill>
+        <a:gradFill rotWithShape="1">
+          <a:gsLst>
+            <a:gs pos="0">
+              <a:schemeClr val="phClr">
+                <a:satMod val="103000"/>
+                <a:lumMod val="102000"/>
+                <a:tint val="94000"/>
+              </a:schemeClr>
+            </a:gs>
+            <a:gs pos="50000">
+              <a:schemeClr val="phClr">
+                <a:satMod val="110000"/>
+                <a:lumMod val="100000"/>
+                <a:shade val="100000"/>
+              </a:schemeClr>
+            </a:gs>
+            <a:gs pos="100000">
+              <a:schemeClr val="phClr">
+                <a:lumMod val="99000"/>
+                <a:satMod val="120000"/>
+                <a:shade val="78000"/>
+              </a:schemeClr>
+            </a:gs>
+          </a:gsLst>
+          <a:lin ang="5400000" scaled="0"/>
+        </a:gradFill>
+      </a:fillStyleLst>
+      <a:lnStyleLst>
+        <a:ln w="12700" cap="flat" cmpd="sng" algn="ctr">
+          <a:solidFill>
+            <a:schemeClr val="phClr"/>
+          </a:solidFill>
+          <a:prstDash val="solid"/>
+          <a:miter lim="800000"/>
+        </a:ln>
+        <a:ln w="19050" cap="flat" cmpd="sng" algn="ctr">
+          <a:solidFill>
+            <a:schemeClr val="phClr"/>
+          </a:solidFill>
+          <a:prstDash val="solid"/>
+          <a:miter lim="800000"/>
+        </a:ln>
+        <a:ln w="25400" cap="flat" cmpd="sng" algn="ctr">
+          <a:solidFill>
+            <a:schemeClr val="phClr"/>
+          </a:solidFill>
+          <a:prstDash val="solid"/>
+          <a:miter lim="800000"/>
+        </a:ln>
+      </a:lnStyleLst>
+      <a:effectStyleLst>
+        <a:effectStyle>
+          <a:effectLst/>
+        </a:effectStyle>
+        <a:effectStyle>
+          <a:effectLst/>
+        </a:effectStyle>
+        <a:effectStyle>
+          <a:effectLst>
+            <a:outerShdw blurRad="57150" dist="19050" dir="5400000" algn="ctr" rotWithShape="0">
+              <a:srgbClr val="000000">
+                <a:alpha val="63000"/>
+              </a:srgbClr>
+            </a:outerShdw>
+          </a:effectLst>
+        </a:effectStyle>
+      </a:effectStyleLst>
+      <a:bgFillStyleLst>
+        <a:solidFill>
+          <a:schemeClr val="phClr"/>
+        </a:solidFill>
+        <a:solidFill>
+          <a:schemeClr val="phClr">
+            <a:tint val="95000"/>
+            <a:satMod val="170000"/>
+          </a:schemeClr>
+        </a:solidFill>
+        <a:gradFill rotWithShape="1">
+          <a:gsLst>
+            <a:gs pos="0">
+              <a:schemeClr val="phClr">
+                <a:tint val="93000"/>
+                <a:satMod val="150000"/>
+                <a:shade val="98000"/>
+                <a:lumMod val="102000"/>
+              </a:schemeClr>
+            </a:gs>
+            <a:gs pos="50000">
+              <a:schemeClr val="phClr">
+                <a:tint val="98000"/>
+                <a:satMod val="130000"/>
+                <a:shade val="90000"/>
+                <a:lumMod val="103000"/>
+              </a:schemeClr>
+            </a:gs>
+            <a:gs pos="100000">
+              <a:schemeClr val="phClr">
+                <a:shade val="63000"/>
+                <a:satMod val="120000"/>
+              </a:schemeClr>
+            </a:gs>
+          </a:gsLst>
+          <a:lin ang="5400000" scaled="0"/>
+        </a:gradFill>
+      </a:bgFillStyleLst>
+    </a:fmtScheme>
+  </a:themeElements>
+  <a:objectDefaults>
+    <a:lnDef>
+      <a:spPr/>
+      <a:bodyPr/>
+      <a:lstStyle/>
+      <a:style>
+        <a:lnRef idx="2">
+          <a:schemeClr val="accent1"/>
+        </a:lnRef>
+        <a:fillRef idx="0">
+          <a:schemeClr val="accent1"/>
+        </a:fillRef>
+        <a:effectRef idx="1">
+          <a:schemeClr val="accent1"/>
+        </a:effectRef>
+        <a:fontRef idx="minor">
+          <a:schemeClr val="tx1"/>
+        </a:fontRef>
+      </a:style>
+    </a:lnDef>
+  </a:objectDefaults>
+  <a:extraClrSchemeLst/>
+  <a:extLst>
+    <a:ext uri="{05A4C25C-085E-4340-85A3-A5531E510DB2}">
+      <thm15:themeFamily xmlns:thm15="http://schemas.microsoft.com/office/thememl/2012/main" name="Office Theme" id="{2E142A2C-CD16-42D6-873A-C26D2A0506FA}" vid="{1BDDFF52-6CD6-40A5-AB3C-68EB2F1E4D0A}"/>
+    </a:ext>
+  </a:extLst>
+</a:theme>
 </file>